--- a/Olympic_Team_Performance_Presentation.pptx
+++ b/Olympic_Team_Performance_Presentation.pptx
@@ -3150,8 +3150,8 @@
         </p:nvSpPr>
         <p:spPr>
           <a:xfrm>
-            <a:off x="1097280" y="1645920"/>
-            <a:ext cx="10058400" cy="3657600"/>
+            <a:off x="1097280" y="1371600"/>
+            <a:ext cx="10058400" cy="4114800"/>
           </a:xfrm>
           <a:prstGeom prst="rect">
             <a:avLst/>
@@ -3178,7 +3178,7 @@
           <a:p>
             <a:pPr>
               <a:spcBef>
-                <a:spcPts val="1000"/>
+                <a:spcPts val="800"/>
               </a:spcBef>
               <a:defRPr sz="3600" b="1">
                 <a:solidFill>
@@ -3195,7 +3195,7 @@
               <a:spcBef>
                 <a:spcPts val="400"/>
               </a:spcBef>
-              <a:defRPr sz="2600" b="0">
+              <a:defRPr sz="2400" b="0">
                 <a:solidFill>
                   <a:srgbClr val="CBD5E1"/>
                 </a:solidFill>
@@ -3208,9 +3208,9 @@
           <a:p>
             <a:pPr>
               <a:spcBef>
-                <a:spcPts val="2400"/>
+                <a:spcPts val="1800"/>
               </a:spcBef>
-              <a:defRPr sz="1400">
+              <a:defRPr sz="1300">
                 <a:solidFill>
                   <a:srgbClr val="94A3B8"/>
                 </a:solidFill>
@@ -3223,16 +3223,16 @@
           <a:p>
             <a:pPr>
               <a:spcBef>
-                <a:spcPts val="3000"/>
+                <a:spcPts val="2000"/>
               </a:spcBef>
-              <a:defRPr sz="1100">
-                <a:solidFill>
-                  <a:srgbClr val="CBD5E1"/>
-                </a:solidFill>
-              </a:defRPr>
-            </a:pPr>
-            <a:r>
-              <a:t>Methodology: Random Forest (MDI &amp; Permutation) | Normal R2 Evaluation | Modern Summer Games (1960-2016)</a:t>
+              <a:defRPr sz="1200" b="1">
+                <a:solidFill>
+                  <a:srgbClr val="60A5FA"/>
+                </a:solidFill>
+              </a:defRPr>
+            </a:pPr>
+            <a:r>
+              <a:t>Live Streamlit Cloud Deployment: https://virshin1-team-performance-analysis-app-kwvw1u.streamlit.app/</a:t>
             </a:r>
           </a:p>
         </p:txBody>
@@ -3942,7 +3942,7 @@
               </a:defRPr>
             </a:pPr>
             <a:r>
-              <a:t>Limitation 2: Delegation-Level Aggregation Aggregation Loss</a:t>
+              <a:t>Limitation 2: Delegation-Level Aggregation Loss</a:t>
             </a:r>
           </a:p>
           <a:p>
@@ -4226,8 +4226,8 @@
         </p:nvSpPr>
         <p:spPr>
           <a:xfrm>
-            <a:off x="1097280" y="1280160"/>
-            <a:ext cx="10058400" cy="4572000"/>
+            <a:off x="1097280" y="1097280"/>
+            <a:ext cx="10058400" cy="4754880"/>
           </a:xfrm>
           <a:prstGeom prst="rect">
             <a:avLst/>
@@ -4269,7 +4269,7 @@
           <a:p>
             <a:pPr>
               <a:spcBef>
-                <a:spcPts val="1400"/>
+                <a:spcPts val="1200"/>
               </a:spcBef>
               <a:defRPr b="1" sz="1300">
                 <a:solidFill>
@@ -4292,7 +4292,7 @@
           <a:p>
             <a:pPr>
               <a:spcBef>
-                <a:spcPts val="1400"/>
+                <a:spcPts val="1200"/>
               </a:spcBef>
               <a:defRPr b="1" sz="1300">
                 <a:solidFill>
@@ -4315,7 +4315,7 @@
           <a:p>
             <a:pPr>
               <a:spcBef>
-                <a:spcPts val="1400"/>
+                <a:spcPts val="1200"/>
               </a:spcBef>
               <a:defRPr b="1" sz="1300">
                 <a:solidFill>
@@ -4338,7 +4338,7 @@
           <a:p>
             <a:pPr>
               <a:spcBef>
-                <a:spcPts val="1400"/>
+                <a:spcPts val="1200"/>
               </a:spcBef>
               <a:defRPr b="1" sz="1300">
                 <a:solidFill>
@@ -4347,7 +4347,7 @@
               </a:defRPr>
             </a:pPr>
             <a:r>
-              <a:t>Production Artifacts: </a:t>
+              <a:t>Live Cloud Application: </a:t>
             </a:r>
             <a:r>
               <a:rPr b="0">
@@ -4355,7 +4355,7 @@
                   <a:srgbClr val="E2E8F0"/>
                 </a:solidFill>
               </a:rPr>
-              <a:t>Complete pipeline delivered with fully executed Jupyter notebook, clean standalone GitHub repo, and live Streamlit dashboard on http://localhost:8501.</a:t>
+              <a:t>Production application deployed live on Streamlit Cloud: https://virshin1-team-performance-analysis-app-kwvw1u.streamlit.app/ (accessible anywhere).</a:t>
             </a:r>
           </a:p>
         </p:txBody>
@@ -4796,7 +4796,7 @@
               </a:defRPr>
             </a:pPr>
             <a:r>
-              <a:t>Interactive Streamlit App: </a:t>
+              <a:t>Live Cloud Application: </a:t>
             </a:r>
             <a:r>
               <a:rPr b="0">
@@ -4804,7 +4804,7 @@
                   <a:srgbClr val="475569"/>
                 </a:solidFill>
               </a:rPr>
-              <a:t>Production-grade wide dashboard allowing scenario simulations and live factor diagnostics against Olympic benchmarks.</a:t>
+              <a:t>Production-grade wide dashboard deployed live on Streamlit Community Cloud with interactive scenario simulation.</a:t>
             </a:r>
           </a:p>
         </p:txBody>
@@ -5326,7 +5326,7 @@
                   <a:srgbClr val="475569"/>
                 </a:solidFill>
               </a:rPr>
-              <a:t>Extracted from historical Olympic archives covering all modern Summer Olympiads, encompassing over 200,000 individual competitor-event records.</a:t>
+              <a:t>Extracted from historical Olympic archives covering all modern Summer Olympiads, encompassing over 200,000 competitor records.</a:t>
             </a:r>
           </a:p>
           <a:p>
@@ -5349,7 +5349,7 @@
                   <a:srgbClr val="475569"/>
                 </a:solidFill>
               </a:rPr>
-              <a:t>Crucial Sports Rule: In team events (e.g., Football 18 players, Rowing 8 crew), all players receive medals, but the delegation only wins ONE official medal. Deduplicated strictly to (Games, Year, Event, Medal).</a:t>
+              <a:t>Crucial Sports Rule: In team events (e.g. Football 18 players), all receive medals, but the delegation wins ONE official medal. Deduplicated strictly to (Games, Year, Event, Medal).</a:t>
             </a:r>
           </a:p>
           <a:p>
@@ -5372,7 +5372,7 @@
                   <a:srgbClr val="475569"/>
                 </a:solidFill>
               </a:rPr>
-              <a:t>Consolidated to the delegation level per Olympic Games (NOC, Year). Features capture scale, discipline diversity, demographic distributions, and temporal momentum.</a:t>
+              <a:t>Consolidated to the delegation level per Olympic Games (NOC, Year). Captures scale, diversity, demographic distributions, and momentum.</a:t>
             </a:r>
           </a:p>
           <a:p>
@@ -5395,7 +5395,7 @@
                   <a:srgbClr val="475569"/>
                 </a:solidFill>
               </a:rPr>
-              <a:t>Missing height/weight records for early games imputed using discipline-gender median baselines rather than global means, preserving authentic sports body-type distributions.</a:t>
+              <a:t>Missing height/weight records for early games imputed using discipline-gender median baselines rather than global means.</a:t>
             </a:r>
           </a:p>
           <a:p>
@@ -5418,7 +5418,7 @@
                   <a:srgbClr val="475569"/>
                 </a:solidFill>
               </a:rPr>
-              <a:t>Engineered prev_medals: Total medals achieved in the prior Olympic cycle for that specific nation, capturing institutional funding and coaching pipeline continuity.</a:t>
+              <a:t>Engineered prev_medals: Total medals achieved in the prior Olympic cycle for that nation, capturing institutional funding continuity.</a:t>
             </a:r>
           </a:p>
         </p:txBody>
@@ -5713,7 +5713,7 @@
               </a:defRPr>
             </a:pPr>
             <a:r>
-              <a:t>Distinct sports disciplines contested (Athletics, Aquatics, etc.) (Range: 1 to 32)</a:t>
+              <a:t>Distinct sports disciplines contested (Range: 1 to 32)</a:t>
             </a:r>
           </a:p>
         </p:txBody>
@@ -6289,7 +6289,7 @@
                   <a:srgbClr val="475569"/>
                 </a:solidFill>
               </a:rPr>
-              <a:t>Athlete biometrics (mean_age r=+0.012, mean_bmi r=-0.006) show virtually zero linear correlation because optimal body types vary dramatically across sports (e.g. Gymnastics vs Shot Put).</a:t>
+              <a:t>Athlete biometrics (mean_age r=+0.012, mean_bmi r=-0.006) show virtually zero linear correlation because optimal body types vary dramatically across sports.</a:t>
             </a:r>
           </a:p>
         </p:txBody>
@@ -8856,7 +8856,7 @@
               </a:defRPr>
             </a:pPr>
             <a:r>
-              <a:t>1. Benchmark Scenario Engine</a:t>
+              <a:t>1. Live Cloud Deployment</a:t>
             </a:r>
           </a:p>
           <a:p>
@@ -8868,7 +8868,7 @@
               </a:defRPr>
             </a:pPr>
             <a:r>
-              <a:t>Includes 1-click preset profiles for rapid testing: Global Powerhouse (USA/China), Mid-Tier Contender (Netherlands/Brazil), and Emerging Delegation. Enables examiners to immediately test realistic profiles.</a:t>
+              <a:t>Deployed live on Streamlit Community Cloud: https://virshin1-team-performance-analysis-app-kwvw1u.streamlit.app/ - accessible globally with zero local installation required.</a:t>
             </a:r>
           </a:p>
         </p:txBody>
@@ -8922,7 +8922,7 @@
               </a:defRPr>
             </a:pPr>
             <a:r>
-              <a:t>2. Wide Dashboard Layout</a:t>
+              <a:t>2. Benchmark Scenario Engine</a:t>
             </a:r>
           </a:p>
           <a:p>
@@ -8934,7 +8934,7 @@
               </a:defRPr>
             </a:pPr>
             <a:r>
-              <a:t>Configured with st.set_page_config(layout='wide') separating user parameter controls in the left sidebar from real-time analytics in the main canvas.</a:t>
+              <a:t>Includes 1-click preset profiles for rapid testing: Global Powerhouse (USA/China), Mid-Tier Contender (Netherlands/Brazil), and Emerging Delegation. Enables examiners to immediately test realistic profiles.</a:t>
             </a:r>
           </a:p>
         </p:txBody>
@@ -8988,7 +8988,7 @@
               </a:defRPr>
             </a:pPr>
             <a:r>
-              <a:t>3. Dual Model Inference Engine</a:t>
+              <a:t>3. Wide Dashboard Layout</a:t>
             </a:r>
           </a:p>
           <a:p>
@@ -9000,7 +9000,7 @@
               </a:defRPr>
             </a:pPr>
             <a:r>
-              <a:t>Simultaneously executes Random Forest classification for podium probability and Gradient Boosting regression for exact medal count forecasting.</a:t>
+              <a:t>Configured with st.set_page_config(layout='wide') separating user parameter controls in the left sidebar from real-time analytics in the main canvas.</a:t>
             </a:r>
           </a:p>
         </p:txBody>
@@ -9054,7 +9054,7 @@
               </a:defRPr>
             </a:pPr>
             <a:r>
-              <a:t>4. Visual Probability Breakdown</a:t>
+              <a:t>4. Dual Model Inference Engine</a:t>
             </a:r>
           </a:p>
           <a:p>
@@ -9066,7 +9066,7 @@
               </a:defRPr>
             </a:pPr>
             <a:r>
-              <a:t>Dynamic Altair probability bar visualizing confidence spread between non-podium and medal-winning outcomes.</a:t>
+              <a:t>Simultaneously executes Random Forest classification for podium probability and Gradient Boosting regression for exact medal count forecasting.</a:t>
             </a:r>
           </a:p>
         </p:txBody>
@@ -9132,7 +9132,7 @@
               </a:defRPr>
             </a:pPr>
             <a:r>
-              <a:t>Compares user-configured inputs directly against historical medians of medal-winning vs non-winning Olympic teams.</a:t>
+              <a:t>Compares user-configured inputs directly against historical medians of medal-winning vs non-winning Olympic teams using responsive, theme-adaptive dataframes.</a:t>
             </a:r>
           </a:p>
         </p:txBody>

--- a/Olympic_Team_Performance_Presentation.pptx
+++ b/Olympic_Team_Performance_Presentation.pptx
@@ -4226,8 +4226,8 @@
         </p:nvSpPr>
         <p:spPr>
           <a:xfrm>
-            <a:off x="1097280" y="1097280"/>
-            <a:ext cx="10058400" cy="4754880"/>
+            <a:off x="1097280" y="1645920"/>
+            <a:ext cx="10058400" cy="4114800"/>
           </a:xfrm>
           <a:prstGeom prst="rect">
             <a:avLst/>
@@ -4248,7 +4248,22 @@
               </a:defRPr>
             </a:pPr>
             <a:r>
-              <a:t>PROJECT SUMMARY &amp; VIVA READINESS</a:t>
+              <a:t>CASE STUDY: TEAM PERFORMANCE ANALYSIS</a:t>
+            </a:r>
+          </a:p>
+          <a:p>
+            <a:pPr>
+              <a:spcBef>
+                <a:spcPts val="800"/>
+              </a:spcBef>
+              <a:defRPr sz="4000" b="1">
+                <a:solidFill>
+                  <a:srgbClr val="FFFFFF"/>
+                </a:solidFill>
+              </a:defRPr>
+            </a:pPr>
+            <a:r>
+              <a:t>Thank You</a:t>
             </a:r>
           </a:p>
           <a:p>
@@ -4256,106 +4271,52 @@
               <a:spcBef>
                 <a:spcPts val="600"/>
               </a:spcBef>
-              <a:defRPr sz="2800" b="1">
-                <a:solidFill>
-                  <a:srgbClr val="FFFFFF"/>
-                </a:solidFill>
-              </a:defRPr>
-            </a:pPr>
-            <a:r>
-              <a:t>Key Takeaways for Examination Defense</a:t>
+              <a:defRPr sz="2000">
+                <a:solidFill>
+                  <a:srgbClr val="CBD5E1"/>
+                </a:solidFill>
+              </a:defRPr>
+            </a:pPr>
+            <a:r>
+              <a:t>Questions &amp; Examination Defense</a:t>
             </a:r>
           </a:p>
           <a:p>
             <a:pPr>
               <a:spcBef>
-                <a:spcPts val="1200"/>
+                <a:spcPts val="2000"/>
               </a:spcBef>
-              <a:defRPr b="1" sz="1300">
-                <a:solidFill>
-                  <a:srgbClr val="FEF08A"/>
-                </a:solidFill>
-              </a:defRPr>
-            </a:pPr>
-            <a:r>
-              <a:t>Defensible Model Choice: </a:t>
-            </a:r>
-            <a:r>
-              <a:rPr b="0">
-                <a:solidFill>
-                  <a:srgbClr val="E2E8F0"/>
-                </a:solidFill>
-              </a:rPr>
-              <a:t>Random Forest selected for non-linear threshold handling, outlier robustness on skewed sports distributions, and intrinsic Gini importance attribution.</a:t>
+              <a:defRPr sz="1300">
+                <a:solidFill>
+                  <a:srgbClr val="94A3B8"/>
+                </a:solidFill>
+              </a:defRPr>
+            </a:pPr>
+            <a:r>
+              <a:t>Candidate: R Virshin | Roll No: 150096724147</a:t>
+            </a:r>
+            <a:br/>
+            <a:r>
+              <a:t>ITM Skills University | School of Future Tech | B.Tech CSE Semester V</a:t>
             </a:r>
           </a:p>
           <a:p>
             <a:pPr>
               <a:spcBef>
-                <a:spcPts val="1200"/>
+                <a:spcPts val="1800"/>
               </a:spcBef>
-              <a:defRPr b="1" sz="1300">
-                <a:solidFill>
-                  <a:srgbClr val="FEF08A"/>
-                </a:solidFill>
-              </a:defRPr>
-            </a:pPr>
-            <a:r>
-              <a:t>Clear Answer to Problem Statement: </a:t>
-            </a:r>
-            <a:r>
-              <a:rPr b="0">
-                <a:solidFill>
-                  <a:srgbClr val="E2E8F0"/>
-                </a:solidFill>
-              </a:rPr>
-              <a:t>Roster scale and discipline diversity account for 78.9% of predictive power; past momentum accounts for 11.3%; biometrics provide only 9.8% fine-tuning.</a:t>
-            </a:r>
-          </a:p>
-          <a:p>
-            <a:pPr>
-              <a:spcBef>
-                <a:spcPts val="1200"/>
-              </a:spcBef>
-              <a:defRPr b="1" sz="1300">
-                <a:solidFill>
-                  <a:srgbClr val="FEF08A"/>
-                </a:solidFill>
-              </a:defRPr>
-            </a:pPr>
-            <a:r>
-              <a:t>Sound Evaluation: </a:t>
-            </a:r>
-            <a:r>
-              <a:rPr b="0">
-                <a:solidFill>
-                  <a:srgbClr val="E2E8F0"/>
-                </a:solidFill>
-              </a:rPr>
-              <a:t>Evaluated strictly using normal Train R2 (0.9863) and Test R2 (0.8838) without cross-validation R2 averaging, and 90.51% classification accuracy.</a:t>
-            </a:r>
-          </a:p>
-          <a:p>
-            <a:pPr>
-              <a:spcBef>
-                <a:spcPts val="1200"/>
-              </a:spcBef>
-              <a:defRPr b="1" sz="1300">
-                <a:solidFill>
-                  <a:srgbClr val="FEF08A"/>
-                </a:solidFill>
-              </a:defRPr>
-            </a:pPr>
-            <a:r>
-              <a:t>Live Cloud Application: </a:t>
-            </a:r>
-            <a:r>
-              <a:rPr b="0">
-                <a:solidFill>
-                  <a:srgbClr val="E2E8F0"/>
-                </a:solidFill>
-              </a:rPr>
-              <a:t>Production application deployed live on Streamlit Cloud: https://virshin1-team-performance-analysis-app-kwvw1u.streamlit.app/ (accessible anywhere).</a:t>
+              <a:defRPr sz="1200" b="1">
+                <a:solidFill>
+                  <a:srgbClr val="60A5FA"/>
+                </a:solidFill>
+              </a:defRPr>
+            </a:pPr>
+            <a:r>
+              <a:t>Live Streamlit Cloud Deployment: https://virshin1-team-performance-analysis-app-kwvw1u.streamlit.app/</a:t>
+            </a:r>
+            <a:br/>
+            <a:r>
+              <a:t>GitHub Source: https://github.com/Virshin1/Team-Performance-Analysis</a:t>
             </a:r>
           </a:p>
         </p:txBody>

--- a/Olympic_Team_Performance_Presentation.pptx
+++ b/Olympic_Team_Performance_Presentation.pptx
@@ -3150,8 +3150,8 @@
         </p:nvSpPr>
         <p:spPr>
           <a:xfrm>
-            <a:off x="1097280" y="1371600"/>
-            <a:ext cx="10058400" cy="4114800"/>
+            <a:off x="1097280" y="1280160"/>
+            <a:ext cx="10058400" cy="4389120"/>
           </a:xfrm>
           <a:prstGeom prst="rect">
             <a:avLst/>
@@ -3165,14 +3165,14 @@
           <a:lstStyle/>
           <a:p>
             <a:pPr>
-              <a:defRPr sz="1200" b="1">
+              <a:defRPr sz="1100" b="1">
                 <a:solidFill>
                   <a:srgbClr val="93C5FD"/>
                 </a:solidFill>
               </a:defRPr>
             </a:pPr>
             <a:r>
-              <a:t>ACADEMIC MACHINE LEARNING PROJECT &amp; DEFENSE</a:t>
+              <a:t>ACADEMIC MACHINE LEARNING PROJECT &amp; VIVA DEFENSE</a:t>
             </a:r>
           </a:p>
           <a:p>
@@ -3202,13 +3202,13 @@
               </a:defRPr>
             </a:pPr>
             <a:r>
-              <a:t>Empirical Factors Associated with Stronger Olympic Results</a:t>
+              <a:t>Measurable Determinants of Olympic Team Outcomes</a:t>
             </a:r>
           </a:p>
           <a:p>
             <a:pPr>
               <a:spcBef>
-                <a:spcPts val="1800"/>
+                <a:spcPts val="1600"/>
               </a:spcBef>
               <a:defRPr sz="1300">
                 <a:solidFill>
@@ -3223,16 +3223,35 @@
           <a:p>
             <a:pPr>
               <a:spcBef>
-                <a:spcPts val="2000"/>
+                <a:spcPts val="1600"/>
               </a:spcBef>
-              <a:defRPr sz="1200" b="1">
+              <a:defRPr sz="1200">
+                <a:solidFill>
+                  <a:srgbClr val="CBD5E1"/>
+                </a:solidFill>
+              </a:defRPr>
+            </a:pPr>
+            <a:r>
+              <a:t>Candidate: R Virshin | Roll No: 150096724147</a:t>
+            </a:r>
+            <a:br/>
+            <a:r>
+              <a:t>ITM Skills University | School of Future Tech | B.Tech CSE Semester V</a:t>
+            </a:r>
+          </a:p>
+          <a:p>
+            <a:pPr>
+              <a:spcBef>
+                <a:spcPts val="1200"/>
+              </a:spcBef>
+              <a:defRPr sz="1150" b="1">
                 <a:solidFill>
                   <a:srgbClr val="60A5FA"/>
                 </a:solidFill>
               </a:defRPr>
             </a:pPr>
             <a:r>
-              <a:t>Live Streamlit Cloud Deployment: https://virshin1-team-performance-analysis-app-kwvw1u.streamlit.app/</a:t>
+              <a:t>Live Streamlit Cloud Application: https://virshin1-team-performance-analysis-app-kwvw1u.streamlit.app/</a:t>
             </a:r>
           </a:p>
         </p:txBody>
@@ -3257,140 +3276,23 @@
       <p:grpSpPr/>
       <p:sp>
         <p:nvSpPr>
-          <p:cNvPr id="2" name="TextBox 1"/>
-          <p:cNvSpPr txBox="1"/>
-          <p:nvPr/>
-        </p:nvSpPr>
-        <p:spPr>
-          <a:xfrm>
-            <a:off x="731520" y="365760"/>
-            <a:ext cx="10698480" cy="320040"/>
-          </a:xfrm>
-          <a:prstGeom prst="rect">
-            <a:avLst/>
-          </a:prstGeom>
-          <a:noFill/>
-        </p:spPr>
-        <p:txBody>
-          <a:bodyPr wrap="square">
-            <a:spAutoFit/>
-          </a:bodyPr>
-          <a:lstStyle/>
-          <a:p>
-            <a:pPr>
-              <a:defRPr sz="1000" b="1">
-                <a:solidFill>
-                  <a:srgbClr val="2563EB"/>
-                </a:solidFill>
-              </a:defRPr>
-            </a:pPr>
-            <a:r>
-              <a:t>SPORTS ANALYTICS &amp; MACHINE LEARNING</a:t>
-            </a:r>
-          </a:p>
-        </p:txBody>
-      </p:sp>
-      <p:sp>
-        <p:nvSpPr>
-          <p:cNvPr id="3" name="TextBox 2"/>
-          <p:cNvSpPr txBox="1"/>
-          <p:nvPr/>
-        </p:nvSpPr>
-        <p:spPr>
-          <a:xfrm>
-            <a:off x="731520" y="640080"/>
-            <a:ext cx="10698480" cy="640080"/>
-          </a:xfrm>
-          <a:prstGeom prst="rect">
-            <a:avLst/>
-          </a:prstGeom>
-          <a:noFill/>
-        </p:spPr>
-        <p:txBody>
-          <a:bodyPr wrap="square">
-            <a:spAutoFit/>
-          </a:bodyPr>
-          <a:lstStyle/>
-          <a:p>
-            <a:pPr>
-              <a:defRPr sz="2200" b="1">
-                <a:solidFill>
-                  <a:srgbClr val="0F172A"/>
-                </a:solidFill>
-              </a:defRPr>
-            </a:pPr>
-            <a:r>
-              <a:t>Strategic Recommendations for Sports Organizations</a:t>
-            </a:r>
-          </a:p>
-        </p:txBody>
-      </p:sp>
-      <p:sp>
-        <p:nvSpPr>
-          <p:cNvPr id="4" name="Rectangle 3"/>
+          <p:cNvPr id="2" name="Rectangle 1"/>
           <p:cNvSpPr/>
           <p:nvPr/>
         </p:nvSpPr>
         <p:spPr>
           <a:xfrm>
-            <a:off x="731520" y="1280160"/>
-            <a:ext cx="10728655" cy="18288"/>
+            <a:off x="0" y="0"/>
+            <a:ext cx="12191695" cy="6858000"/>
           </a:xfrm>
           <a:prstGeom prst="rect">
-            <a:avLst/>
-          </a:prstGeom>
-          <a:solidFill>
-            <a:srgbClr val="E2E8F0"/>
-          </a:solidFill>
-          <a:ln>
-            <a:solidFill>
-              <a:srgbClr val="E2E8F0"/>
-            </a:solidFill>
-          </a:ln>
-        </p:spPr>
-        <p:style>
-          <a:lnRef idx="1">
-            <a:schemeClr val="accent1"/>
-          </a:lnRef>
-          <a:fillRef idx="3">
-            <a:schemeClr val="accent1"/>
-          </a:fillRef>
-          <a:effectRef idx="2">
-            <a:schemeClr val="accent1"/>
-          </a:effectRef>
-          <a:fontRef idx="minor">
-            <a:schemeClr val="lt1"/>
-          </a:fontRef>
-        </p:style>
-        <p:txBody>
-          <a:bodyPr rtlCol="0" anchor="ctr"/>
-          <a:lstStyle/>
-          <a:p>
-            <a:pPr algn="ctr"/>
-          </a:p>
-        </p:txBody>
-      </p:sp>
-      <p:sp>
-        <p:nvSpPr>
-          <p:cNvPr id="5" name="Rounded Rectangle 4"/>
-          <p:cNvSpPr/>
-          <p:nvPr/>
-        </p:nvSpPr>
-        <p:spPr>
-          <a:xfrm>
-            <a:off x="731520" y="1554480"/>
-            <a:ext cx="3383280" cy="4754880"/>
-          </a:xfrm>
-          <a:prstGeom prst="roundRect">
             <a:avLst/>
           </a:prstGeom>
           <a:solidFill>
             <a:srgbClr val="F8FAFC"/>
           </a:solidFill>
           <a:ln>
-            <a:solidFill>
-              <a:srgbClr val="E2E8F0"/>
-            </a:solidFill>
+            <a:noFill/>
           </a:ln>
         </p:spPr>
         <p:style>
@@ -3408,96 +3310,103 @@
           </a:fontRef>
         </p:style>
         <p:txBody>
-          <a:bodyPr rtlCol="0" anchor="ctr" wrap="square"/>
-          <a:lstStyle/>
-          <a:p>
-            <a:pPr algn="ctr">
-              <a:defRPr sz="1300" b="1">
-                <a:solidFill>
-                  <a:srgbClr val="1E3A8A"/>
-                </a:solidFill>
-              </a:defRPr>
-            </a:pPr>
-            <a:r>
-              <a:t>Strategic Priority 1: Broaden Qualification</a:t>
-            </a:r>
-          </a:p>
-          <a:p>
-            <a:pPr>
-              <a:spcBef>
-                <a:spcPts val="1200"/>
-              </a:spcBef>
-              <a:defRPr sz="1100" b="1">
+          <a:bodyPr rtlCol="0" anchor="ctr"/>
+          <a:lstStyle/>
+          <a:p>
+            <a:pPr algn="ctr"/>
+          </a:p>
+        </p:txBody>
+      </p:sp>
+      <p:sp>
+        <p:nvSpPr>
+          <p:cNvPr id="3" name="TextBox 2"/>
+          <p:cNvSpPr txBox="1"/>
+          <p:nvPr/>
+        </p:nvSpPr>
+        <p:spPr>
+          <a:xfrm>
+            <a:off x="731520" y="365760"/>
+            <a:ext cx="10698480" cy="320040"/>
+          </a:xfrm>
+          <a:prstGeom prst="rect">
+            <a:avLst/>
+          </a:prstGeom>
+          <a:noFill/>
+        </p:spPr>
+        <p:txBody>
+          <a:bodyPr wrap="square">
+            <a:spAutoFit/>
+          </a:bodyPr>
+          <a:lstStyle/>
+          <a:p>
+            <a:pPr>
+              <a:defRPr sz="1000" b="1">
+                <a:solidFill>
+                  <a:srgbClr val="1D4ED8"/>
+                </a:solidFill>
+              </a:defRPr>
+            </a:pPr>
+            <a:r>
+              <a:t>SPORTS ANALYTICS &amp; MACHINE LEARNING</a:t>
+            </a:r>
+          </a:p>
+        </p:txBody>
+      </p:sp>
+      <p:sp>
+        <p:nvSpPr>
+          <p:cNvPr id="4" name="TextBox 3"/>
+          <p:cNvSpPr txBox="1"/>
+          <p:nvPr/>
+        </p:nvSpPr>
+        <p:spPr>
+          <a:xfrm>
+            <a:off x="731520" y="640080"/>
+            <a:ext cx="10698480" cy="640080"/>
+          </a:xfrm>
+          <a:prstGeom prst="rect">
+            <a:avLst/>
+          </a:prstGeom>
+          <a:noFill/>
+        </p:spPr>
+        <p:txBody>
+          <a:bodyPr wrap="square">
+            <a:spAutoFit/>
+          </a:bodyPr>
+          <a:lstStyle/>
+          <a:p>
+            <a:pPr>
+              <a:defRPr sz="2200" b="1">
                 <a:solidFill>
                   <a:srgbClr val="0F172A"/>
                 </a:solidFill>
               </a:defRPr>
             </a:pPr>
             <a:r>
-              <a:t>The Roster Threshold</a:t>
-            </a:r>
-          </a:p>
-          <a:p>
-            <a:pPr>
-              <a:defRPr sz="950">
-                <a:solidFill>
-                  <a:srgbClr val="475569"/>
-                </a:solidFill>
-              </a:defRPr>
-            </a:pPr>
-            <a:r>
-              <a:t>Teams with &lt;15 athletes win medals &lt;5% of the time. Scaling roster to &gt;45 athletes raises podium odds past 65%.</a:t>
-            </a:r>
-          </a:p>
-          <a:p>
-            <a:pPr>
-              <a:spcBef>
-                <a:spcPts val="1200"/>
-              </a:spcBef>
-              <a:defRPr sz="1100" b="1">
-                <a:solidFill>
-                  <a:srgbClr val="0F172A"/>
-                </a:solidFill>
-              </a:defRPr>
-            </a:pPr>
-            <a:r>
-              <a:t>Expand Discipline Breadth</a:t>
-            </a:r>
-          </a:p>
-          <a:p>
-            <a:pPr>
-              <a:defRPr sz="950">
-                <a:solidFill>
-                  <a:srgbClr val="475569"/>
-                </a:solidFill>
-              </a:defRPr>
-            </a:pPr>
-            <a:r>
-              <a:t>Instead of over-investing in a single sport, expanding into 2-3 additional disciplines significantly reduces qualification volatility.</a:t>
-            </a:r>
-          </a:p>
-        </p:txBody>
-      </p:sp>
-      <p:sp>
-        <p:nvSpPr>
-          <p:cNvPr id="6" name="Rounded Rectangle 5"/>
+              <a:t>Strategic Recommendations for Sports Organizations</a:t>
+            </a:r>
+          </a:p>
+        </p:txBody>
+      </p:sp>
+      <p:sp>
+        <p:nvSpPr>
+          <p:cNvPr id="5" name="Rectangle 4"/>
           <p:cNvSpPr/>
           <p:nvPr/>
         </p:nvSpPr>
         <p:spPr>
           <a:xfrm>
-            <a:off x="4389120" y="1554480"/>
-            <a:ext cx="3383280" cy="4754880"/>
-          </a:xfrm>
-          <a:prstGeom prst="roundRect">
+            <a:off x="731520" y="1280160"/>
+            <a:ext cx="10728655" cy="18288"/>
+          </a:xfrm>
+          <a:prstGeom prst="rect">
             <a:avLst/>
           </a:prstGeom>
           <a:solidFill>
-            <a:srgbClr val="F8FAFC"/>
+            <a:srgbClr val="CBD5E1"/>
           </a:solidFill>
           <a:ln>
             <a:solidFill>
-              <a:srgbClr val="E2E8F0"/>
+              <a:srgbClr val="CBD5E1"/>
             </a:solidFill>
           </a:ln>
         </p:spPr>
@@ -3516,96 +3425,33 @@
           </a:fontRef>
         </p:style>
         <p:txBody>
-          <a:bodyPr rtlCol="0" anchor="ctr" wrap="square"/>
-          <a:lstStyle/>
-          <a:p>
-            <a:pPr algn="ctr">
-              <a:defRPr sz="1300" b="1">
-                <a:solidFill>
-                  <a:srgbClr val="1E3A8A"/>
-                </a:solidFill>
-              </a:defRPr>
-            </a:pPr>
-            <a:r>
-              <a:t>Strategic Priority 2: Sustain Funding Cycles</a:t>
-            </a:r>
-          </a:p>
-          <a:p>
-            <a:pPr>
-              <a:spcBef>
-                <a:spcPts val="1200"/>
-              </a:spcBef>
-              <a:defRPr sz="1100" b="1">
-                <a:solidFill>
-                  <a:srgbClr val="0F172A"/>
-                </a:solidFill>
-              </a:defRPr>
-            </a:pPr>
-            <a:r>
-              <a:t>Quadrennial Momentum</a:t>
-            </a:r>
-          </a:p>
-          <a:p>
-            <a:pPr>
-              <a:defRPr sz="950">
-                <a:solidFill>
-                  <a:srgbClr val="475569"/>
-                </a:solidFill>
-              </a:defRPr>
-            </a:pPr>
-            <a:r>
-              <a:t>Historical medals won carries r = 0.901 correlation with current output. Funding cuts after a poor Olympiad cause catastrophic multi-cycle decay.</a:t>
-            </a:r>
-          </a:p>
-          <a:p>
-            <a:pPr>
-              <a:spcBef>
-                <a:spcPts val="1200"/>
-              </a:spcBef>
-              <a:defRPr sz="1100" b="1">
-                <a:solidFill>
-                  <a:srgbClr val="0F172A"/>
-                </a:solidFill>
-              </a:defRPr>
-            </a:pPr>
-            <a:r>
-              <a:t>Protect Youth Pipelines</a:t>
-            </a:r>
-          </a:p>
-          <a:p>
-            <a:pPr>
-              <a:defRPr sz="950">
-                <a:solidFill>
-                  <a:srgbClr val="475569"/>
-                </a:solidFill>
-              </a:defRPr>
-            </a:pPr>
-            <a:r>
-              <a:t>Retaining elite coaching staff preserves institutional knowledge regardless of individual athlete retirement.</a:t>
-            </a:r>
-          </a:p>
-        </p:txBody>
-      </p:sp>
-      <p:sp>
-        <p:nvSpPr>
-          <p:cNvPr id="7" name="Rounded Rectangle 6"/>
+          <a:bodyPr rtlCol="0" anchor="ctr"/>
+          <a:lstStyle/>
+          <a:p>
+            <a:pPr algn="ctr"/>
+          </a:p>
+        </p:txBody>
+      </p:sp>
+      <p:sp>
+        <p:nvSpPr>
+          <p:cNvPr id="6" name="Rounded Rectangle 5"/>
           <p:cNvSpPr/>
           <p:nvPr/>
         </p:nvSpPr>
         <p:spPr>
           <a:xfrm>
-            <a:off x="8046720" y="1554480"/>
+            <a:off x="731520" y="1554480"/>
             <a:ext cx="3383280" cy="4754880"/>
           </a:xfrm>
           <a:prstGeom prst="roundRect">
             <a:avLst/>
           </a:prstGeom>
           <a:solidFill>
-            <a:srgbClr val="F8FAFC"/>
+            <a:srgbClr val="FFFFFF"/>
           </a:solidFill>
           <a:ln>
             <a:solidFill>
-              <a:srgbClr val="E2E8F0"/>
+              <a:srgbClr val="CBD5E1"/>
             </a:solidFill>
           </a:ln>
         </p:spPr>
@@ -3635,7 +3481,7 @@
               </a:defRPr>
             </a:pPr>
             <a:r>
-              <a:t>Strategic Priority 3: Leverage Host Opportunities</a:t>
+              <a:t>Strategic Priority 1: Broaden Qualification</a:t>
             </a:r>
           </a:p>
           <a:p>
@@ -3650,19 +3496,19 @@
               </a:defRPr>
             </a:pPr>
             <a:r>
-              <a:t>Maximize Quota Allowances</a:t>
+              <a:t>The Roster Threshold</a:t>
             </a:r>
           </a:p>
           <a:p>
             <a:pPr>
               <a:defRPr sz="950">
                 <a:solidFill>
-                  <a:srgbClr val="475569"/>
-                </a:solidFill>
-              </a:defRPr>
-            </a:pPr>
-            <a:r>
-              <a:t>Host nations receive automatic qualification quotas. Successfully converting these into permanent infrastructure yields lasting competitive advantages.</a:t>
+                  <a:srgbClr val="334155"/>
+                </a:solidFill>
+              </a:defRPr>
+            </a:pPr>
+            <a:r>
+              <a:t>Teams with &lt;15 athletes win medals &lt;5% of the time. Scaling roster to &gt;45 athletes raises podium odds past 65%.</a:t>
             </a:r>
           </a:p>
           <a:p>
@@ -3677,6 +3523,222 @@
               </a:defRPr>
             </a:pPr>
             <a:r>
+              <a:t>Expand Discipline Breadth</a:t>
+            </a:r>
+          </a:p>
+          <a:p>
+            <a:pPr>
+              <a:defRPr sz="950">
+                <a:solidFill>
+                  <a:srgbClr val="334155"/>
+                </a:solidFill>
+              </a:defRPr>
+            </a:pPr>
+            <a:r>
+              <a:t>Instead of over-investing in a single sport, expanding into 2-3 additional disciplines significantly reduces qualification volatility.</a:t>
+            </a:r>
+          </a:p>
+        </p:txBody>
+      </p:sp>
+      <p:sp>
+        <p:nvSpPr>
+          <p:cNvPr id="7" name="Rounded Rectangle 6"/>
+          <p:cNvSpPr/>
+          <p:nvPr/>
+        </p:nvSpPr>
+        <p:spPr>
+          <a:xfrm>
+            <a:off x="4389120" y="1554480"/>
+            <a:ext cx="3383280" cy="4754880"/>
+          </a:xfrm>
+          <a:prstGeom prst="roundRect">
+            <a:avLst/>
+          </a:prstGeom>
+          <a:solidFill>
+            <a:srgbClr val="FFFFFF"/>
+          </a:solidFill>
+          <a:ln>
+            <a:solidFill>
+              <a:srgbClr val="CBD5E1"/>
+            </a:solidFill>
+          </a:ln>
+        </p:spPr>
+        <p:style>
+          <a:lnRef idx="1">
+            <a:schemeClr val="accent1"/>
+          </a:lnRef>
+          <a:fillRef idx="3">
+            <a:schemeClr val="accent1"/>
+          </a:fillRef>
+          <a:effectRef idx="2">
+            <a:schemeClr val="accent1"/>
+          </a:effectRef>
+          <a:fontRef idx="minor">
+            <a:schemeClr val="lt1"/>
+          </a:fontRef>
+        </p:style>
+        <p:txBody>
+          <a:bodyPr rtlCol="0" anchor="ctr" wrap="square"/>
+          <a:lstStyle/>
+          <a:p>
+            <a:pPr algn="ctr">
+              <a:defRPr sz="1300" b="1">
+                <a:solidFill>
+                  <a:srgbClr val="1E3A8A"/>
+                </a:solidFill>
+              </a:defRPr>
+            </a:pPr>
+            <a:r>
+              <a:t>Strategic Priority 2: Sustain Funding Cycles</a:t>
+            </a:r>
+          </a:p>
+          <a:p>
+            <a:pPr>
+              <a:spcBef>
+                <a:spcPts val="1200"/>
+              </a:spcBef>
+              <a:defRPr sz="1100" b="1">
+                <a:solidFill>
+                  <a:srgbClr val="0F172A"/>
+                </a:solidFill>
+              </a:defRPr>
+            </a:pPr>
+            <a:r>
+              <a:t>Quadrennial Momentum</a:t>
+            </a:r>
+          </a:p>
+          <a:p>
+            <a:pPr>
+              <a:defRPr sz="950">
+                <a:solidFill>
+                  <a:srgbClr val="334155"/>
+                </a:solidFill>
+              </a:defRPr>
+            </a:pPr>
+            <a:r>
+              <a:t>Historical medals won carries r = 0.901 correlation with current output. Funding cuts after a poor Olympiad cause catastrophic multi-cycle decay.</a:t>
+            </a:r>
+          </a:p>
+          <a:p>
+            <a:pPr>
+              <a:spcBef>
+                <a:spcPts val="1200"/>
+              </a:spcBef>
+              <a:defRPr sz="1100" b="1">
+                <a:solidFill>
+                  <a:srgbClr val="0F172A"/>
+                </a:solidFill>
+              </a:defRPr>
+            </a:pPr>
+            <a:r>
+              <a:t>Protect Youth Pipelines</a:t>
+            </a:r>
+          </a:p>
+          <a:p>
+            <a:pPr>
+              <a:defRPr sz="950">
+                <a:solidFill>
+                  <a:srgbClr val="334155"/>
+                </a:solidFill>
+              </a:defRPr>
+            </a:pPr>
+            <a:r>
+              <a:t>Retaining elite coaching staff preserves institutional knowledge regardless of individual athlete retirement.</a:t>
+            </a:r>
+          </a:p>
+        </p:txBody>
+      </p:sp>
+      <p:sp>
+        <p:nvSpPr>
+          <p:cNvPr id="8" name="Rounded Rectangle 7"/>
+          <p:cNvSpPr/>
+          <p:nvPr/>
+        </p:nvSpPr>
+        <p:spPr>
+          <a:xfrm>
+            <a:off x="8046720" y="1554480"/>
+            <a:ext cx="3383280" cy="4754880"/>
+          </a:xfrm>
+          <a:prstGeom prst="roundRect">
+            <a:avLst/>
+          </a:prstGeom>
+          <a:solidFill>
+            <a:srgbClr val="FFFFFF"/>
+          </a:solidFill>
+          <a:ln>
+            <a:solidFill>
+              <a:srgbClr val="CBD5E1"/>
+            </a:solidFill>
+          </a:ln>
+        </p:spPr>
+        <p:style>
+          <a:lnRef idx="1">
+            <a:schemeClr val="accent1"/>
+          </a:lnRef>
+          <a:fillRef idx="3">
+            <a:schemeClr val="accent1"/>
+          </a:fillRef>
+          <a:effectRef idx="2">
+            <a:schemeClr val="accent1"/>
+          </a:effectRef>
+          <a:fontRef idx="minor">
+            <a:schemeClr val="lt1"/>
+          </a:fontRef>
+        </p:style>
+        <p:txBody>
+          <a:bodyPr rtlCol="0" anchor="ctr" wrap="square"/>
+          <a:lstStyle/>
+          <a:p>
+            <a:pPr algn="ctr">
+              <a:defRPr sz="1300" b="1">
+                <a:solidFill>
+                  <a:srgbClr val="1E3A8A"/>
+                </a:solidFill>
+              </a:defRPr>
+            </a:pPr>
+            <a:r>
+              <a:t>Strategic Priority 3: Leverage Host Opportunities</a:t>
+            </a:r>
+          </a:p>
+          <a:p>
+            <a:pPr>
+              <a:spcBef>
+                <a:spcPts val="1200"/>
+              </a:spcBef>
+              <a:defRPr sz="1100" b="1">
+                <a:solidFill>
+                  <a:srgbClr val="0F172A"/>
+                </a:solidFill>
+              </a:defRPr>
+            </a:pPr>
+            <a:r>
+              <a:t>Maximize Quota Allowances</a:t>
+            </a:r>
+          </a:p>
+          <a:p>
+            <a:pPr>
+              <a:defRPr sz="950">
+                <a:solidFill>
+                  <a:srgbClr val="334155"/>
+                </a:solidFill>
+              </a:defRPr>
+            </a:pPr>
+            <a:r>
+              <a:t>Host nations receive automatic qualification quotas. Successfully converting these into permanent infrastructure yields lasting competitive advantages.</a:t>
+            </a:r>
+          </a:p>
+          <a:p>
+            <a:pPr>
+              <a:spcBef>
+                <a:spcPts val="1200"/>
+              </a:spcBef>
+              <a:defRPr sz="1100" b="1">
+                <a:solidFill>
+                  <a:srgbClr val="0F172A"/>
+                </a:solidFill>
+              </a:defRPr>
+            </a:pPr>
+            <a:r>
               <a:t>Historical Lift</a:t>
             </a:r>
           </a:p>
@@ -3684,7 +3746,7 @@
             <a:pPr>
               <a:defRPr sz="950">
                 <a:solidFill>
-                  <a:srgbClr val="475569"/>
+                  <a:srgbClr val="334155"/>
                 </a:solidFill>
               </a:defRPr>
             </a:pPr>
@@ -3714,140 +3776,23 @@
       <p:grpSpPr/>
       <p:sp>
         <p:nvSpPr>
-          <p:cNvPr id="2" name="TextBox 1"/>
-          <p:cNvSpPr txBox="1"/>
-          <p:nvPr/>
-        </p:nvSpPr>
-        <p:spPr>
-          <a:xfrm>
-            <a:off x="731520" y="365760"/>
-            <a:ext cx="10698480" cy="320040"/>
-          </a:xfrm>
-          <a:prstGeom prst="rect">
-            <a:avLst/>
-          </a:prstGeom>
-          <a:noFill/>
-        </p:spPr>
-        <p:txBody>
-          <a:bodyPr wrap="square">
-            <a:spAutoFit/>
-          </a:bodyPr>
-          <a:lstStyle/>
-          <a:p>
-            <a:pPr>
-              <a:defRPr sz="1000" b="1">
-                <a:solidFill>
-                  <a:srgbClr val="2563EB"/>
-                </a:solidFill>
-              </a:defRPr>
-            </a:pPr>
-            <a:r>
-              <a:t>SPORTS ANALYTICS &amp; MACHINE LEARNING</a:t>
-            </a:r>
-          </a:p>
-        </p:txBody>
-      </p:sp>
-      <p:sp>
-        <p:nvSpPr>
-          <p:cNvPr id="3" name="TextBox 2"/>
-          <p:cNvSpPr txBox="1"/>
-          <p:nvPr/>
-        </p:nvSpPr>
-        <p:spPr>
-          <a:xfrm>
-            <a:off x="731520" y="640080"/>
-            <a:ext cx="10698480" cy="640080"/>
-          </a:xfrm>
-          <a:prstGeom prst="rect">
-            <a:avLst/>
-          </a:prstGeom>
-          <a:noFill/>
-        </p:spPr>
-        <p:txBody>
-          <a:bodyPr wrap="square">
-            <a:spAutoFit/>
-          </a:bodyPr>
-          <a:lstStyle/>
-          <a:p>
-            <a:pPr>
-              <a:defRPr sz="2200" b="1">
-                <a:solidFill>
-                  <a:srgbClr val="0F172A"/>
-                </a:solidFill>
-              </a:defRPr>
-            </a:pPr>
-            <a:r>
-              <a:t>Model Limitations &amp; Future Extensions</a:t>
-            </a:r>
-          </a:p>
-        </p:txBody>
-      </p:sp>
-      <p:sp>
-        <p:nvSpPr>
-          <p:cNvPr id="4" name="Rectangle 3"/>
+          <p:cNvPr id="2" name="Rectangle 1"/>
           <p:cNvSpPr/>
           <p:nvPr/>
         </p:nvSpPr>
         <p:spPr>
           <a:xfrm>
-            <a:off x="731520" y="1280160"/>
-            <a:ext cx="10728655" cy="18288"/>
+            <a:off x="0" y="0"/>
+            <a:ext cx="12191695" cy="6858000"/>
           </a:xfrm>
           <a:prstGeom prst="rect">
-            <a:avLst/>
-          </a:prstGeom>
-          <a:solidFill>
-            <a:srgbClr val="E2E8F0"/>
-          </a:solidFill>
-          <a:ln>
-            <a:solidFill>
-              <a:srgbClr val="E2E8F0"/>
-            </a:solidFill>
-          </a:ln>
-        </p:spPr>
-        <p:style>
-          <a:lnRef idx="1">
-            <a:schemeClr val="accent1"/>
-          </a:lnRef>
-          <a:fillRef idx="3">
-            <a:schemeClr val="accent1"/>
-          </a:fillRef>
-          <a:effectRef idx="2">
-            <a:schemeClr val="accent1"/>
-          </a:effectRef>
-          <a:fontRef idx="minor">
-            <a:schemeClr val="lt1"/>
-          </a:fontRef>
-        </p:style>
-        <p:txBody>
-          <a:bodyPr rtlCol="0" anchor="ctr"/>
-          <a:lstStyle/>
-          <a:p>
-            <a:pPr algn="ctr"/>
-          </a:p>
-        </p:txBody>
-      </p:sp>
-      <p:sp>
-        <p:nvSpPr>
-          <p:cNvPr id="5" name="Rounded Rectangle 4"/>
-          <p:cNvSpPr/>
-          <p:nvPr/>
-        </p:nvSpPr>
-        <p:spPr>
-          <a:xfrm>
-            <a:off x="731520" y="1463040"/>
-            <a:ext cx="10698480" cy="868680"/>
-          </a:xfrm>
-          <a:prstGeom prst="roundRect">
             <a:avLst/>
           </a:prstGeom>
           <a:solidFill>
             <a:srgbClr val="F8FAFC"/>
           </a:solidFill>
           <a:ln>
-            <a:solidFill>
-              <a:srgbClr val="E2E8F0"/>
-            </a:solidFill>
+            <a:noFill/>
           </a:ln>
         </p:spPr>
         <p:style>
@@ -3865,54 +3810,103 @@
           </a:fontRef>
         </p:style>
         <p:txBody>
-          <a:bodyPr rtlCol="0" anchor="ctr" wrap="square"/>
-          <a:lstStyle/>
-          <a:p>
-            <a:pPr algn="ctr">
-              <a:defRPr sz="1200" b="1">
-                <a:solidFill>
-                  <a:srgbClr val="1E3A8A"/>
-                </a:solidFill>
-              </a:defRPr>
-            </a:pPr>
-            <a:r>
-              <a:t>Limitation 1: Geopolitical Shocks &amp; Boycotts</a:t>
-            </a:r>
-          </a:p>
-          <a:p>
-            <a:pPr>
-              <a:defRPr sz="950">
-                <a:solidFill>
-                  <a:srgbClr val="475569"/>
-                </a:solidFill>
-              </a:defRPr>
-            </a:pPr>
-            <a:r>
-              <a:t>Historical boycotts (e.g., Moscow 1980, Los Angeles 1984) artificially inflated and deflated medal distributions for participating nations.</a:t>
-            </a:r>
-          </a:p>
-        </p:txBody>
-      </p:sp>
-      <p:sp>
-        <p:nvSpPr>
-          <p:cNvPr id="6" name="Rounded Rectangle 5"/>
+          <a:bodyPr rtlCol="0" anchor="ctr"/>
+          <a:lstStyle/>
+          <a:p>
+            <a:pPr algn="ctr"/>
+          </a:p>
+        </p:txBody>
+      </p:sp>
+      <p:sp>
+        <p:nvSpPr>
+          <p:cNvPr id="3" name="TextBox 2"/>
+          <p:cNvSpPr txBox="1"/>
+          <p:nvPr/>
+        </p:nvSpPr>
+        <p:spPr>
+          <a:xfrm>
+            <a:off x="731520" y="365760"/>
+            <a:ext cx="10698480" cy="320040"/>
+          </a:xfrm>
+          <a:prstGeom prst="rect">
+            <a:avLst/>
+          </a:prstGeom>
+          <a:noFill/>
+        </p:spPr>
+        <p:txBody>
+          <a:bodyPr wrap="square">
+            <a:spAutoFit/>
+          </a:bodyPr>
+          <a:lstStyle/>
+          <a:p>
+            <a:pPr>
+              <a:defRPr sz="1000" b="1">
+                <a:solidFill>
+                  <a:srgbClr val="1D4ED8"/>
+                </a:solidFill>
+              </a:defRPr>
+            </a:pPr>
+            <a:r>
+              <a:t>SPORTS ANALYTICS &amp; MACHINE LEARNING</a:t>
+            </a:r>
+          </a:p>
+        </p:txBody>
+      </p:sp>
+      <p:sp>
+        <p:nvSpPr>
+          <p:cNvPr id="4" name="TextBox 3"/>
+          <p:cNvSpPr txBox="1"/>
+          <p:nvPr/>
+        </p:nvSpPr>
+        <p:spPr>
+          <a:xfrm>
+            <a:off x="731520" y="640080"/>
+            <a:ext cx="10698480" cy="640080"/>
+          </a:xfrm>
+          <a:prstGeom prst="rect">
+            <a:avLst/>
+          </a:prstGeom>
+          <a:noFill/>
+        </p:spPr>
+        <p:txBody>
+          <a:bodyPr wrap="square">
+            <a:spAutoFit/>
+          </a:bodyPr>
+          <a:lstStyle/>
+          <a:p>
+            <a:pPr>
+              <a:defRPr sz="2200" b="1">
+                <a:solidFill>
+                  <a:srgbClr val="0F172A"/>
+                </a:solidFill>
+              </a:defRPr>
+            </a:pPr>
+            <a:r>
+              <a:t>Model Limitations &amp; Future Extensions</a:t>
+            </a:r>
+          </a:p>
+        </p:txBody>
+      </p:sp>
+      <p:sp>
+        <p:nvSpPr>
+          <p:cNvPr id="5" name="Rectangle 4"/>
           <p:cNvSpPr/>
           <p:nvPr/>
         </p:nvSpPr>
         <p:spPr>
           <a:xfrm>
-            <a:off x="731520" y="2423160"/>
-            <a:ext cx="10698480" cy="868680"/>
-          </a:xfrm>
-          <a:prstGeom prst="roundRect">
+            <a:off x="731520" y="1280160"/>
+            <a:ext cx="10728655" cy="18288"/>
+          </a:xfrm>
+          <a:prstGeom prst="rect">
             <a:avLst/>
           </a:prstGeom>
           <a:solidFill>
-            <a:srgbClr val="F8FAFC"/>
+            <a:srgbClr val="CBD5E1"/>
           </a:solidFill>
           <a:ln>
             <a:solidFill>
-              <a:srgbClr val="E2E8F0"/>
+              <a:srgbClr val="CBD5E1"/>
             </a:solidFill>
           </a:ln>
         </p:spPr>
@@ -3931,54 +3925,33 @@
           </a:fontRef>
         </p:style>
         <p:txBody>
-          <a:bodyPr rtlCol="0" anchor="ctr" wrap="square"/>
-          <a:lstStyle/>
-          <a:p>
-            <a:pPr algn="ctr">
-              <a:defRPr sz="1200" b="1">
-                <a:solidFill>
-                  <a:srgbClr val="1E3A8A"/>
-                </a:solidFill>
-              </a:defRPr>
-            </a:pPr>
-            <a:r>
-              <a:t>Limitation 2: Delegation-Level Aggregation Loss</a:t>
-            </a:r>
-          </a:p>
-          <a:p>
-            <a:pPr>
-              <a:defRPr sz="950">
-                <a:solidFill>
-                  <a:srgbClr val="475569"/>
-                </a:solidFill>
-              </a:defRPr>
-            </a:pPr>
-            <a:r>
-              <a:t>Averaging athlete biometrics (height, weight) across a national delegation aggregates dissimilar sports together, masking sport-specific biometric advantages (e.g. Basketball vs Gymnastics).</a:t>
-            </a:r>
-          </a:p>
-        </p:txBody>
-      </p:sp>
-      <p:sp>
-        <p:nvSpPr>
-          <p:cNvPr id="7" name="Rounded Rectangle 6"/>
+          <a:bodyPr rtlCol="0" anchor="ctr"/>
+          <a:lstStyle/>
+          <a:p>
+            <a:pPr algn="ctr"/>
+          </a:p>
+        </p:txBody>
+      </p:sp>
+      <p:sp>
+        <p:nvSpPr>
+          <p:cNvPr id="6" name="Rounded Rectangle 5"/>
           <p:cNvSpPr/>
           <p:nvPr/>
         </p:nvSpPr>
         <p:spPr>
           <a:xfrm>
-            <a:off x="731520" y="3383280"/>
+            <a:off x="731520" y="1463040"/>
             <a:ext cx="10698480" cy="868680"/>
           </a:xfrm>
           <a:prstGeom prst="roundRect">
             <a:avLst/>
           </a:prstGeom>
           <a:solidFill>
-            <a:srgbClr val="F8FAFC"/>
+            <a:srgbClr val="FFFFFF"/>
           </a:solidFill>
           <a:ln>
             <a:solidFill>
-              <a:srgbClr val="E2E8F0"/>
+              <a:srgbClr val="CBD5E1"/>
             </a:solidFill>
           </a:ln>
         </p:spPr>
@@ -4008,43 +3981,43 @@
               </a:defRPr>
             </a:pPr>
             <a:r>
-              <a:t>Limitation 3: Financial &amp; Economic Exogenous Factors</a:t>
+              <a:t>Limitation 1: Geopolitical Shocks &amp; Boycotts</a:t>
             </a:r>
           </a:p>
           <a:p>
             <a:pPr>
               <a:defRPr sz="950">
                 <a:solidFill>
-                  <a:srgbClr val="475569"/>
-                </a:solidFill>
-              </a:defRPr>
-            </a:pPr>
-            <a:r>
-              <a:t>National GDP, public sports expenditure, and private sponsorship datasets were omitted to maintain focus on roster-level operational metrics.</a:t>
-            </a:r>
-          </a:p>
-        </p:txBody>
-      </p:sp>
-      <p:sp>
-        <p:nvSpPr>
-          <p:cNvPr id="8" name="Rounded Rectangle 7"/>
+                  <a:srgbClr val="334155"/>
+                </a:solidFill>
+              </a:defRPr>
+            </a:pPr>
+            <a:r>
+              <a:t>Historical boycotts (e.g., Moscow 1980, Los Angeles 1984) artificially inflated and deflated medal distributions for participating nations.</a:t>
+            </a:r>
+          </a:p>
+        </p:txBody>
+      </p:sp>
+      <p:sp>
+        <p:nvSpPr>
+          <p:cNvPr id="7" name="Rounded Rectangle 6"/>
           <p:cNvSpPr/>
           <p:nvPr/>
         </p:nvSpPr>
         <p:spPr>
           <a:xfrm>
-            <a:off x="731520" y="4343400"/>
+            <a:off x="731520" y="2423160"/>
             <a:ext cx="10698480" cy="868680"/>
           </a:xfrm>
           <a:prstGeom prst="roundRect">
             <a:avLst/>
           </a:prstGeom>
           <a:solidFill>
-            <a:srgbClr val="F8FAFC"/>
+            <a:srgbClr val="FFFFFF"/>
           </a:solidFill>
           <a:ln>
             <a:solidFill>
-              <a:srgbClr val="E2E8F0"/>
+              <a:srgbClr val="CBD5E1"/>
             </a:solidFill>
           </a:ln>
         </p:spPr>
@@ -4074,43 +4047,43 @@
               </a:defRPr>
             </a:pPr>
             <a:r>
-              <a:t>Future Extension 1: Sport-Specific Hierarchical Modeling</a:t>
+              <a:t>Limitation 2: Delegation-Level Aggregation Loss</a:t>
             </a:r>
           </a:p>
           <a:p>
             <a:pPr>
               <a:defRPr sz="950">
                 <a:solidFill>
-                  <a:srgbClr val="475569"/>
-                </a:solidFill>
-              </a:defRPr>
-            </a:pPr>
-            <a:r>
-              <a:t>Develop sport-discipline level sub-models (e.g. Swimming-specific model vs Track-and-Field model) to capture micro-level biometric advantages.</a:t>
-            </a:r>
-          </a:p>
-        </p:txBody>
-      </p:sp>
-      <p:sp>
-        <p:nvSpPr>
-          <p:cNvPr id="9" name="Rounded Rectangle 8"/>
+                  <a:srgbClr val="334155"/>
+                </a:solidFill>
+              </a:defRPr>
+            </a:pPr>
+            <a:r>
+              <a:t>Averaging athlete biometrics (height, weight) across a national delegation aggregates dissimilar sports together, masking sport-specific biometric advantages (e.g. Basketball vs Gymnastics).</a:t>
+            </a:r>
+          </a:p>
+        </p:txBody>
+      </p:sp>
+      <p:sp>
+        <p:nvSpPr>
+          <p:cNvPr id="8" name="Rounded Rectangle 7"/>
           <p:cNvSpPr/>
           <p:nvPr/>
         </p:nvSpPr>
         <p:spPr>
           <a:xfrm>
-            <a:off x="731520" y="5303520"/>
+            <a:off x="731520" y="3383280"/>
             <a:ext cx="10698480" cy="868680"/>
           </a:xfrm>
           <a:prstGeom prst="roundRect">
             <a:avLst/>
           </a:prstGeom>
           <a:solidFill>
-            <a:srgbClr val="F8FAFC"/>
+            <a:srgbClr val="FFFFFF"/>
           </a:solidFill>
           <a:ln>
             <a:solidFill>
-              <a:srgbClr val="E2E8F0"/>
+              <a:srgbClr val="CBD5E1"/>
             </a:solidFill>
           </a:ln>
         </p:spPr>
@@ -4140,6 +4113,138 @@
               </a:defRPr>
             </a:pPr>
             <a:r>
+              <a:t>Limitation 3: Financial &amp; Economic Exogenous Factors</a:t>
+            </a:r>
+          </a:p>
+          <a:p>
+            <a:pPr>
+              <a:defRPr sz="950">
+                <a:solidFill>
+                  <a:srgbClr val="334155"/>
+                </a:solidFill>
+              </a:defRPr>
+            </a:pPr>
+            <a:r>
+              <a:t>National GDP, public sports expenditure, and private sponsorship datasets were omitted to maintain focus on roster-level operational metrics.</a:t>
+            </a:r>
+          </a:p>
+        </p:txBody>
+      </p:sp>
+      <p:sp>
+        <p:nvSpPr>
+          <p:cNvPr id="9" name="Rounded Rectangle 8"/>
+          <p:cNvSpPr/>
+          <p:nvPr/>
+        </p:nvSpPr>
+        <p:spPr>
+          <a:xfrm>
+            <a:off x="731520" y="4343400"/>
+            <a:ext cx="10698480" cy="868680"/>
+          </a:xfrm>
+          <a:prstGeom prst="roundRect">
+            <a:avLst/>
+          </a:prstGeom>
+          <a:solidFill>
+            <a:srgbClr val="FFFFFF"/>
+          </a:solidFill>
+          <a:ln>
+            <a:solidFill>
+              <a:srgbClr val="CBD5E1"/>
+            </a:solidFill>
+          </a:ln>
+        </p:spPr>
+        <p:style>
+          <a:lnRef idx="1">
+            <a:schemeClr val="accent1"/>
+          </a:lnRef>
+          <a:fillRef idx="3">
+            <a:schemeClr val="accent1"/>
+          </a:fillRef>
+          <a:effectRef idx="2">
+            <a:schemeClr val="accent1"/>
+          </a:effectRef>
+          <a:fontRef idx="minor">
+            <a:schemeClr val="lt1"/>
+          </a:fontRef>
+        </p:style>
+        <p:txBody>
+          <a:bodyPr rtlCol="0" anchor="ctr" wrap="square"/>
+          <a:lstStyle/>
+          <a:p>
+            <a:pPr algn="ctr">
+              <a:defRPr sz="1200" b="1">
+                <a:solidFill>
+                  <a:srgbClr val="1E3A8A"/>
+                </a:solidFill>
+              </a:defRPr>
+            </a:pPr>
+            <a:r>
+              <a:t>Future Extension 1: Sport-Specific Hierarchical Modeling</a:t>
+            </a:r>
+          </a:p>
+          <a:p>
+            <a:pPr>
+              <a:defRPr sz="950">
+                <a:solidFill>
+                  <a:srgbClr val="334155"/>
+                </a:solidFill>
+              </a:defRPr>
+            </a:pPr>
+            <a:r>
+              <a:t>Develop sport-discipline level sub-models (e.g. Swimming-specific model vs Track-and-Field model) to capture micro-level biometric advantages.</a:t>
+            </a:r>
+          </a:p>
+        </p:txBody>
+      </p:sp>
+      <p:sp>
+        <p:nvSpPr>
+          <p:cNvPr id="10" name="Rounded Rectangle 9"/>
+          <p:cNvSpPr/>
+          <p:nvPr/>
+        </p:nvSpPr>
+        <p:spPr>
+          <a:xfrm>
+            <a:off x="731520" y="5303520"/>
+            <a:ext cx="10698480" cy="868680"/>
+          </a:xfrm>
+          <a:prstGeom prst="roundRect">
+            <a:avLst/>
+          </a:prstGeom>
+          <a:solidFill>
+            <a:srgbClr val="FFFFFF"/>
+          </a:solidFill>
+          <a:ln>
+            <a:solidFill>
+              <a:srgbClr val="CBD5E1"/>
+            </a:solidFill>
+          </a:ln>
+        </p:spPr>
+        <p:style>
+          <a:lnRef idx="1">
+            <a:schemeClr val="accent1"/>
+          </a:lnRef>
+          <a:fillRef idx="3">
+            <a:schemeClr val="accent1"/>
+          </a:fillRef>
+          <a:effectRef idx="2">
+            <a:schemeClr val="accent1"/>
+          </a:effectRef>
+          <a:fontRef idx="minor">
+            <a:schemeClr val="lt1"/>
+          </a:fontRef>
+        </p:style>
+        <p:txBody>
+          <a:bodyPr rtlCol="0" anchor="ctr" wrap="square"/>
+          <a:lstStyle/>
+          <a:p>
+            <a:pPr algn="ctr">
+              <a:defRPr sz="1200" b="1">
+                <a:solidFill>
+                  <a:srgbClr val="1E3A8A"/>
+                </a:solidFill>
+              </a:defRPr>
+            </a:pPr>
+            <a:r>
               <a:t>Future Extension 2: Real-Time Event-Level Simulations</a:t>
             </a:r>
           </a:p>
@@ -4147,7 +4252,7 @@
             <a:pPr>
               <a:defRPr sz="950">
                 <a:solidFill>
-                  <a:srgbClr val="475569"/>
+                  <a:srgbClr val="334155"/>
                 </a:solidFill>
               </a:defRPr>
             </a:pPr>
@@ -4226,7 +4331,7 @@
         </p:nvSpPr>
         <p:spPr>
           <a:xfrm>
-            <a:off x="1097280" y="1645920"/>
+            <a:off x="1097280" y="1463040"/>
             <a:ext cx="10058400" cy="4114800"/>
           </a:xfrm>
           <a:prstGeom prst="rect">
@@ -4241,7 +4346,7 @@
           <a:lstStyle/>
           <a:p>
             <a:pPr>
-              <a:defRPr sz="1200" b="1">
+              <a:defRPr sz="1100" b="1">
                 <a:solidFill>
                   <a:srgbClr val="93C5FD"/>
                 </a:solidFill>
@@ -4278,7 +4383,7 @@
               </a:defRPr>
             </a:pPr>
             <a:r>
-              <a:t>Questions &amp; Examination Defense</a:t>
+              <a:t>Questions &amp; Examination Defense Discussion</a:t>
             </a:r>
           </a:p>
           <a:p>
@@ -4316,7 +4421,7 @@
             </a:r>
             <a:br/>
             <a:r>
-              <a:t>GitHub Source: https://github.com/Virshin1/Team-Performance-Analysis</a:t>
+              <a:t>GitHub Source Repository: https://github.com/Virshin1/Team-Performance-Analysis</a:t>
             </a:r>
           </a:p>
         </p:txBody>
@@ -4341,140 +4446,23 @@
       <p:grpSpPr/>
       <p:sp>
         <p:nvSpPr>
-          <p:cNvPr id="2" name="TextBox 1"/>
-          <p:cNvSpPr txBox="1"/>
-          <p:nvPr/>
-        </p:nvSpPr>
-        <p:spPr>
-          <a:xfrm>
-            <a:off x="731520" y="365760"/>
-            <a:ext cx="10698480" cy="320040"/>
-          </a:xfrm>
-          <a:prstGeom prst="rect">
-            <a:avLst/>
-          </a:prstGeom>
-          <a:noFill/>
-        </p:spPr>
-        <p:txBody>
-          <a:bodyPr wrap="square">
-            <a:spAutoFit/>
-          </a:bodyPr>
-          <a:lstStyle/>
-          <a:p>
-            <a:pPr>
-              <a:defRPr sz="1000" b="1">
-                <a:solidFill>
-                  <a:srgbClr val="2563EB"/>
-                </a:solidFill>
-              </a:defRPr>
-            </a:pPr>
-            <a:r>
-              <a:t>SPORTS ANALYTICS &amp; MACHINE LEARNING</a:t>
-            </a:r>
-          </a:p>
-        </p:txBody>
-      </p:sp>
-      <p:sp>
-        <p:nvSpPr>
-          <p:cNvPr id="3" name="TextBox 2"/>
-          <p:cNvSpPr txBox="1"/>
-          <p:nvPr/>
-        </p:nvSpPr>
-        <p:spPr>
-          <a:xfrm>
-            <a:off x="731520" y="640080"/>
-            <a:ext cx="10698480" cy="640080"/>
-          </a:xfrm>
-          <a:prstGeom prst="rect">
-            <a:avLst/>
-          </a:prstGeom>
-          <a:noFill/>
-        </p:spPr>
-        <p:txBody>
-          <a:bodyPr wrap="square">
-            <a:spAutoFit/>
-          </a:bodyPr>
-          <a:lstStyle/>
-          <a:p>
-            <a:pPr>
-              <a:defRPr sz="2200" b="1">
-                <a:solidFill>
-                  <a:srgbClr val="0F172A"/>
-                </a:solidFill>
-              </a:defRPr>
-            </a:pPr>
-            <a:r>
-              <a:t>Problem Definition &amp; Research Objectives</a:t>
-            </a:r>
-          </a:p>
-        </p:txBody>
-      </p:sp>
-      <p:sp>
-        <p:nvSpPr>
-          <p:cNvPr id="4" name="Rectangle 3"/>
+          <p:cNvPr id="2" name="Rectangle 1"/>
           <p:cNvSpPr/>
           <p:nvPr/>
         </p:nvSpPr>
         <p:spPr>
           <a:xfrm>
-            <a:off x="731520" y="1280160"/>
-            <a:ext cx="10728655" cy="18288"/>
+            <a:off x="0" y="0"/>
+            <a:ext cx="12191695" cy="6858000"/>
           </a:xfrm>
           <a:prstGeom prst="rect">
-            <a:avLst/>
-          </a:prstGeom>
-          <a:solidFill>
-            <a:srgbClr val="E2E8F0"/>
-          </a:solidFill>
-          <a:ln>
-            <a:solidFill>
-              <a:srgbClr val="E2E8F0"/>
-            </a:solidFill>
-          </a:ln>
-        </p:spPr>
-        <p:style>
-          <a:lnRef idx="1">
-            <a:schemeClr val="accent1"/>
-          </a:lnRef>
-          <a:fillRef idx="3">
-            <a:schemeClr val="accent1"/>
-          </a:fillRef>
-          <a:effectRef idx="2">
-            <a:schemeClr val="accent1"/>
-          </a:effectRef>
-          <a:fontRef idx="minor">
-            <a:schemeClr val="lt1"/>
-          </a:fontRef>
-        </p:style>
-        <p:txBody>
-          <a:bodyPr rtlCol="0" anchor="ctr"/>
-          <a:lstStyle/>
-          <a:p>
-            <a:pPr algn="ctr"/>
-          </a:p>
-        </p:txBody>
-      </p:sp>
-      <p:sp>
-        <p:nvSpPr>
-          <p:cNvPr id="5" name="Rounded Rectangle 4"/>
-          <p:cNvSpPr/>
-          <p:nvPr/>
-        </p:nvSpPr>
-        <p:spPr>
-          <a:xfrm>
-            <a:off x="731520" y="1554480"/>
-            <a:ext cx="5120640" cy="4754880"/>
-          </a:xfrm>
-          <a:prstGeom prst="roundRect">
             <a:avLst/>
           </a:prstGeom>
           <a:solidFill>
             <a:srgbClr val="F8FAFC"/>
           </a:solidFill>
           <a:ln>
-            <a:solidFill>
-              <a:srgbClr val="E2E8F0"/>
-            </a:solidFill>
+            <a:noFill/>
           </a:ln>
         </p:spPr>
         <p:style>
@@ -4492,135 +4480,103 @@
           </a:fontRef>
         </p:style>
         <p:txBody>
-          <a:bodyPr rtlCol="0" anchor="ctr" wrap="square"/>
-          <a:lstStyle/>
-          <a:p>
-            <a:pPr algn="ctr">
-              <a:defRPr sz="1600" b="1">
-                <a:solidFill>
-                  <a:srgbClr val="1E3A8A"/>
-                </a:solidFill>
-              </a:defRPr>
-            </a:pPr>
-            <a:r>
-              <a:t>Problem Statement &amp; Context</a:t>
-            </a:r>
-          </a:p>
-          <a:p>
-            <a:pPr>
-              <a:spcBef>
-                <a:spcPts val="1000"/>
-              </a:spcBef>
-              <a:defRPr b="1" sz="1200">
+          <a:bodyPr rtlCol="0" anchor="ctr"/>
+          <a:lstStyle/>
+          <a:p>
+            <a:pPr algn="ctr"/>
+          </a:p>
+        </p:txBody>
+      </p:sp>
+      <p:sp>
+        <p:nvSpPr>
+          <p:cNvPr id="3" name="TextBox 2"/>
+          <p:cNvSpPr txBox="1"/>
+          <p:nvPr/>
+        </p:nvSpPr>
+        <p:spPr>
+          <a:xfrm>
+            <a:off x="731520" y="365760"/>
+            <a:ext cx="10698480" cy="320040"/>
+          </a:xfrm>
+          <a:prstGeom prst="rect">
+            <a:avLst/>
+          </a:prstGeom>
+          <a:noFill/>
+        </p:spPr>
+        <p:txBody>
+          <a:bodyPr wrap="square">
+            <a:spAutoFit/>
+          </a:bodyPr>
+          <a:lstStyle/>
+          <a:p>
+            <a:pPr>
+              <a:defRPr sz="1000" b="1">
+                <a:solidFill>
+                  <a:srgbClr val="1D4ED8"/>
+                </a:solidFill>
+              </a:defRPr>
+            </a:pPr>
+            <a:r>
+              <a:t>SPORTS ANALYTICS &amp; MACHINE LEARNING</a:t>
+            </a:r>
+          </a:p>
+        </p:txBody>
+      </p:sp>
+      <p:sp>
+        <p:nvSpPr>
+          <p:cNvPr id="4" name="TextBox 3"/>
+          <p:cNvSpPr txBox="1"/>
+          <p:nvPr/>
+        </p:nvSpPr>
+        <p:spPr>
+          <a:xfrm>
+            <a:off x="731520" y="640080"/>
+            <a:ext cx="10698480" cy="640080"/>
+          </a:xfrm>
+          <a:prstGeom prst="rect">
+            <a:avLst/>
+          </a:prstGeom>
+          <a:noFill/>
+        </p:spPr>
+        <p:txBody>
+          <a:bodyPr wrap="square">
+            <a:spAutoFit/>
+          </a:bodyPr>
+          <a:lstStyle/>
+          <a:p>
+            <a:pPr>
+              <a:defRPr sz="2200" b="1">
                 <a:solidFill>
                   <a:srgbClr val="0F172A"/>
                 </a:solidFill>
               </a:defRPr>
             </a:pPr>
             <a:r>
-              <a:t>The Core Mandate: </a:t>
-            </a:r>
-            <a:r>
-              <a:rPr b="0">
-                <a:solidFill>
-                  <a:srgbClr val="475569"/>
-                </a:solidFill>
-              </a:rPr>
-              <a:t>A national sports organization wants to understand which measurable factors are associated with stronger team results (With Proper Justification).</a:t>
-            </a:r>
-          </a:p>
-          <a:p>
-            <a:pPr>
-              <a:spcBef>
-                <a:spcPts val="1000"/>
-              </a:spcBef>
-              <a:defRPr b="1" sz="1200">
-                <a:solidFill>
-                  <a:srgbClr val="0F172A"/>
-                </a:solidFill>
-              </a:defRPr>
-            </a:pPr>
-            <a:r>
-              <a:t>Real-World Challenge: </a:t>
-            </a:r>
-            <a:r>
-              <a:rPr b="0">
-                <a:solidFill>
-                  <a:srgbClr val="475569"/>
-                </a:solidFill>
-              </a:rPr>
-              <a:t>National Olympic Committees face finite resource budgets. Should funds be allocated toward specialized physical conditioning, broad athlete quota qualification, or historical discipline dominance?</a:t>
-            </a:r>
-          </a:p>
-          <a:p>
-            <a:pPr>
-              <a:spcBef>
-                <a:spcPts val="1000"/>
-              </a:spcBef>
-              <a:defRPr b="1" sz="1200">
-                <a:solidFill>
-                  <a:srgbClr val="0F172A"/>
-                </a:solidFill>
-              </a:defRPr>
-            </a:pPr>
-            <a:r>
-              <a:t>Dual Problem Formulation: </a:t>
-            </a:r>
-            <a:r>
-              <a:rPr b="0">
-                <a:solidFill>
-                  <a:srgbClr val="475569"/>
-                </a:solidFill>
-              </a:rPr>
-              <a:t>1. Classification: Predict whether a delegation secures at least one podium medal (has_podium in {0, 1}).
-2. Regression: Predict total medal volume (total_medals in [0, 121]).</a:t>
-            </a:r>
-          </a:p>
-          <a:p>
-            <a:pPr>
-              <a:spcBef>
-                <a:spcPts val="1000"/>
-              </a:spcBef>
-              <a:defRPr b="1" sz="1200">
-                <a:solidFill>
-                  <a:srgbClr val="0F172A"/>
-                </a:solidFill>
-              </a:defRPr>
-            </a:pPr>
-            <a:r>
-              <a:t>Guiding Requirement: </a:t>
-            </a:r>
-            <a:r>
-              <a:rPr b="0">
-                <a:solidFill>
-                  <a:srgbClr val="475569"/>
-                </a:solidFill>
-              </a:rPr>
-              <a:t>Provide rigorous statistical justification and empirical feature importance rankings rather than intuition-driven assumptions.</a:t>
-            </a:r>
-          </a:p>
-        </p:txBody>
-      </p:sp>
-      <p:sp>
-        <p:nvSpPr>
-          <p:cNvPr id="6" name="Rounded Rectangle 5"/>
+              <a:t>Problem Definition &amp; Research Mandate</a:t>
+            </a:r>
+          </a:p>
+        </p:txBody>
+      </p:sp>
+      <p:sp>
+        <p:nvSpPr>
+          <p:cNvPr id="5" name="Rectangle 4"/>
           <p:cNvSpPr/>
           <p:nvPr/>
         </p:nvSpPr>
         <p:spPr>
           <a:xfrm>
-            <a:off x="6217920" y="1554480"/>
-            <a:ext cx="5212080" cy="4754880"/>
-          </a:xfrm>
-          <a:prstGeom prst="roundRect">
+            <a:off x="731520" y="1280160"/>
+            <a:ext cx="10728655" cy="18288"/>
+          </a:xfrm>
+          <a:prstGeom prst="rect">
             <a:avLst/>
           </a:prstGeom>
           <a:solidFill>
-            <a:srgbClr val="F8FAFC"/>
+            <a:srgbClr val="CBD5E1"/>
           </a:solidFill>
           <a:ln>
             <a:solidFill>
-              <a:srgbClr val="E2E8F0"/>
+              <a:srgbClr val="CBD5E1"/>
             </a:solidFill>
           </a:ln>
         </p:spPr>
@@ -4639,133 +4595,325 @@
           </a:fontRef>
         </p:style>
         <p:txBody>
+          <a:bodyPr rtlCol="0" anchor="ctr"/>
+          <a:lstStyle/>
+          <a:p>
+            <a:pPr algn="ctr"/>
+          </a:p>
+        </p:txBody>
+      </p:sp>
+      <p:sp>
+        <p:nvSpPr>
+          <p:cNvPr id="6" name="Rounded Rectangle 5"/>
+          <p:cNvSpPr/>
+          <p:nvPr/>
+        </p:nvSpPr>
+        <p:spPr>
+          <a:xfrm>
+            <a:off x="731520" y="1554480"/>
+            <a:ext cx="5120640" cy="4754880"/>
+          </a:xfrm>
+          <a:prstGeom prst="roundRect">
+            <a:avLst/>
+          </a:prstGeom>
+          <a:solidFill>
+            <a:srgbClr val="FFFFFF"/>
+          </a:solidFill>
+          <a:ln>
+            <a:solidFill>
+              <a:srgbClr val="CBD5E1"/>
+            </a:solidFill>
+          </a:ln>
+        </p:spPr>
+        <p:style>
+          <a:lnRef idx="1">
+            <a:schemeClr val="accent1"/>
+          </a:lnRef>
+          <a:fillRef idx="3">
+            <a:schemeClr val="accent1"/>
+          </a:fillRef>
+          <a:effectRef idx="2">
+            <a:schemeClr val="accent1"/>
+          </a:effectRef>
+          <a:fontRef idx="minor">
+            <a:schemeClr val="lt1"/>
+          </a:fontRef>
+        </p:style>
+        <p:txBody>
           <a:bodyPr rtlCol="0" anchor="ctr" wrap="square"/>
           <a:lstStyle/>
           <a:p>
             <a:pPr algn="ctr">
-              <a:defRPr sz="1600" b="1">
+              <a:defRPr sz="1500" b="1">
                 <a:solidFill>
                   <a:srgbClr val="1E3A8A"/>
                 </a:solidFill>
               </a:defRPr>
             </a:pPr>
             <a:r>
-              <a:t>Key Project Deliverables</a:t>
+              <a:t>Problem Statement &amp; Strategic Dilemma</a:t>
             </a:r>
           </a:p>
           <a:p>
             <a:pPr>
               <a:spcBef>
-                <a:spcPts val="1000"/>
+                <a:spcPts val="800"/>
               </a:spcBef>
-              <a:defRPr b="1" sz="1200">
+              <a:defRPr b="1" sz="1100">
                 <a:solidFill>
                   <a:srgbClr val="0F172A"/>
                 </a:solidFill>
               </a:defRPr>
             </a:pPr>
             <a:r>
-              <a:t>Rigorous Dataset Construction: </a:t>
+              <a:t>The Assigned Mandate: </a:t>
             </a:r>
             <a:r>
               <a:rPr b="0">
                 <a:solidFill>
-                  <a:srgbClr val="475569"/>
+                  <a:srgbClr val="334155"/>
                 </a:solidFill>
               </a:rPr>
-              <a:t>Aggregated 2,264 delegation-year observations across 223 NOCs from 15 Summer Olympic Games (1960 to 2016).</a:t>
+              <a:t>A team wants to understand which measurable factors are associated with stronger team results (With Proper Justification).</a:t>
             </a:r>
           </a:p>
           <a:p>
             <a:pPr>
               <a:spcBef>
-                <a:spcPts val="1000"/>
+                <a:spcPts val="800"/>
               </a:spcBef>
-              <a:defRPr b="1" sz="1200">
+              <a:defRPr b="1" sz="1100">
                 <a:solidFill>
                   <a:srgbClr val="0F172A"/>
                 </a:solidFill>
               </a:defRPr>
             </a:pPr>
             <a:r>
-              <a:t>Zero Data Leakage Pipeline: </a:t>
+              <a:t>Strategic Trade-Off: </a:t>
             </a:r>
             <a:r>
               <a:rPr b="0">
                 <a:solidFill>
-                  <a:srgbClr val="475569"/>
+                  <a:srgbClr val="334155"/>
                 </a:solidFill>
               </a:rPr>
-              <a:t>All temporal lag calculations and StandardScaler parameters fitted strictly on the Training set (80/20 stratified split).</a:t>
+              <a:t>National Olympic Committees possess finite funding. Should budgets focus on specialized athlete conditioning, broad qualification across diverse events, or historical infrastructure momentum?</a:t>
             </a:r>
           </a:p>
           <a:p>
             <a:pPr>
               <a:spcBef>
-                <a:spcPts val="1000"/>
+                <a:spcPts val="800"/>
               </a:spcBef>
-              <a:defRPr b="1" sz="1200">
+              <a:defRPr b="1" sz="1100">
                 <a:solidFill>
                   <a:srgbClr val="0F172A"/>
                 </a:solidFill>
               </a:defRPr>
             </a:pPr>
             <a:r>
-              <a:t>Single Best Algorithm Selection: </a:t>
+              <a:t>Dual Problem Formulation: </a:t>
             </a:r>
             <a:r>
               <a:rPr b="0">
                 <a:solidFill>
-                  <a:srgbClr val="475569"/>
+                  <a:srgbClr val="334155"/>
                 </a:solidFill>
               </a:rPr>
-              <a:t>Deploys Random Forest (200 estimators) for robust non-linear feature partitioning and intrinsic Gini importance.</a:t>
+              <a:t>1. Classification: Predict podium success (has_podium in {0, 1}).
+2. Regression: Predict total medal volume (total_medals in [0, 121]).</a:t>
             </a:r>
           </a:p>
           <a:p>
             <a:pPr>
               <a:spcBef>
-                <a:spcPts val="1000"/>
+                <a:spcPts val="800"/>
               </a:spcBef>
-              <a:defRPr b="1" sz="1200">
+              <a:defRPr b="1" sz="1100">
                 <a:solidFill>
                   <a:srgbClr val="0F172A"/>
                 </a:solidFill>
               </a:defRPr>
             </a:pPr>
             <a:r>
-              <a:t>Normal R2 &amp; Metrics: </a:t>
+              <a:t>Rigorous Justification: </a:t>
             </a:r>
             <a:r>
               <a:rPr b="0">
                 <a:solidFill>
-                  <a:srgbClr val="475569"/>
+                  <a:srgbClr val="334155"/>
                 </a:solidFill>
               </a:rPr>
-              <a:t>Evaluated using standard Train R2 and Test R2 rather than cross-validation R2 averaging, matching exam specifications.</a:t>
+              <a:t>Replace intuition with empirical Random Forest Gini importance rankings and econometric hypothesis testing (p &lt; 0.001).</a:t>
+            </a:r>
+          </a:p>
+        </p:txBody>
+      </p:sp>
+      <p:sp>
+        <p:nvSpPr>
+          <p:cNvPr id="7" name="Rounded Rectangle 6"/>
+          <p:cNvSpPr/>
+          <p:nvPr/>
+        </p:nvSpPr>
+        <p:spPr>
+          <a:xfrm>
+            <a:off x="6217920" y="1554480"/>
+            <a:ext cx="5212080" cy="4754880"/>
+          </a:xfrm>
+          <a:prstGeom prst="roundRect">
+            <a:avLst/>
+          </a:prstGeom>
+          <a:solidFill>
+            <a:srgbClr val="FFFFFF"/>
+          </a:solidFill>
+          <a:ln>
+            <a:solidFill>
+              <a:srgbClr val="CBD5E1"/>
+            </a:solidFill>
+          </a:ln>
+        </p:spPr>
+        <p:style>
+          <a:lnRef idx="1">
+            <a:schemeClr val="accent1"/>
+          </a:lnRef>
+          <a:fillRef idx="3">
+            <a:schemeClr val="accent1"/>
+          </a:fillRef>
+          <a:effectRef idx="2">
+            <a:schemeClr val="accent1"/>
+          </a:effectRef>
+          <a:fontRef idx="minor">
+            <a:schemeClr val="lt1"/>
+          </a:fontRef>
+        </p:style>
+        <p:txBody>
+          <a:bodyPr rtlCol="0" anchor="ctr" wrap="square"/>
+          <a:lstStyle/>
+          <a:p>
+            <a:pPr algn="ctr">
+              <a:defRPr sz="1500" b="1">
+                <a:solidFill>
+                  <a:srgbClr val="1E3A8A"/>
+                </a:solidFill>
+              </a:defRPr>
+            </a:pPr>
+            <a:r>
+              <a:t>Project Objectives &amp; Deliverables</a:t>
             </a:r>
           </a:p>
           <a:p>
             <a:pPr>
               <a:spcBef>
-                <a:spcPts val="1000"/>
+                <a:spcPts val="800"/>
               </a:spcBef>
-              <a:defRPr b="1" sz="1200">
+              <a:defRPr b="1" sz="1100">
                 <a:solidFill>
                   <a:srgbClr val="0F172A"/>
                 </a:solidFill>
               </a:defRPr>
             </a:pPr>
             <a:r>
+              <a:t>Comprehensive Dataset: </a:t>
+            </a:r>
+            <a:r>
+              <a:rPr b="0">
+                <a:solidFill>
+                  <a:srgbClr val="334155"/>
+                </a:solidFill>
+              </a:rPr>
+              <a:t>2,264 team-year records across 223 nations spanning 15 Summer Olympic Games (1960–2016).</a:t>
+            </a:r>
+          </a:p>
+          <a:p>
+            <a:pPr>
+              <a:spcBef>
+                <a:spcPts val="800"/>
+              </a:spcBef>
+              <a:defRPr b="1" sz="1100">
+                <a:solidFill>
+                  <a:srgbClr val="0F172A"/>
+                </a:solidFill>
+              </a:defRPr>
+            </a:pPr>
+            <a:r>
+              <a:t>Zero Data Leakage: </a:t>
+            </a:r>
+            <a:r>
+              <a:rPr b="0">
+                <a:solidFill>
+                  <a:srgbClr val="334155"/>
+                </a:solidFill>
+              </a:rPr>
+              <a:t>Strict 80/20 stratified split. All StandardScaler and lag calculations fit strictly on training set.</a:t>
+            </a:r>
+          </a:p>
+          <a:p>
+            <a:pPr>
+              <a:spcBef>
+                <a:spcPts val="800"/>
+              </a:spcBef>
+              <a:defRPr b="1" sz="1100">
+                <a:solidFill>
+                  <a:srgbClr val="0F172A"/>
+                </a:solidFill>
+              </a:defRPr>
+            </a:pPr>
+            <a:r>
+              <a:t>Singular Best Model Selection: </a:t>
+            </a:r>
+            <a:r>
+              <a:rPr b="0">
+                <a:solidFill>
+                  <a:srgbClr val="334155"/>
+                </a:solidFill>
+              </a:rPr>
+              <a:t>Random Forest chosen for non-linear interaction detection, outlier resilience, and intrinsic Gini importance.</a:t>
+            </a:r>
+          </a:p>
+          <a:p>
+            <a:pPr>
+              <a:spcBef>
+                <a:spcPts val="800"/>
+              </a:spcBef>
+              <a:defRPr b="1" sz="1100">
+                <a:solidFill>
+                  <a:srgbClr val="0F172A"/>
+                </a:solidFill>
+              </a:defRPr>
+            </a:pPr>
+            <a:r>
+              <a:t>Normal R2 Benchmark: </a:t>
+            </a:r>
+            <a:r>
+              <a:rPr b="0">
+                <a:solidFill>
+                  <a:srgbClr val="334155"/>
+                </a:solidFill>
+              </a:rPr>
+              <a:t>Evaluated strictly using standard Train R2 (0.9863) and Test R2 (0.8838) without cross-validation R2 averaging.</a:t>
+            </a:r>
+          </a:p>
+          <a:p>
+            <a:pPr>
+              <a:spcBef>
+                <a:spcPts val="800"/>
+              </a:spcBef>
+              <a:defRPr b="1" sz="1100">
+                <a:solidFill>
+                  <a:srgbClr val="0F172A"/>
+                </a:solidFill>
+              </a:defRPr>
+            </a:pPr>
+            <a:r>
               <a:t>Live Cloud Application: </a:t>
             </a:r>
             <a:r>
               <a:rPr b="0">
                 <a:solidFill>
-                  <a:srgbClr val="475569"/>
+                  <a:srgbClr val="334155"/>
                 </a:solidFill>
               </a:rPr>
-              <a:t>Production-grade wide dashboard deployed live on Streamlit Community Cloud with interactive scenario simulation.</a:t>
+              <a:t>Production application deployed on Streamlit Cloud with scenario testing and benchmark comparison tables.</a:t>
             </a:r>
           </a:p>
         </p:txBody>
@@ -4790,140 +4938,23 @@
       <p:grpSpPr/>
       <p:sp>
         <p:nvSpPr>
-          <p:cNvPr id="2" name="TextBox 1"/>
-          <p:cNvSpPr txBox="1"/>
-          <p:nvPr/>
-        </p:nvSpPr>
-        <p:spPr>
-          <a:xfrm>
-            <a:off x="731520" y="365760"/>
-            <a:ext cx="10698480" cy="320040"/>
-          </a:xfrm>
-          <a:prstGeom prst="rect">
-            <a:avLst/>
-          </a:prstGeom>
-          <a:noFill/>
-        </p:spPr>
-        <p:txBody>
-          <a:bodyPr wrap="square">
-            <a:spAutoFit/>
-          </a:bodyPr>
-          <a:lstStyle/>
-          <a:p>
-            <a:pPr>
-              <a:defRPr sz="1000" b="1">
-                <a:solidFill>
-                  <a:srgbClr val="2563EB"/>
-                </a:solidFill>
-              </a:defRPr>
-            </a:pPr>
-            <a:r>
-              <a:t>SPORTS ANALYTICS &amp; MACHINE LEARNING</a:t>
-            </a:r>
-          </a:p>
-        </p:txBody>
-      </p:sp>
-      <p:sp>
-        <p:nvSpPr>
-          <p:cNvPr id="3" name="TextBox 2"/>
-          <p:cNvSpPr txBox="1"/>
-          <p:nvPr/>
-        </p:nvSpPr>
-        <p:spPr>
-          <a:xfrm>
-            <a:off x="731520" y="640080"/>
-            <a:ext cx="10698480" cy="640080"/>
-          </a:xfrm>
-          <a:prstGeom prst="rect">
-            <a:avLst/>
-          </a:prstGeom>
-          <a:noFill/>
-        </p:spPr>
-        <p:txBody>
-          <a:bodyPr wrap="square">
-            <a:spAutoFit/>
-          </a:bodyPr>
-          <a:lstStyle/>
-          <a:p>
-            <a:pPr>
-              <a:defRPr sz="2200" b="1">
-                <a:solidFill>
-                  <a:srgbClr val="0F172A"/>
-                </a:solidFill>
-              </a:defRPr>
-            </a:pPr>
-            <a:r>
-              <a:t>Dataset Architecture &amp; Data Engineering</a:t>
-            </a:r>
-          </a:p>
-        </p:txBody>
-      </p:sp>
-      <p:sp>
-        <p:nvSpPr>
-          <p:cNvPr id="4" name="Rectangle 3"/>
+          <p:cNvPr id="2" name="Rectangle 1"/>
           <p:cNvSpPr/>
           <p:nvPr/>
         </p:nvSpPr>
         <p:spPr>
           <a:xfrm>
-            <a:off x="731520" y="1280160"/>
-            <a:ext cx="10728655" cy="18288"/>
+            <a:off x="0" y="0"/>
+            <a:ext cx="12191695" cy="6858000"/>
           </a:xfrm>
           <a:prstGeom prst="rect">
-            <a:avLst/>
-          </a:prstGeom>
-          <a:solidFill>
-            <a:srgbClr val="E2E8F0"/>
-          </a:solidFill>
-          <a:ln>
-            <a:solidFill>
-              <a:srgbClr val="E2E8F0"/>
-            </a:solidFill>
-          </a:ln>
-        </p:spPr>
-        <p:style>
-          <a:lnRef idx="1">
-            <a:schemeClr val="accent1"/>
-          </a:lnRef>
-          <a:fillRef idx="3">
-            <a:schemeClr val="accent1"/>
-          </a:fillRef>
-          <a:effectRef idx="2">
-            <a:schemeClr val="accent1"/>
-          </a:effectRef>
-          <a:fontRef idx="minor">
-            <a:schemeClr val="lt1"/>
-          </a:fontRef>
-        </p:style>
-        <p:txBody>
-          <a:bodyPr rtlCol="0" anchor="ctr"/>
-          <a:lstStyle/>
-          <a:p>
-            <a:pPr algn="ctr"/>
-          </a:p>
-        </p:txBody>
-      </p:sp>
-      <p:sp>
-        <p:nvSpPr>
-          <p:cNvPr id="5" name="Rounded Rectangle 4"/>
-          <p:cNvSpPr/>
-          <p:nvPr/>
-        </p:nvSpPr>
-        <p:spPr>
-          <a:xfrm>
-            <a:off x="731520" y="1554480"/>
-            <a:ext cx="2560320" cy="1188720"/>
-          </a:xfrm>
-          <a:prstGeom prst="roundRect">
             <a:avLst/>
           </a:prstGeom>
           <a:solidFill>
             <a:srgbClr val="F8FAFC"/>
           </a:solidFill>
           <a:ln>
-            <a:solidFill>
-              <a:srgbClr val="E2E8F0"/>
-            </a:solidFill>
+            <a:noFill/>
           </a:ln>
         </p:spPr>
         <p:style>
@@ -4941,66 +4972,103 @@
           </a:fontRef>
         </p:style>
         <p:txBody>
-          <a:bodyPr rtlCol="0" anchor="ctr" wrap="square"/>
-          <a:lstStyle/>
-          <a:p>
-            <a:pPr algn="ctr">
-              <a:defRPr sz="900" b="1">
-                <a:solidFill>
-                  <a:srgbClr val="475569"/>
-                </a:solidFill>
-              </a:defRPr>
-            </a:pPr>
-            <a:r>
-              <a:t>TOTAL OBSERVATIONS</a:t>
-            </a:r>
-          </a:p>
-          <a:p>
-            <a:pPr>
-              <a:defRPr sz="2000" b="1">
-                <a:solidFill>
-                  <a:srgbClr val="2563EB"/>
-                </a:solidFill>
-              </a:defRPr>
-            </a:pPr>
-            <a:r>
-              <a:t>2,264</a:t>
-            </a:r>
-          </a:p>
-          <a:p>
-            <a:pPr>
-              <a:defRPr sz="850">
-                <a:solidFill>
-                  <a:srgbClr val="475569"/>
-                </a:solidFill>
-              </a:defRPr>
-            </a:pPr>
-            <a:r>
-              <a:t>NOC-Games participations</a:t>
-            </a:r>
-          </a:p>
-        </p:txBody>
-      </p:sp>
-      <p:sp>
-        <p:nvSpPr>
-          <p:cNvPr id="6" name="Rounded Rectangle 5"/>
+          <a:bodyPr rtlCol="0" anchor="ctr"/>
+          <a:lstStyle/>
+          <a:p>
+            <a:pPr algn="ctr"/>
+          </a:p>
+        </p:txBody>
+      </p:sp>
+      <p:sp>
+        <p:nvSpPr>
+          <p:cNvPr id="3" name="TextBox 2"/>
+          <p:cNvSpPr txBox="1"/>
+          <p:nvPr/>
+        </p:nvSpPr>
+        <p:spPr>
+          <a:xfrm>
+            <a:off x="731520" y="365760"/>
+            <a:ext cx="10698480" cy="320040"/>
+          </a:xfrm>
+          <a:prstGeom prst="rect">
+            <a:avLst/>
+          </a:prstGeom>
+          <a:noFill/>
+        </p:spPr>
+        <p:txBody>
+          <a:bodyPr wrap="square">
+            <a:spAutoFit/>
+          </a:bodyPr>
+          <a:lstStyle/>
+          <a:p>
+            <a:pPr>
+              <a:defRPr sz="1000" b="1">
+                <a:solidFill>
+                  <a:srgbClr val="1D4ED8"/>
+                </a:solidFill>
+              </a:defRPr>
+            </a:pPr>
+            <a:r>
+              <a:t>SPORTS ANALYTICS &amp; MACHINE LEARNING</a:t>
+            </a:r>
+          </a:p>
+        </p:txBody>
+      </p:sp>
+      <p:sp>
+        <p:nvSpPr>
+          <p:cNvPr id="4" name="TextBox 3"/>
+          <p:cNvSpPr txBox="1"/>
+          <p:nvPr/>
+        </p:nvSpPr>
+        <p:spPr>
+          <a:xfrm>
+            <a:off x="731520" y="640080"/>
+            <a:ext cx="10698480" cy="640080"/>
+          </a:xfrm>
+          <a:prstGeom prst="rect">
+            <a:avLst/>
+          </a:prstGeom>
+          <a:noFill/>
+        </p:spPr>
+        <p:txBody>
+          <a:bodyPr wrap="square">
+            <a:spAutoFit/>
+          </a:bodyPr>
+          <a:lstStyle/>
+          <a:p>
+            <a:pPr>
+              <a:defRPr sz="2200" b="1">
+                <a:solidFill>
+                  <a:srgbClr val="0F172A"/>
+                </a:solidFill>
+              </a:defRPr>
+            </a:pPr>
+            <a:r>
+              <a:t>Dataset Architecture &amp; Data Engineering Pipeline</a:t>
+            </a:r>
+          </a:p>
+        </p:txBody>
+      </p:sp>
+      <p:sp>
+        <p:nvSpPr>
+          <p:cNvPr id="5" name="Rectangle 4"/>
           <p:cNvSpPr/>
           <p:nvPr/>
         </p:nvSpPr>
         <p:spPr>
           <a:xfrm>
-            <a:off x="3429000" y="1554480"/>
-            <a:ext cx="2560320" cy="1188720"/>
-          </a:xfrm>
-          <a:prstGeom prst="roundRect">
+            <a:off x="731520" y="1280160"/>
+            <a:ext cx="10728655" cy="18288"/>
+          </a:xfrm>
+          <a:prstGeom prst="rect">
             <a:avLst/>
           </a:prstGeom>
           <a:solidFill>
-            <a:srgbClr val="F8FAFC"/>
+            <a:srgbClr val="CBD5E1"/>
           </a:solidFill>
           <a:ln>
             <a:solidFill>
-              <a:srgbClr val="E2E8F0"/>
+              <a:srgbClr val="CBD5E1"/>
             </a:solidFill>
           </a:ln>
         </p:spPr>
@@ -5019,66 +5087,33 @@
           </a:fontRef>
         </p:style>
         <p:txBody>
-          <a:bodyPr rtlCol="0" anchor="ctr" wrap="square"/>
-          <a:lstStyle/>
-          <a:p>
-            <a:pPr algn="ctr">
-              <a:defRPr sz="900" b="1">
-                <a:solidFill>
-                  <a:srgbClr val="475569"/>
-                </a:solidFill>
-              </a:defRPr>
-            </a:pPr>
-            <a:r>
-              <a:t>TEMPORAL WINDOW</a:t>
-            </a:r>
-          </a:p>
-          <a:p>
-            <a:pPr>
-              <a:defRPr sz="2000" b="1">
-                <a:solidFill>
-                  <a:srgbClr val="2563EB"/>
-                </a:solidFill>
-              </a:defRPr>
-            </a:pPr>
-            <a:r>
-              <a:t>1960 - 2016</a:t>
-            </a:r>
-          </a:p>
-          <a:p>
-            <a:pPr>
-              <a:defRPr sz="850">
-                <a:solidFill>
-                  <a:srgbClr val="475569"/>
-                </a:solidFill>
-              </a:defRPr>
-            </a:pPr>
-            <a:r>
-              <a:t>15 Modern Summer Olympiads</a:t>
-            </a:r>
-          </a:p>
-        </p:txBody>
-      </p:sp>
-      <p:sp>
-        <p:nvSpPr>
-          <p:cNvPr id="7" name="Rounded Rectangle 6"/>
+          <a:bodyPr rtlCol="0" anchor="ctr"/>
+          <a:lstStyle/>
+          <a:p>
+            <a:pPr algn="ctr"/>
+          </a:p>
+        </p:txBody>
+      </p:sp>
+      <p:sp>
+        <p:nvSpPr>
+          <p:cNvPr id="6" name="Rounded Rectangle 5"/>
           <p:cNvSpPr/>
           <p:nvPr/>
         </p:nvSpPr>
         <p:spPr>
           <a:xfrm>
-            <a:off x="6126480" y="1554480"/>
+            <a:off x="731520" y="1554480"/>
             <a:ext cx="2560320" cy="1188720"/>
           </a:xfrm>
           <a:prstGeom prst="roundRect">
             <a:avLst/>
           </a:prstGeom>
           <a:solidFill>
-            <a:srgbClr val="F8FAFC"/>
+            <a:srgbClr val="FFFFFF"/>
           </a:solidFill>
           <a:ln>
             <a:solidFill>
-              <a:srgbClr val="E2E8F0"/>
+              <a:srgbClr val="CBD5E1"/>
             </a:solidFill>
           </a:ln>
         </p:spPr>
@@ -5103,60 +5138,60 @@
             <a:pPr algn="ctr">
               <a:defRPr sz="900" b="1">
                 <a:solidFill>
-                  <a:srgbClr val="475569"/>
-                </a:solidFill>
-              </a:defRPr>
-            </a:pPr>
-            <a:r>
-              <a:t>PARTICIPATING NATIONS</a:t>
+                  <a:srgbClr val="334155"/>
+                </a:solidFill>
+              </a:defRPr>
+            </a:pPr>
+            <a:r>
+              <a:t>TOTAL OBSERVATIONS</a:t>
             </a:r>
           </a:p>
           <a:p>
             <a:pPr>
               <a:defRPr sz="2000" b="1">
                 <a:solidFill>
-                  <a:srgbClr val="2563EB"/>
-                </a:solidFill>
-              </a:defRPr>
-            </a:pPr>
-            <a:r>
-              <a:t>223</a:t>
+                  <a:srgbClr val="1D4ED8"/>
+                </a:solidFill>
+              </a:defRPr>
+            </a:pPr>
+            <a:r>
+              <a:t>2,264</a:t>
             </a:r>
           </a:p>
           <a:p>
             <a:pPr>
               <a:defRPr sz="850">
                 <a:solidFill>
-                  <a:srgbClr val="475569"/>
-                </a:solidFill>
-              </a:defRPr>
-            </a:pPr>
-            <a:r>
-              <a:t>Global National Olympic Committees</a:t>
-            </a:r>
-          </a:p>
-        </p:txBody>
-      </p:sp>
-      <p:sp>
-        <p:nvSpPr>
-          <p:cNvPr id="8" name="Rounded Rectangle 7"/>
+                  <a:srgbClr val="334155"/>
+                </a:solidFill>
+              </a:defRPr>
+            </a:pPr>
+            <a:r>
+              <a:t>Team-games participations</a:t>
+            </a:r>
+          </a:p>
+        </p:txBody>
+      </p:sp>
+      <p:sp>
+        <p:nvSpPr>
+          <p:cNvPr id="7" name="Rounded Rectangle 6"/>
           <p:cNvSpPr/>
           <p:nvPr/>
         </p:nvSpPr>
         <p:spPr>
           <a:xfrm>
-            <a:off x="8823960" y="1554480"/>
+            <a:off x="3429000" y="1554480"/>
             <a:ext cx="2560320" cy="1188720"/>
           </a:xfrm>
           <a:prstGeom prst="roundRect">
             <a:avLst/>
           </a:prstGeom>
           <a:solidFill>
-            <a:srgbClr val="F8FAFC"/>
+            <a:srgbClr val="FFFFFF"/>
           </a:solidFill>
           <a:ln>
             <a:solidFill>
-              <a:srgbClr val="E2E8F0"/>
+              <a:srgbClr val="CBD5E1"/>
             </a:solidFill>
           </a:ln>
         </p:spPr>
@@ -5181,60 +5216,60 @@
             <a:pPr algn="ctr">
               <a:defRPr sz="900" b="1">
                 <a:solidFill>
-                  <a:srgbClr val="475569"/>
-                </a:solidFill>
-              </a:defRPr>
-            </a:pPr>
-            <a:r>
-              <a:t>MEDAL BASE RATE</a:t>
+                  <a:srgbClr val="334155"/>
+                </a:solidFill>
+              </a:defRPr>
+            </a:pPr>
+            <a:r>
+              <a:t>TEMPORAL WINDOW</a:t>
             </a:r>
           </a:p>
           <a:p>
             <a:pPr>
               <a:defRPr sz="2000" b="1">
                 <a:solidFill>
-                  <a:srgbClr val="2563EB"/>
-                </a:solidFill>
-              </a:defRPr>
-            </a:pPr>
-            <a:r>
-              <a:t>40.06%</a:t>
+                  <a:srgbClr val="1D4ED8"/>
+                </a:solidFill>
+              </a:defRPr>
+            </a:pPr>
+            <a:r>
+              <a:t>1960 - 2016</a:t>
             </a:r>
           </a:p>
           <a:p>
             <a:pPr>
               <a:defRPr sz="850">
                 <a:solidFill>
-                  <a:srgbClr val="475569"/>
-                </a:solidFill>
-              </a:defRPr>
-            </a:pPr>
-            <a:r>
-              <a:t>907 Podium / 1,357 Non-Podium</a:t>
-            </a:r>
-          </a:p>
-        </p:txBody>
-      </p:sp>
-      <p:sp>
-        <p:nvSpPr>
-          <p:cNvPr id="9" name="Rounded Rectangle 8"/>
+                  <a:srgbClr val="334155"/>
+                </a:solidFill>
+              </a:defRPr>
+            </a:pPr>
+            <a:r>
+              <a:t>15 Summer Olympiads</a:t>
+            </a:r>
+          </a:p>
+        </p:txBody>
+      </p:sp>
+      <p:sp>
+        <p:nvSpPr>
+          <p:cNvPr id="8" name="Rounded Rectangle 7"/>
           <p:cNvSpPr/>
           <p:nvPr/>
         </p:nvSpPr>
         <p:spPr>
           <a:xfrm>
-            <a:off x="731520" y="2926080"/>
-            <a:ext cx="10698480" cy="3383280"/>
+            <a:off x="6126480" y="1554480"/>
+            <a:ext cx="2560320" cy="1188720"/>
           </a:xfrm>
           <a:prstGeom prst="roundRect">
             <a:avLst/>
           </a:prstGeom>
           <a:solidFill>
-            <a:srgbClr val="F8FAFC"/>
+            <a:srgbClr val="FFFFFF"/>
           </a:solidFill>
           <a:ln>
             <a:solidFill>
-              <a:srgbClr val="E2E8F0"/>
+              <a:srgbClr val="CBD5E1"/>
             </a:solidFill>
           </a:ln>
         </p:spPr>
@@ -5257,6 +5292,162 @@
           <a:lstStyle/>
           <a:p>
             <a:pPr algn="ctr">
+              <a:defRPr sz="900" b="1">
+                <a:solidFill>
+                  <a:srgbClr val="334155"/>
+                </a:solidFill>
+              </a:defRPr>
+            </a:pPr>
+            <a:r>
+              <a:t>NATIONAL DELEGATIONS</a:t>
+            </a:r>
+          </a:p>
+          <a:p>
+            <a:pPr>
+              <a:defRPr sz="2000" b="1">
+                <a:solidFill>
+                  <a:srgbClr val="1D4ED8"/>
+                </a:solidFill>
+              </a:defRPr>
+            </a:pPr>
+            <a:r>
+              <a:t>223</a:t>
+            </a:r>
+          </a:p>
+          <a:p>
+            <a:pPr>
+              <a:defRPr sz="850">
+                <a:solidFill>
+                  <a:srgbClr val="334155"/>
+                </a:solidFill>
+              </a:defRPr>
+            </a:pPr>
+            <a:r>
+              <a:t>Sovereign Olympic committees</a:t>
+            </a:r>
+          </a:p>
+        </p:txBody>
+      </p:sp>
+      <p:sp>
+        <p:nvSpPr>
+          <p:cNvPr id="9" name="Rounded Rectangle 8"/>
+          <p:cNvSpPr/>
+          <p:nvPr/>
+        </p:nvSpPr>
+        <p:spPr>
+          <a:xfrm>
+            <a:off x="8823960" y="1554480"/>
+            <a:ext cx="2560320" cy="1188720"/>
+          </a:xfrm>
+          <a:prstGeom prst="roundRect">
+            <a:avLst/>
+          </a:prstGeom>
+          <a:solidFill>
+            <a:srgbClr val="FFFFFF"/>
+          </a:solidFill>
+          <a:ln>
+            <a:solidFill>
+              <a:srgbClr val="CBD5E1"/>
+            </a:solidFill>
+          </a:ln>
+        </p:spPr>
+        <p:style>
+          <a:lnRef idx="1">
+            <a:schemeClr val="accent1"/>
+          </a:lnRef>
+          <a:fillRef idx="3">
+            <a:schemeClr val="accent1"/>
+          </a:fillRef>
+          <a:effectRef idx="2">
+            <a:schemeClr val="accent1"/>
+          </a:effectRef>
+          <a:fontRef idx="minor">
+            <a:schemeClr val="lt1"/>
+          </a:fontRef>
+        </p:style>
+        <p:txBody>
+          <a:bodyPr rtlCol="0" anchor="ctr" wrap="square"/>
+          <a:lstStyle/>
+          <a:p>
+            <a:pPr algn="ctr">
+              <a:defRPr sz="900" b="1">
+                <a:solidFill>
+                  <a:srgbClr val="334155"/>
+                </a:solidFill>
+              </a:defRPr>
+            </a:pPr>
+            <a:r>
+              <a:t>MEDAL BASE RATE</a:t>
+            </a:r>
+          </a:p>
+          <a:p>
+            <a:pPr>
+              <a:defRPr sz="2000" b="1">
+                <a:solidFill>
+                  <a:srgbClr val="1D4ED8"/>
+                </a:solidFill>
+              </a:defRPr>
+            </a:pPr>
+            <a:r>
+              <a:t>40.06%</a:t>
+            </a:r>
+          </a:p>
+          <a:p>
+            <a:pPr>
+              <a:defRPr sz="850">
+                <a:solidFill>
+                  <a:srgbClr val="334155"/>
+                </a:solidFill>
+              </a:defRPr>
+            </a:pPr>
+            <a:r>
+              <a:t>907 Podium / 1,357 Zero</a:t>
+            </a:r>
+          </a:p>
+        </p:txBody>
+      </p:sp>
+      <p:sp>
+        <p:nvSpPr>
+          <p:cNvPr id="10" name="Rounded Rectangle 9"/>
+          <p:cNvSpPr/>
+          <p:nvPr/>
+        </p:nvSpPr>
+        <p:spPr>
+          <a:xfrm>
+            <a:off x="731520" y="2926080"/>
+            <a:ext cx="10698480" cy="3383280"/>
+          </a:xfrm>
+          <a:prstGeom prst="roundRect">
+            <a:avLst/>
+          </a:prstGeom>
+          <a:solidFill>
+            <a:srgbClr val="FFFFFF"/>
+          </a:solidFill>
+          <a:ln>
+            <a:solidFill>
+              <a:srgbClr val="CBD5E1"/>
+            </a:solidFill>
+          </a:ln>
+        </p:spPr>
+        <p:style>
+          <a:lnRef idx="1">
+            <a:schemeClr val="accent1"/>
+          </a:lnRef>
+          <a:fillRef idx="3">
+            <a:schemeClr val="accent1"/>
+          </a:fillRef>
+          <a:effectRef idx="2">
+            <a:schemeClr val="accent1"/>
+          </a:effectRef>
+          <a:fontRef idx="minor">
+            <a:schemeClr val="lt1"/>
+          </a:fontRef>
+        </p:style>
+        <p:txBody>
+          <a:bodyPr rtlCol="0" anchor="ctr" wrap="square"/>
+          <a:lstStyle/>
+          <a:p>
+            <a:pPr algn="ctr">
               <a:defRPr sz="1500" b="1">
                 <a:solidFill>
                   <a:srgbClr val="1E3A8A"/>
@@ -5264,38 +5455,38 @@
               </a:defRPr>
             </a:pPr>
             <a:r>
-              <a:t>Data Aggregation &amp; Engineering Pipeline</a:t>
+              <a:t>Data Engineering &amp; Deduplication Methodology</a:t>
             </a:r>
           </a:p>
           <a:p>
             <a:pPr>
               <a:spcBef>
-                <a:spcPts val="800"/>
+                <a:spcPts val="700"/>
               </a:spcBef>
-              <a:defRPr b="1" sz="1100">
+              <a:defRPr b="1" sz="1050">
                 <a:solidFill>
                   <a:srgbClr val="0F172A"/>
                 </a:solidFill>
               </a:defRPr>
             </a:pPr>
             <a:r>
-              <a:t>Source Extraction: </a:t>
+              <a:t>Source Provenance: </a:t>
             </a:r>
             <a:r>
               <a:rPr b="0">
                 <a:solidFill>
-                  <a:srgbClr val="475569"/>
+                  <a:srgbClr val="334155"/>
                 </a:solidFill>
               </a:rPr>
-              <a:t>Extracted from historical Olympic archives covering all modern Summer Olympiads, encompassing over 200,000 competitor records.</a:t>
+              <a:t>Sourced from historical Olympic archives covering all modern Summer Olympiads, containing over 200,000 individual competitor-event entries.</a:t>
             </a:r>
           </a:p>
           <a:p>
             <a:pPr>
               <a:spcBef>
-                <a:spcPts val="800"/>
+                <a:spcPts val="700"/>
               </a:spcBef>
-              <a:defRPr b="1" sz="1100">
+              <a:defRPr b="1" sz="1050">
                 <a:solidFill>
                   <a:srgbClr val="0F172A"/>
                 </a:solidFill>
@@ -5307,41 +5498,41 @@
             <a:r>
               <a:rPr b="0">
                 <a:solidFill>
-                  <a:srgbClr val="475569"/>
+                  <a:srgbClr val="334155"/>
                 </a:solidFill>
               </a:rPr>
-              <a:t>Crucial Sports Rule: In team events (e.g. Football 18 players), all receive medals, but the delegation wins ONE official medal. Deduplicated strictly to (Games, Year, Event, Medal).</a:t>
+              <a:t>In team sports (Football, Basketball, Rowing), every squad member receives a physical medal, but the country wins exactly ONE official medal. Deduplicated strictly to unique (Games, Year, Event, Medal) to eliminate 10x-18x artificial medal inflation.</a:t>
             </a:r>
           </a:p>
           <a:p>
             <a:pPr>
               <a:spcBef>
-                <a:spcPts val="800"/>
+                <a:spcPts val="700"/>
               </a:spcBef>
-              <a:defRPr b="1" sz="1100">
+              <a:defRPr b="1" sz="1050">
                 <a:solidFill>
                   <a:srgbClr val="0F172A"/>
                 </a:solidFill>
               </a:defRPr>
             </a:pPr>
             <a:r>
-              <a:t>Aggregation Level: </a:t>
+              <a:t>Unit of Analysis: </a:t>
             </a:r>
             <a:r>
               <a:rPr b="0">
                 <a:solidFill>
-                  <a:srgbClr val="475569"/>
+                  <a:srgbClr val="334155"/>
                 </a:solidFill>
               </a:rPr>
-              <a:t>Consolidated to the delegation level per Olympic Games (NOC, Year). Captures scale, diversity, demographic distributions, and momentum.</a:t>
+              <a:t>Consolidated to national delegation level per Olympic Games (NOC, Year). Features capture roster scale, discipline diversity, demographic distributions, and temporal momentum.</a:t>
             </a:r>
           </a:p>
           <a:p>
             <a:pPr>
               <a:spcBef>
-                <a:spcPts val="800"/>
+                <a:spcPts val="700"/>
               </a:spcBef>
-              <a:defRPr b="1" sz="1100">
+              <a:defRPr b="1" sz="1050">
                 <a:solidFill>
                   <a:srgbClr val="0F172A"/>
                 </a:solidFill>
@@ -5353,18 +5544,18 @@
             <a:r>
               <a:rPr b="0">
                 <a:solidFill>
-                  <a:srgbClr val="475569"/>
+                  <a:srgbClr val="334155"/>
                 </a:solidFill>
               </a:rPr>
-              <a:t>Missing height/weight records for early games imputed using discipline-gender median baselines rather than global means.</a:t>
+              <a:t>Missing height/weight records for early Olympiads imputed using sport-gender median baselines rather than global means, preserving authentic sport-specific anthropometry.</a:t>
             </a:r>
           </a:p>
           <a:p>
             <a:pPr>
               <a:spcBef>
-                <a:spcPts val="800"/>
+                <a:spcPts val="700"/>
               </a:spcBef>
-              <a:defRPr b="1" sz="1100">
+              <a:defRPr b="1" sz="1050">
                 <a:solidFill>
                   <a:srgbClr val="0F172A"/>
                 </a:solidFill>
@@ -5376,10 +5567,10 @@
             <a:r>
               <a:rPr b="0">
                 <a:solidFill>
-                  <a:srgbClr val="475569"/>
+                  <a:srgbClr val="334155"/>
                 </a:solidFill>
               </a:rPr>
-              <a:t>Engineered prev_medals: Total medals achieved in the prior Olympic cycle for that nation, capturing institutional funding continuity.</a:t>
+              <a:t>Engineered prev_medals: Total medals achieved in the prior Olympic cycle for that specific nation, capturing institutional funding and coaching pipeline continuity.</a:t>
             </a:r>
           </a:p>
         </p:txBody>
@@ -5404,140 +5595,23 @@
       <p:grpSpPr/>
       <p:sp>
         <p:nvSpPr>
-          <p:cNvPr id="2" name="TextBox 1"/>
-          <p:cNvSpPr txBox="1"/>
-          <p:nvPr/>
-        </p:nvSpPr>
-        <p:spPr>
-          <a:xfrm>
-            <a:off x="731520" y="365760"/>
-            <a:ext cx="10698480" cy="320040"/>
-          </a:xfrm>
-          <a:prstGeom prst="rect">
-            <a:avLst/>
-          </a:prstGeom>
-          <a:noFill/>
-        </p:spPr>
-        <p:txBody>
-          <a:bodyPr wrap="square">
-            <a:spAutoFit/>
-          </a:bodyPr>
-          <a:lstStyle/>
-          <a:p>
-            <a:pPr>
-              <a:defRPr sz="1000" b="1">
-                <a:solidFill>
-                  <a:srgbClr val="2563EB"/>
-                </a:solidFill>
-              </a:defRPr>
-            </a:pPr>
-            <a:r>
-              <a:t>SPORTS ANALYTICS &amp; MACHINE LEARNING</a:t>
-            </a:r>
-          </a:p>
-        </p:txBody>
-      </p:sp>
-      <p:sp>
-        <p:nvSpPr>
-          <p:cNvPr id="3" name="TextBox 2"/>
-          <p:cNvSpPr txBox="1"/>
-          <p:nvPr/>
-        </p:nvSpPr>
-        <p:spPr>
-          <a:xfrm>
-            <a:off x="731520" y="640080"/>
-            <a:ext cx="10698480" cy="640080"/>
-          </a:xfrm>
-          <a:prstGeom prst="rect">
-            <a:avLst/>
-          </a:prstGeom>
-          <a:noFill/>
-        </p:spPr>
-        <p:txBody>
-          <a:bodyPr wrap="square">
-            <a:spAutoFit/>
-          </a:bodyPr>
-          <a:lstStyle/>
-          <a:p>
-            <a:pPr>
-              <a:defRPr sz="2200" b="1">
-                <a:solidFill>
-                  <a:srgbClr val="0F172A"/>
-                </a:solidFill>
-              </a:defRPr>
-            </a:pPr>
-            <a:r>
-              <a:t>Input Variables: 11 Measurable Delegation Factors</a:t>
-            </a:r>
-          </a:p>
-        </p:txBody>
-      </p:sp>
-      <p:sp>
-        <p:nvSpPr>
-          <p:cNvPr id="4" name="Rectangle 3"/>
+          <p:cNvPr id="2" name="Rectangle 1"/>
           <p:cNvSpPr/>
           <p:nvPr/>
         </p:nvSpPr>
         <p:spPr>
           <a:xfrm>
-            <a:off x="731520" y="1280160"/>
-            <a:ext cx="10728655" cy="18288"/>
+            <a:off x="0" y="0"/>
+            <a:ext cx="12191695" cy="6858000"/>
           </a:xfrm>
           <a:prstGeom prst="rect">
-            <a:avLst/>
-          </a:prstGeom>
-          <a:solidFill>
-            <a:srgbClr val="E2E8F0"/>
-          </a:solidFill>
-          <a:ln>
-            <a:solidFill>
-              <a:srgbClr val="E2E8F0"/>
-            </a:solidFill>
-          </a:ln>
-        </p:spPr>
-        <p:style>
-          <a:lnRef idx="1">
-            <a:schemeClr val="accent1"/>
-          </a:lnRef>
-          <a:fillRef idx="3">
-            <a:schemeClr val="accent1"/>
-          </a:fillRef>
-          <a:effectRef idx="2">
-            <a:schemeClr val="accent1"/>
-          </a:effectRef>
-          <a:fontRef idx="minor">
-            <a:schemeClr val="lt1"/>
-          </a:fontRef>
-        </p:style>
-        <p:txBody>
-          <a:bodyPr rtlCol="0" anchor="ctr"/>
-          <a:lstStyle/>
-          <a:p>
-            <a:pPr algn="ctr"/>
-          </a:p>
-        </p:txBody>
-      </p:sp>
-      <p:sp>
-        <p:nvSpPr>
-          <p:cNvPr id="5" name="Rounded Rectangle 4"/>
-          <p:cNvSpPr/>
-          <p:nvPr/>
-        </p:nvSpPr>
-        <p:spPr>
-          <a:xfrm>
-            <a:off x="731520" y="1554480"/>
-            <a:ext cx="3749039" cy="4754880"/>
-          </a:xfrm>
-          <a:prstGeom prst="roundRect">
             <a:avLst/>
           </a:prstGeom>
           <a:solidFill>
             <a:srgbClr val="F8FAFC"/>
           </a:solidFill>
           <a:ln>
-            <a:solidFill>
-              <a:srgbClr val="E2E8F0"/>
-            </a:solidFill>
+            <a:noFill/>
           </a:ln>
         </p:spPr>
         <p:style>
@@ -5555,150 +5629,103 @@
           </a:fontRef>
         </p:style>
         <p:txBody>
-          <a:bodyPr rtlCol="0" anchor="ctr" wrap="square"/>
-          <a:lstStyle/>
-          <a:p>
-            <a:pPr algn="ctr">
-              <a:defRPr sz="1400" b="1">
-                <a:solidFill>
-                  <a:srgbClr val="1E3A8A"/>
-                </a:solidFill>
-              </a:defRPr>
-            </a:pPr>
-            <a:r>
-              <a:t>Scale &amp; Workload (4)</a:t>
-            </a:r>
-          </a:p>
-          <a:p>
-            <a:pPr>
-              <a:spcBef>
-                <a:spcPts val="800"/>
-              </a:spcBef>
-              <a:defRPr sz="1100" b="1">
-                <a:solidFill>
-                  <a:srgbClr val="2563EB"/>
-                </a:solidFill>
-              </a:defRPr>
-            </a:pPr>
-            <a:r>
-              <a:t>total_athletes</a:t>
-            </a:r>
-          </a:p>
-          <a:p>
-            <a:pPr>
-              <a:defRPr sz="950">
-                <a:solidFill>
-                  <a:srgbClr val="475569"/>
-                </a:solidFill>
-              </a:defRPr>
-            </a:pPr>
-            <a:r>
-              <a:t>Unique competitors on the official national roster (Range: 1 to 650+)</a:t>
-            </a:r>
-          </a:p>
-          <a:p>
-            <a:pPr>
-              <a:spcBef>
-                <a:spcPts val="800"/>
-              </a:spcBef>
-              <a:defRPr sz="1100" b="1">
-                <a:solidFill>
-                  <a:srgbClr val="2563EB"/>
-                </a:solidFill>
-              </a:defRPr>
-            </a:pPr>
-            <a:r>
-              <a:t>num_events</a:t>
-            </a:r>
-          </a:p>
-          <a:p>
-            <a:pPr>
-              <a:defRPr sz="950">
-                <a:solidFill>
-                  <a:srgbClr val="475569"/>
-                </a:solidFill>
-              </a:defRPr>
-            </a:pPr>
-            <a:r>
-              <a:t>Distinct competition event categories entered (Range: 1 to 250+)</a:t>
-            </a:r>
-          </a:p>
-          <a:p>
-            <a:pPr>
-              <a:spcBef>
-                <a:spcPts val="800"/>
-              </a:spcBef>
-              <a:defRPr sz="1100" b="1">
-                <a:solidFill>
-                  <a:srgbClr val="2563EB"/>
-                </a:solidFill>
-              </a:defRPr>
-            </a:pPr>
-            <a:r>
-              <a:t>total_entries</a:t>
-            </a:r>
-          </a:p>
-          <a:p>
-            <a:pPr>
-              <a:defRPr sz="950">
-                <a:solidFill>
-                  <a:srgbClr val="475569"/>
-                </a:solidFill>
-              </a:defRPr>
-            </a:pPr>
-            <a:r>
-              <a:t>Total registrations accounting for multi-event athletes (Range: 1 to 800+)</a:t>
-            </a:r>
-          </a:p>
-          <a:p>
-            <a:pPr>
-              <a:spcBef>
-                <a:spcPts val="800"/>
-              </a:spcBef>
-              <a:defRPr sz="1100" b="1">
-                <a:solidFill>
-                  <a:srgbClr val="2563EB"/>
-                </a:solidFill>
-              </a:defRPr>
-            </a:pPr>
-            <a:r>
-              <a:t>num_sports</a:t>
-            </a:r>
-          </a:p>
-          <a:p>
-            <a:pPr>
-              <a:defRPr sz="950">
-                <a:solidFill>
-                  <a:srgbClr val="475569"/>
-                </a:solidFill>
-              </a:defRPr>
-            </a:pPr>
-            <a:r>
-              <a:t>Distinct sports disciplines contested (Range: 1 to 32)</a:t>
-            </a:r>
-          </a:p>
-        </p:txBody>
-      </p:sp>
-      <p:sp>
-        <p:nvSpPr>
-          <p:cNvPr id="6" name="Rounded Rectangle 5"/>
+          <a:bodyPr rtlCol="0" anchor="ctr"/>
+          <a:lstStyle/>
+          <a:p>
+            <a:pPr algn="ctr"/>
+          </a:p>
+        </p:txBody>
+      </p:sp>
+      <p:sp>
+        <p:nvSpPr>
+          <p:cNvPr id="3" name="TextBox 2"/>
+          <p:cNvSpPr txBox="1"/>
+          <p:nvPr/>
+        </p:nvSpPr>
+        <p:spPr>
+          <a:xfrm>
+            <a:off x="731520" y="365760"/>
+            <a:ext cx="10698480" cy="320040"/>
+          </a:xfrm>
+          <a:prstGeom prst="rect">
+            <a:avLst/>
+          </a:prstGeom>
+          <a:noFill/>
+        </p:spPr>
+        <p:txBody>
+          <a:bodyPr wrap="square">
+            <a:spAutoFit/>
+          </a:bodyPr>
+          <a:lstStyle/>
+          <a:p>
+            <a:pPr>
+              <a:defRPr sz="1000" b="1">
+                <a:solidFill>
+                  <a:srgbClr val="1D4ED8"/>
+                </a:solidFill>
+              </a:defRPr>
+            </a:pPr>
+            <a:r>
+              <a:t>SPORTS ANALYTICS &amp; MACHINE LEARNING</a:t>
+            </a:r>
+          </a:p>
+        </p:txBody>
+      </p:sp>
+      <p:sp>
+        <p:nvSpPr>
+          <p:cNvPr id="4" name="TextBox 3"/>
+          <p:cNvSpPr txBox="1"/>
+          <p:nvPr/>
+        </p:nvSpPr>
+        <p:spPr>
+          <a:xfrm>
+            <a:off x="731520" y="640080"/>
+            <a:ext cx="10698480" cy="640080"/>
+          </a:xfrm>
+          <a:prstGeom prst="rect">
+            <a:avLst/>
+          </a:prstGeom>
+          <a:noFill/>
+        </p:spPr>
+        <p:txBody>
+          <a:bodyPr wrap="square">
+            <a:spAutoFit/>
+          </a:bodyPr>
+          <a:lstStyle/>
+          <a:p>
+            <a:pPr>
+              <a:defRPr sz="2200" b="1">
+                <a:solidFill>
+                  <a:srgbClr val="0F172A"/>
+                </a:solidFill>
+              </a:defRPr>
+            </a:pPr>
+            <a:r>
+              <a:t>Input Variables: 11 Measurable Delegation Factors</a:t>
+            </a:r>
+          </a:p>
+        </p:txBody>
+      </p:sp>
+      <p:sp>
+        <p:nvSpPr>
+          <p:cNvPr id="5" name="Rectangle 4"/>
           <p:cNvSpPr/>
           <p:nvPr/>
         </p:nvSpPr>
         <p:spPr>
           <a:xfrm>
-            <a:off x="4663440" y="1554480"/>
-            <a:ext cx="3291840" cy="4754880"/>
-          </a:xfrm>
-          <a:prstGeom prst="roundRect">
+            <a:off x="731520" y="1280160"/>
+            <a:ext cx="10728655" cy="18288"/>
+          </a:xfrm>
+          <a:prstGeom prst="rect">
             <a:avLst/>
           </a:prstGeom>
           <a:solidFill>
-            <a:srgbClr val="F8FAFC"/>
+            <a:srgbClr val="CBD5E1"/>
           </a:solidFill>
           <a:ln>
             <a:solidFill>
-              <a:srgbClr val="E2E8F0"/>
+              <a:srgbClr val="CBD5E1"/>
             </a:solidFill>
           </a:ln>
         </p:spPr>
@@ -5717,96 +5744,33 @@
           </a:fontRef>
         </p:style>
         <p:txBody>
-          <a:bodyPr rtlCol="0" anchor="ctr" wrap="square"/>
-          <a:lstStyle/>
-          <a:p>
-            <a:pPr algn="ctr">
-              <a:defRPr sz="1400" b="1">
-                <a:solidFill>
-                  <a:srgbClr val="1E3A8A"/>
-                </a:solidFill>
-              </a:defRPr>
-            </a:pPr>
-            <a:r>
-              <a:t>Historical Momentum &amp; Context (2)</a:t>
-            </a:r>
-          </a:p>
-          <a:p>
-            <a:pPr>
-              <a:spcBef>
-                <a:spcPts val="800"/>
-              </a:spcBef>
-              <a:defRPr sz="1100" b="1">
-                <a:solidFill>
-                  <a:srgbClr val="2563EB"/>
-                </a:solidFill>
-              </a:defRPr>
-            </a:pPr>
-            <a:r>
-              <a:t>prev_medals</a:t>
-            </a:r>
-          </a:p>
-          <a:p>
-            <a:pPr>
-              <a:defRPr sz="950">
-                <a:solidFill>
-                  <a:srgbClr val="475569"/>
-                </a:solidFill>
-              </a:defRPr>
-            </a:pPr>
-            <a:r>
-              <a:t>Total medals secured in previous Olympiad (Range: 0 to 120+)</a:t>
-            </a:r>
-          </a:p>
-          <a:p>
-            <a:pPr>
-              <a:spcBef>
-                <a:spcPts val="800"/>
-              </a:spcBef>
-              <a:defRPr sz="1100" b="1">
-                <a:solidFill>
-                  <a:srgbClr val="2563EB"/>
-                </a:solidFill>
-              </a:defRPr>
-            </a:pPr>
-            <a:r>
-              <a:t>is_host</a:t>
-            </a:r>
-          </a:p>
-          <a:p>
-            <a:pPr>
-              <a:defRPr sz="950">
-                <a:solidFill>
-                  <a:srgbClr val="475569"/>
-                </a:solidFill>
-              </a:defRPr>
-            </a:pPr>
-            <a:r>
-              <a:t>Binary indicator (1 if host nation, 0 if visiting delegation)</a:t>
-            </a:r>
-          </a:p>
-        </p:txBody>
-      </p:sp>
-      <p:sp>
-        <p:nvSpPr>
-          <p:cNvPr id="7" name="Rounded Rectangle 6"/>
+          <a:bodyPr rtlCol="0" anchor="ctr"/>
+          <a:lstStyle/>
+          <a:p>
+            <a:pPr algn="ctr"/>
+          </a:p>
+        </p:txBody>
+      </p:sp>
+      <p:sp>
+        <p:nvSpPr>
+          <p:cNvPr id="6" name="Rounded Rectangle 5"/>
           <p:cNvSpPr/>
           <p:nvPr/>
         </p:nvSpPr>
         <p:spPr>
           <a:xfrm>
-            <a:off x="8138160" y="1554480"/>
-            <a:ext cx="3657600" cy="4754880"/>
+            <a:off x="731520" y="1554480"/>
+            <a:ext cx="3749039" cy="4754880"/>
           </a:xfrm>
           <a:prstGeom prst="roundRect">
             <a:avLst/>
           </a:prstGeom>
           <a:solidFill>
-            <a:srgbClr val="F8FAFC"/>
+            <a:srgbClr val="FFFFFF"/>
           </a:solidFill>
           <a:ln>
             <a:solidFill>
-              <a:srgbClr val="E2E8F0"/>
+              <a:srgbClr val="CBD5E1"/>
             </a:solidFill>
           </a:ln>
         </p:spPr>
@@ -5836,7 +5800,7 @@
               </a:defRPr>
             </a:pPr>
             <a:r>
-              <a:t>Biometrics &amp; Demographics (5)</a:t>
+              <a:t>Scale &amp; Workload (4)</a:t>
             </a:r>
           </a:p>
           <a:p>
@@ -5846,24 +5810,24 @@
               </a:spcBef>
               <a:defRPr sz="1100" b="1">
                 <a:solidFill>
-                  <a:srgbClr val="2563EB"/>
-                </a:solidFill>
-              </a:defRPr>
-            </a:pPr>
-            <a:r>
-              <a:t>mean_age</a:t>
+                  <a:srgbClr val="1D4ED8"/>
+                </a:solidFill>
+              </a:defRPr>
+            </a:pPr>
+            <a:r>
+              <a:t>total_athletes</a:t>
             </a:r>
           </a:p>
           <a:p>
             <a:pPr>
               <a:defRPr sz="950">
                 <a:solidFill>
-                  <a:srgbClr val="475569"/>
-                </a:solidFill>
-              </a:defRPr>
-            </a:pPr>
-            <a:r>
-              <a:t>Delegation average competitor age in years (Range: 18.0 to 35.0)</a:t>
+                  <a:srgbClr val="334155"/>
+                </a:solidFill>
+              </a:defRPr>
+            </a:pPr>
+            <a:r>
+              <a:t>Unique athletes on national roster (1 to 650+)</a:t>
             </a:r>
           </a:p>
           <a:p>
@@ -5873,24 +5837,24 @@
               </a:spcBef>
               <a:defRPr sz="1100" b="1">
                 <a:solidFill>
-                  <a:srgbClr val="2563EB"/>
-                </a:solidFill>
-              </a:defRPr>
-            </a:pPr>
-            <a:r>
-              <a:t>female_ratio</a:t>
+                  <a:srgbClr val="1D4ED8"/>
+                </a:solidFill>
+              </a:defRPr>
+            </a:pPr>
+            <a:r>
+              <a:t>num_events</a:t>
             </a:r>
           </a:p>
           <a:p>
             <a:pPr>
               <a:defRPr sz="950">
                 <a:solidFill>
-                  <a:srgbClr val="475569"/>
-                </a:solidFill>
-              </a:defRPr>
-            </a:pPr>
-            <a:r>
-              <a:t>Proportion of female athletes on national roster (Range: 0.0 to 1.0)</a:t>
+                  <a:srgbClr val="334155"/>
+                </a:solidFill>
+              </a:defRPr>
+            </a:pPr>
+            <a:r>
+              <a:t>Distinct event categories entered (1 to 250+)</a:t>
             </a:r>
           </a:p>
           <a:p>
@@ -5900,24 +5864,24 @@
               </a:spcBef>
               <a:defRPr sz="1100" b="1">
                 <a:solidFill>
-                  <a:srgbClr val="2563EB"/>
-                </a:solidFill>
-              </a:defRPr>
-            </a:pPr>
-            <a:r>
-              <a:t>mean_height</a:t>
+                  <a:srgbClr val="1D4ED8"/>
+                </a:solidFill>
+              </a:defRPr>
+            </a:pPr>
+            <a:r>
+              <a:t>total_entries</a:t>
             </a:r>
           </a:p>
           <a:p>
             <a:pPr>
               <a:defRPr sz="950">
                 <a:solidFill>
-                  <a:srgbClr val="475569"/>
-                </a:solidFill>
-              </a:defRPr>
-            </a:pPr>
-            <a:r>
-              <a:t>Delegation average height in cm (Range: 155.0 to 195.0)</a:t>
+                  <a:srgbClr val="334155"/>
+                </a:solidFill>
+              </a:defRPr>
+            </a:pPr>
+            <a:r>
+              <a:t>Total registrations accounting for dual entrants (1 to 800+)</a:t>
             </a:r>
           </a:p>
           <a:p>
@@ -5927,24 +5891,78 @@
               </a:spcBef>
               <a:defRPr sz="1100" b="1">
                 <a:solidFill>
-                  <a:srgbClr val="2563EB"/>
-                </a:solidFill>
-              </a:defRPr>
-            </a:pPr>
-            <a:r>
-              <a:t>mean_weight</a:t>
+                  <a:srgbClr val="1D4ED8"/>
+                </a:solidFill>
+              </a:defRPr>
+            </a:pPr>
+            <a:r>
+              <a:t>num_sports</a:t>
             </a:r>
           </a:p>
           <a:p>
             <a:pPr>
               <a:defRPr sz="950">
                 <a:solidFill>
-                  <a:srgbClr val="475569"/>
-                </a:solidFill>
-              </a:defRPr>
-            </a:pPr>
-            <a:r>
-              <a:t>Delegation average weight in kg (Range: 45.0 to 105.0)</a:t>
+                  <a:srgbClr val="334155"/>
+                </a:solidFill>
+              </a:defRPr>
+            </a:pPr>
+            <a:r>
+              <a:t>Distinct sports disciplines contested (1 to 32)</a:t>
+            </a:r>
+          </a:p>
+        </p:txBody>
+      </p:sp>
+      <p:sp>
+        <p:nvSpPr>
+          <p:cNvPr id="7" name="Rounded Rectangle 6"/>
+          <p:cNvSpPr/>
+          <p:nvPr/>
+        </p:nvSpPr>
+        <p:spPr>
+          <a:xfrm>
+            <a:off x="4663440" y="1554480"/>
+            <a:ext cx="3291840" cy="4754880"/>
+          </a:xfrm>
+          <a:prstGeom prst="roundRect">
+            <a:avLst/>
+          </a:prstGeom>
+          <a:solidFill>
+            <a:srgbClr val="FFFFFF"/>
+          </a:solidFill>
+          <a:ln>
+            <a:solidFill>
+              <a:srgbClr val="CBD5E1"/>
+            </a:solidFill>
+          </a:ln>
+        </p:spPr>
+        <p:style>
+          <a:lnRef idx="1">
+            <a:schemeClr val="accent1"/>
+          </a:lnRef>
+          <a:fillRef idx="3">
+            <a:schemeClr val="accent1"/>
+          </a:fillRef>
+          <a:effectRef idx="2">
+            <a:schemeClr val="accent1"/>
+          </a:effectRef>
+          <a:fontRef idx="minor">
+            <a:schemeClr val="lt1"/>
+          </a:fontRef>
+        </p:style>
+        <p:txBody>
+          <a:bodyPr rtlCol="0" anchor="ctr" wrap="square"/>
+          <a:lstStyle/>
+          <a:p>
+            <a:pPr algn="ctr">
+              <a:defRPr sz="1400" b="1">
+                <a:solidFill>
+                  <a:srgbClr val="1E3A8A"/>
+                </a:solidFill>
+              </a:defRPr>
+            </a:pPr>
+            <a:r>
+              <a:t>Historical Momentum &amp; Context (2)</a:t>
             </a:r>
           </a:p>
           <a:p>
@@ -5954,7 +5972,223 @@
               </a:spcBef>
               <a:defRPr sz="1100" b="1">
                 <a:solidFill>
-                  <a:srgbClr val="2563EB"/>
+                  <a:srgbClr val="1D4ED8"/>
+                </a:solidFill>
+              </a:defRPr>
+            </a:pPr>
+            <a:r>
+              <a:t>prev_medals</a:t>
+            </a:r>
+          </a:p>
+          <a:p>
+            <a:pPr>
+              <a:defRPr sz="950">
+                <a:solidFill>
+                  <a:srgbClr val="334155"/>
+                </a:solidFill>
+              </a:defRPr>
+            </a:pPr>
+            <a:r>
+              <a:t>Medals won in preceding Olympic Games (0 to 120+)</a:t>
+            </a:r>
+          </a:p>
+          <a:p>
+            <a:pPr>
+              <a:spcBef>
+                <a:spcPts val="800"/>
+              </a:spcBef>
+              <a:defRPr sz="1100" b="1">
+                <a:solidFill>
+                  <a:srgbClr val="1D4ED8"/>
+                </a:solidFill>
+              </a:defRPr>
+            </a:pPr>
+            <a:r>
+              <a:t>is_host</a:t>
+            </a:r>
+          </a:p>
+          <a:p>
+            <a:pPr>
+              <a:defRPr sz="950">
+                <a:solidFill>
+                  <a:srgbClr val="334155"/>
+                </a:solidFill>
+              </a:defRPr>
+            </a:pPr>
+            <a:r>
+              <a:t>Binary indicator (1 if host nation, 0 if visiting delegation)</a:t>
+            </a:r>
+          </a:p>
+        </p:txBody>
+      </p:sp>
+      <p:sp>
+        <p:nvSpPr>
+          <p:cNvPr id="8" name="Rounded Rectangle 7"/>
+          <p:cNvSpPr/>
+          <p:nvPr/>
+        </p:nvSpPr>
+        <p:spPr>
+          <a:xfrm>
+            <a:off x="8138160" y="1554480"/>
+            <a:ext cx="3657600" cy="4754880"/>
+          </a:xfrm>
+          <a:prstGeom prst="roundRect">
+            <a:avLst/>
+          </a:prstGeom>
+          <a:solidFill>
+            <a:srgbClr val="FFFFFF"/>
+          </a:solidFill>
+          <a:ln>
+            <a:solidFill>
+              <a:srgbClr val="CBD5E1"/>
+            </a:solidFill>
+          </a:ln>
+        </p:spPr>
+        <p:style>
+          <a:lnRef idx="1">
+            <a:schemeClr val="accent1"/>
+          </a:lnRef>
+          <a:fillRef idx="3">
+            <a:schemeClr val="accent1"/>
+          </a:fillRef>
+          <a:effectRef idx="2">
+            <a:schemeClr val="accent1"/>
+          </a:effectRef>
+          <a:fontRef idx="minor">
+            <a:schemeClr val="lt1"/>
+          </a:fontRef>
+        </p:style>
+        <p:txBody>
+          <a:bodyPr rtlCol="0" anchor="ctr" wrap="square"/>
+          <a:lstStyle/>
+          <a:p>
+            <a:pPr algn="ctr">
+              <a:defRPr sz="1400" b="1">
+                <a:solidFill>
+                  <a:srgbClr val="1E3A8A"/>
+                </a:solidFill>
+              </a:defRPr>
+            </a:pPr>
+            <a:r>
+              <a:t>Biometrics &amp; Demographics (5)</a:t>
+            </a:r>
+          </a:p>
+          <a:p>
+            <a:pPr>
+              <a:spcBef>
+                <a:spcPts val="800"/>
+              </a:spcBef>
+              <a:defRPr sz="1100" b="1">
+                <a:solidFill>
+                  <a:srgbClr val="1D4ED8"/>
+                </a:solidFill>
+              </a:defRPr>
+            </a:pPr>
+            <a:r>
+              <a:t>mean_age</a:t>
+            </a:r>
+          </a:p>
+          <a:p>
+            <a:pPr>
+              <a:defRPr sz="950">
+                <a:solidFill>
+                  <a:srgbClr val="334155"/>
+                </a:solidFill>
+              </a:defRPr>
+            </a:pPr>
+            <a:r>
+              <a:t>Average athlete age in years (18.0 to 35.0 yrs)</a:t>
+            </a:r>
+          </a:p>
+          <a:p>
+            <a:pPr>
+              <a:spcBef>
+                <a:spcPts val="800"/>
+              </a:spcBef>
+              <a:defRPr sz="1100" b="1">
+                <a:solidFill>
+                  <a:srgbClr val="1D4ED8"/>
+                </a:solidFill>
+              </a:defRPr>
+            </a:pPr>
+            <a:r>
+              <a:t>female_ratio</a:t>
+            </a:r>
+          </a:p>
+          <a:p>
+            <a:pPr>
+              <a:defRPr sz="950">
+                <a:solidFill>
+                  <a:srgbClr val="334155"/>
+                </a:solidFill>
+              </a:defRPr>
+            </a:pPr>
+            <a:r>
+              <a:t>Proportion of female athletes on roster (0.0 to 1.0)</a:t>
+            </a:r>
+          </a:p>
+          <a:p>
+            <a:pPr>
+              <a:spcBef>
+                <a:spcPts val="800"/>
+              </a:spcBef>
+              <a:defRPr sz="1100" b="1">
+                <a:solidFill>
+                  <a:srgbClr val="1D4ED8"/>
+                </a:solidFill>
+              </a:defRPr>
+            </a:pPr>
+            <a:r>
+              <a:t>mean_height</a:t>
+            </a:r>
+          </a:p>
+          <a:p>
+            <a:pPr>
+              <a:defRPr sz="950">
+                <a:solidFill>
+                  <a:srgbClr val="334155"/>
+                </a:solidFill>
+              </a:defRPr>
+            </a:pPr>
+            <a:r>
+              <a:t>Average athlete height in cm (155.0 to 195.0 cm)</a:t>
+            </a:r>
+          </a:p>
+          <a:p>
+            <a:pPr>
+              <a:spcBef>
+                <a:spcPts val="800"/>
+              </a:spcBef>
+              <a:defRPr sz="1100" b="1">
+                <a:solidFill>
+                  <a:srgbClr val="1D4ED8"/>
+                </a:solidFill>
+              </a:defRPr>
+            </a:pPr>
+            <a:r>
+              <a:t>mean_weight</a:t>
+            </a:r>
+          </a:p>
+          <a:p>
+            <a:pPr>
+              <a:defRPr sz="950">
+                <a:solidFill>
+                  <a:srgbClr val="334155"/>
+                </a:solidFill>
+              </a:defRPr>
+            </a:pPr>
+            <a:r>
+              <a:t>Average athlete weight in kg (45.0 to 105.0 kg)</a:t>
+            </a:r>
+          </a:p>
+          <a:p>
+            <a:pPr>
+              <a:spcBef>
+                <a:spcPts val="800"/>
+              </a:spcBef>
+              <a:defRPr sz="1100" b="1">
+                <a:solidFill>
+                  <a:srgbClr val="1D4ED8"/>
                 </a:solidFill>
               </a:defRPr>
             </a:pPr>
@@ -5966,12 +6200,12 @@
             <a:pPr>
               <a:defRPr sz="950">
                 <a:solidFill>
-                  <a:srgbClr val="475569"/>
-                </a:solidFill>
-              </a:defRPr>
-            </a:pPr>
-            <a:r>
-              <a:t>Computed delegation Body Mass Index in kg/m² (Range: 18.0 to 28.0)</a:t>
+                  <a:srgbClr val="334155"/>
+                </a:solidFill>
+              </a:defRPr>
+            </a:pPr>
+            <a:r>
+              <a:t>Computed delegation Body Mass Index (18.0 to 28.0 kg/m²)</a:t>
             </a:r>
           </a:p>
         </p:txBody>
@@ -5996,140 +6230,23 @@
       <p:grpSpPr/>
       <p:sp>
         <p:nvSpPr>
-          <p:cNvPr id="2" name="TextBox 1"/>
-          <p:cNvSpPr txBox="1"/>
-          <p:nvPr/>
-        </p:nvSpPr>
-        <p:spPr>
-          <a:xfrm>
-            <a:off x="731520" y="365760"/>
-            <a:ext cx="10698480" cy="320040"/>
-          </a:xfrm>
-          <a:prstGeom prst="rect">
-            <a:avLst/>
-          </a:prstGeom>
-          <a:noFill/>
-        </p:spPr>
-        <p:txBody>
-          <a:bodyPr wrap="square">
-            <a:spAutoFit/>
-          </a:bodyPr>
-          <a:lstStyle/>
-          <a:p>
-            <a:pPr>
-              <a:defRPr sz="1000" b="1">
-                <a:solidFill>
-                  <a:srgbClr val="2563EB"/>
-                </a:solidFill>
-              </a:defRPr>
-            </a:pPr>
-            <a:r>
-              <a:t>SPORTS ANALYTICS &amp; MACHINE LEARNING</a:t>
-            </a:r>
-          </a:p>
-        </p:txBody>
-      </p:sp>
-      <p:sp>
-        <p:nvSpPr>
-          <p:cNvPr id="3" name="TextBox 2"/>
-          <p:cNvSpPr txBox="1"/>
-          <p:nvPr/>
-        </p:nvSpPr>
-        <p:spPr>
-          <a:xfrm>
-            <a:off x="731520" y="640080"/>
-            <a:ext cx="10698480" cy="640080"/>
-          </a:xfrm>
-          <a:prstGeom prst="rect">
-            <a:avLst/>
-          </a:prstGeom>
-          <a:noFill/>
-        </p:spPr>
-        <p:txBody>
-          <a:bodyPr wrap="square">
-            <a:spAutoFit/>
-          </a:bodyPr>
-          <a:lstStyle/>
-          <a:p>
-            <a:pPr>
-              <a:defRPr sz="2200" b="1">
-                <a:solidFill>
-                  <a:srgbClr val="0F172A"/>
-                </a:solidFill>
-              </a:defRPr>
-            </a:pPr>
-            <a:r>
-              <a:t>Exploratory Data Analysis: Correlation &amp; Distributions</a:t>
-            </a:r>
-          </a:p>
-        </p:txBody>
-      </p:sp>
-      <p:sp>
-        <p:nvSpPr>
-          <p:cNvPr id="4" name="Rectangle 3"/>
+          <p:cNvPr id="2" name="Rectangle 1"/>
           <p:cNvSpPr/>
           <p:nvPr/>
         </p:nvSpPr>
         <p:spPr>
           <a:xfrm>
-            <a:off x="731520" y="1280160"/>
-            <a:ext cx="10728655" cy="18288"/>
+            <a:off x="0" y="0"/>
+            <a:ext cx="12191695" cy="6858000"/>
           </a:xfrm>
           <a:prstGeom prst="rect">
-            <a:avLst/>
-          </a:prstGeom>
-          <a:solidFill>
-            <a:srgbClr val="E2E8F0"/>
-          </a:solidFill>
-          <a:ln>
-            <a:solidFill>
-              <a:srgbClr val="E2E8F0"/>
-            </a:solidFill>
-          </a:ln>
-        </p:spPr>
-        <p:style>
-          <a:lnRef idx="1">
-            <a:schemeClr val="accent1"/>
-          </a:lnRef>
-          <a:fillRef idx="3">
-            <a:schemeClr val="accent1"/>
-          </a:fillRef>
-          <a:effectRef idx="2">
-            <a:schemeClr val="accent1"/>
-          </a:effectRef>
-          <a:fontRef idx="minor">
-            <a:schemeClr val="lt1"/>
-          </a:fontRef>
-        </p:style>
-        <p:txBody>
-          <a:bodyPr rtlCol="0" anchor="ctr"/>
-          <a:lstStyle/>
-          <a:p>
-            <a:pPr algn="ctr"/>
-          </a:p>
-        </p:txBody>
-      </p:sp>
-      <p:sp>
-        <p:nvSpPr>
-          <p:cNvPr id="5" name="Rounded Rectangle 4"/>
-          <p:cNvSpPr/>
-          <p:nvPr/>
-        </p:nvSpPr>
-        <p:spPr>
-          <a:xfrm>
-            <a:off x="731520" y="1554480"/>
-            <a:ext cx="5120640" cy="4754880"/>
-          </a:xfrm>
-          <a:prstGeom prst="roundRect">
             <a:avLst/>
           </a:prstGeom>
           <a:solidFill>
             <a:srgbClr val="F8FAFC"/>
           </a:solidFill>
           <a:ln>
-            <a:solidFill>
-              <a:srgbClr val="E2E8F0"/>
-            </a:solidFill>
+            <a:noFill/>
           </a:ln>
         </p:spPr>
         <p:style>
@@ -6147,134 +6264,103 @@
           </a:fontRef>
         </p:style>
         <p:txBody>
-          <a:bodyPr rtlCol="0" anchor="ctr" wrap="square"/>
-          <a:lstStyle/>
-          <a:p>
-            <a:pPr algn="ctr">
-              <a:defRPr sz="1500" b="1">
-                <a:solidFill>
-                  <a:srgbClr val="1E3A8A"/>
-                </a:solidFill>
-              </a:defRPr>
-            </a:pPr>
-            <a:r>
-              <a:t>Pearson Correlation Analysis</a:t>
-            </a:r>
-          </a:p>
-          <a:p>
-            <a:pPr>
-              <a:spcBef>
-                <a:spcPts val="800"/>
-              </a:spcBef>
-              <a:defRPr b="1" sz="1100">
+          <a:bodyPr rtlCol="0" anchor="ctr"/>
+          <a:lstStyle/>
+          <a:p>
+            <a:pPr algn="ctr"/>
+          </a:p>
+        </p:txBody>
+      </p:sp>
+      <p:sp>
+        <p:nvSpPr>
+          <p:cNvPr id="3" name="TextBox 2"/>
+          <p:cNvSpPr txBox="1"/>
+          <p:nvPr/>
+        </p:nvSpPr>
+        <p:spPr>
+          <a:xfrm>
+            <a:off x="731520" y="365760"/>
+            <a:ext cx="10698480" cy="320040"/>
+          </a:xfrm>
+          <a:prstGeom prst="rect">
+            <a:avLst/>
+          </a:prstGeom>
+          <a:noFill/>
+        </p:spPr>
+        <p:txBody>
+          <a:bodyPr wrap="square">
+            <a:spAutoFit/>
+          </a:bodyPr>
+          <a:lstStyle/>
+          <a:p>
+            <a:pPr>
+              <a:defRPr sz="1000" b="1">
+                <a:solidFill>
+                  <a:srgbClr val="1D4ED8"/>
+                </a:solidFill>
+              </a:defRPr>
+            </a:pPr>
+            <a:r>
+              <a:t>SPORTS ANALYTICS &amp; MACHINE LEARNING</a:t>
+            </a:r>
+          </a:p>
+        </p:txBody>
+      </p:sp>
+      <p:sp>
+        <p:nvSpPr>
+          <p:cNvPr id="4" name="TextBox 3"/>
+          <p:cNvSpPr txBox="1"/>
+          <p:nvPr/>
+        </p:nvSpPr>
+        <p:spPr>
+          <a:xfrm>
+            <a:off x="731520" y="640080"/>
+            <a:ext cx="10698480" cy="640080"/>
+          </a:xfrm>
+          <a:prstGeom prst="rect">
+            <a:avLst/>
+          </a:prstGeom>
+          <a:noFill/>
+        </p:spPr>
+        <p:txBody>
+          <a:bodyPr wrap="square">
+            <a:spAutoFit/>
+          </a:bodyPr>
+          <a:lstStyle/>
+          <a:p>
+            <a:pPr>
+              <a:defRPr sz="2200" b="1">
                 <a:solidFill>
                   <a:srgbClr val="0F172A"/>
                 </a:solidFill>
               </a:defRPr>
             </a:pPr>
             <a:r>
-              <a:t>Total Medals Won (Volume): </a:t>
-            </a:r>
-            <a:r>
-              <a:rPr b="0">
-                <a:solidFill>
-                  <a:srgbClr val="475569"/>
-                </a:solidFill>
-              </a:rPr>
-              <a:t>Highest linear factor is prev_medals (r = +0.901), followed by total_entries (+0.834) and total_athletes (+0.834). Strong past programs maintain sustained medal output.</a:t>
-            </a:r>
-          </a:p>
-          <a:p>
-            <a:pPr>
-              <a:spcBef>
-                <a:spcPts val="800"/>
-              </a:spcBef>
-              <a:defRPr b="1" sz="1100">
-                <a:solidFill>
-                  <a:srgbClr val="0F172A"/>
-                </a:solidFill>
-              </a:defRPr>
-            </a:pPr>
-            <a:r>
-              <a:t>Podium Threshold (Any Medal): </a:t>
-            </a:r>
-            <a:r>
-              <a:rPr b="0">
-                <a:solidFill>
-                  <a:srgbClr val="475569"/>
-                </a:solidFill>
-              </a:rPr>
-              <a:t>Highest linear factor is num_sports (r = +0.702), followed by num_events (+0.635). Entering diverse sports provides multiple independent shots at winning a medal.</a:t>
-            </a:r>
-          </a:p>
-          <a:p>
-            <a:pPr>
-              <a:spcBef>
-                <a:spcPts val="800"/>
-              </a:spcBef>
-              <a:defRPr b="1" sz="1100">
-                <a:solidFill>
-                  <a:srgbClr val="0F172A"/>
-                </a:solidFill>
-              </a:defRPr>
-            </a:pPr>
-            <a:r>
-              <a:t>Host Nation Effect: </a:t>
-            </a:r>
-            <a:r>
-              <a:rPr b="0">
-                <a:solidFill>
-                  <a:srgbClr val="475569"/>
-                </a:solidFill>
-              </a:rPr>
-              <a:t>Host status correlates moderately with medal count (r = +0.304), yielding on average +4.12 additional medals via quota allowances and crowd familiarity.</a:t>
-            </a:r>
-          </a:p>
-          <a:p>
-            <a:pPr>
-              <a:spcBef>
-                <a:spcPts val="800"/>
-              </a:spcBef>
-              <a:defRPr b="1" sz="1100">
-                <a:solidFill>
-                  <a:srgbClr val="0F172A"/>
-                </a:solidFill>
-              </a:defRPr>
-            </a:pPr>
-            <a:r>
-              <a:t>Biometrics Divergence: </a:t>
-            </a:r>
-            <a:r>
-              <a:rPr b="0">
-                <a:solidFill>
-                  <a:srgbClr val="475569"/>
-                </a:solidFill>
-              </a:rPr>
-              <a:t>Athlete biometrics (mean_age r=+0.012, mean_bmi r=-0.006) show virtually zero linear correlation because optimal body types vary dramatically across sports.</a:t>
-            </a:r>
-          </a:p>
-        </p:txBody>
-      </p:sp>
-      <p:sp>
-        <p:nvSpPr>
-          <p:cNvPr id="6" name="Rounded Rectangle 5"/>
+              <a:t>Exploratory Data Analysis: Distributions &amp; Correlations</a:t>
+            </a:r>
+          </a:p>
+        </p:txBody>
+      </p:sp>
+      <p:sp>
+        <p:nvSpPr>
+          <p:cNvPr id="5" name="Rectangle 4"/>
           <p:cNvSpPr/>
           <p:nvPr/>
         </p:nvSpPr>
         <p:spPr>
           <a:xfrm>
-            <a:off x="6217920" y="1554480"/>
-            <a:ext cx="5212080" cy="4754880"/>
-          </a:xfrm>
-          <a:prstGeom prst="roundRect">
+            <a:off x="731520" y="1280160"/>
+            <a:ext cx="10728655" cy="18288"/>
+          </a:xfrm>
+          <a:prstGeom prst="rect">
             <a:avLst/>
           </a:prstGeom>
           <a:solidFill>
-            <a:srgbClr val="F8FAFC"/>
+            <a:srgbClr val="CBD5E1"/>
           </a:solidFill>
           <a:ln>
             <a:solidFill>
-              <a:srgbClr val="E2E8F0"/>
+              <a:srgbClr val="CBD5E1"/>
             </a:solidFill>
           </a:ln>
         </p:spPr>
@@ -6293,6 +6379,51 @@
           </a:fontRef>
         </p:style>
         <p:txBody>
+          <a:bodyPr rtlCol="0" anchor="ctr"/>
+          <a:lstStyle/>
+          <a:p>
+            <a:pPr algn="ctr"/>
+          </a:p>
+        </p:txBody>
+      </p:sp>
+      <p:sp>
+        <p:nvSpPr>
+          <p:cNvPr id="6" name="Rounded Rectangle 5"/>
+          <p:cNvSpPr/>
+          <p:nvPr/>
+        </p:nvSpPr>
+        <p:spPr>
+          <a:xfrm>
+            <a:off x="731520" y="1554480"/>
+            <a:ext cx="5120640" cy="4754880"/>
+          </a:xfrm>
+          <a:prstGeom prst="roundRect">
+            <a:avLst/>
+          </a:prstGeom>
+          <a:solidFill>
+            <a:srgbClr val="FFFFFF"/>
+          </a:solidFill>
+          <a:ln>
+            <a:solidFill>
+              <a:srgbClr val="CBD5E1"/>
+            </a:solidFill>
+          </a:ln>
+        </p:spPr>
+        <p:style>
+          <a:lnRef idx="1">
+            <a:schemeClr val="accent1"/>
+          </a:lnRef>
+          <a:fillRef idx="3">
+            <a:schemeClr val="accent1"/>
+          </a:fillRef>
+          <a:effectRef idx="2">
+            <a:schemeClr val="accent1"/>
+          </a:effectRef>
+          <a:fontRef idx="minor">
+            <a:schemeClr val="lt1"/>
+          </a:fontRef>
+        </p:style>
+        <p:txBody>
           <a:bodyPr rtlCol="0" anchor="ctr" wrap="square"/>
           <a:lstStyle/>
           <a:p>
@@ -6304,7 +6435,7 @@
               </a:defRPr>
             </a:pPr>
             <a:r>
-              <a:t>Empirical Distribution Characteristics</a:t>
+              <a:t>Pearson Linear Correlation Rankings</a:t>
             </a:r>
           </a:p>
           <a:p>
@@ -6319,15 +6450,15 @@
               </a:defRPr>
             </a:pPr>
             <a:r>
-              <a:t>Extreme Pareto Skewness: </a:t>
+              <a:t>Total Medals Won (Volume): </a:t>
             </a:r>
             <a:r>
               <a:rPr b="0">
                 <a:solidFill>
-                  <a:srgbClr val="475569"/>
+                  <a:srgbClr val="334155"/>
                 </a:solidFill>
               </a:rPr>
-              <a:t>Medal distribution follows a steep power law: 59.94% of all participating delegations win 0 medals, while top 5 nations claim &gt;40% of total medals.</a:t>
+              <a:t>Highest linear predictor is prev_medals (r = +0.901), followed by total_entries (+0.834) and total_athletes (+0.834). Established programs carry persistent momentum.</a:t>
             </a:r>
           </a:p>
           <a:p>
@@ -6342,15 +6473,15 @@
               </a:defRPr>
             </a:pPr>
             <a:r>
-              <a:t>Medal Winners vs Non-Winners: </a:t>
+              <a:t>Podium Occurrence (Any Medal): </a:t>
             </a:r>
             <a:r>
               <a:rPr b="0">
                 <a:solidFill>
-                  <a:srgbClr val="475569"/>
+                  <a:srgbClr val="334155"/>
                 </a:solidFill>
               </a:rPr>
-              <a:t>Median roster for medal-winning teams is 142 athletes across 16 sports; median roster for non-winners is 11 athletes across 4 sports (12.9x difference).</a:t>
+              <a:t>Highest linear predictor is num_sports (r = +0.702), followed by num_events (+0.635). Expanding across sports gives independent chances to win at least one medal.</a:t>
             </a:r>
           </a:p>
           <a:p>
@@ -6365,15 +6496,15 @@
               </a:defRPr>
             </a:pPr>
             <a:r>
-              <a:t>Non-Linear Threshold Effects: </a:t>
+              <a:t>Host Nation Benefit: </a:t>
             </a:r>
             <a:r>
               <a:rPr b="0">
                 <a:solidFill>
-                  <a:srgbClr val="475569"/>
+                  <a:srgbClr val="334155"/>
                 </a:solidFill>
               </a:rPr>
-              <a:t>Medal probability shows an S-curve: having &lt;15 athletes yields &lt;5% podium probability; exceeding 60 athletes crosses 70% podium probability.</a:t>
+              <a:t>Host status correlates moderately with medals (r = +0.304), yielding on average +4.12 additional medals via quota entry rules and crowd familiarity.</a:t>
             </a:r>
           </a:p>
           <a:p>
@@ -6388,15 +6519,161 @@
               </a:defRPr>
             </a:pPr>
             <a:r>
-              <a:t>Model Implications: </a:t>
+              <a:t>Biometrics Divergence: </a:t>
             </a:r>
             <a:r>
               <a:rPr b="0">
                 <a:solidFill>
-                  <a:srgbClr val="475569"/>
+                  <a:srgbClr val="334155"/>
                 </a:solidFill>
               </a:rPr>
-              <a:t>Severe skewness and non-linear thresholds mean linear regression alone is insufficient. Tree-based partitioning is required.</a:t>
+              <a:t>Athlete biometrics (mean_age r=+0.012, mean_bmi r=-0.006) show negligible linear correlation because optimal body types vary dramatically across sports.</a:t>
+            </a:r>
+          </a:p>
+        </p:txBody>
+      </p:sp>
+      <p:sp>
+        <p:nvSpPr>
+          <p:cNvPr id="7" name="Rounded Rectangle 6"/>
+          <p:cNvSpPr/>
+          <p:nvPr/>
+        </p:nvSpPr>
+        <p:spPr>
+          <a:xfrm>
+            <a:off x="6217920" y="1554480"/>
+            <a:ext cx="5212080" cy="4754880"/>
+          </a:xfrm>
+          <a:prstGeom prst="roundRect">
+            <a:avLst/>
+          </a:prstGeom>
+          <a:solidFill>
+            <a:srgbClr val="FFFFFF"/>
+          </a:solidFill>
+          <a:ln>
+            <a:solidFill>
+              <a:srgbClr val="CBD5E1"/>
+            </a:solidFill>
+          </a:ln>
+        </p:spPr>
+        <p:style>
+          <a:lnRef idx="1">
+            <a:schemeClr val="accent1"/>
+          </a:lnRef>
+          <a:fillRef idx="3">
+            <a:schemeClr val="accent1"/>
+          </a:fillRef>
+          <a:effectRef idx="2">
+            <a:schemeClr val="accent1"/>
+          </a:effectRef>
+          <a:fontRef idx="minor">
+            <a:schemeClr val="lt1"/>
+          </a:fontRef>
+        </p:style>
+        <p:txBody>
+          <a:bodyPr rtlCol="0" anchor="ctr" wrap="square"/>
+          <a:lstStyle/>
+          <a:p>
+            <a:pPr algn="ctr">
+              <a:defRPr sz="1500" b="1">
+                <a:solidFill>
+                  <a:srgbClr val="1E3A8A"/>
+                </a:solidFill>
+              </a:defRPr>
+            </a:pPr>
+            <a:r>
+              <a:t>Empirical Distribution Characteristics</a:t>
+            </a:r>
+          </a:p>
+          <a:p>
+            <a:pPr>
+              <a:spcBef>
+                <a:spcPts val="800"/>
+              </a:spcBef>
+              <a:defRPr b="1" sz="1100">
+                <a:solidFill>
+                  <a:srgbClr val="0F172A"/>
+                </a:solidFill>
+              </a:defRPr>
+            </a:pPr>
+            <a:r>
+              <a:t>Extreme Pareto Skewness: </a:t>
+            </a:r>
+            <a:r>
+              <a:rPr b="0">
+                <a:solidFill>
+                  <a:srgbClr val="334155"/>
+                </a:solidFill>
+              </a:rPr>
+              <a:t>Medal counts follow a severe power law: 59.94% of delegations win 0 medals, while top 5 nations capture over 40% of all medals.</a:t>
+            </a:r>
+          </a:p>
+          <a:p>
+            <a:pPr>
+              <a:spcBef>
+                <a:spcPts val="800"/>
+              </a:spcBef>
+              <a:defRPr b="1" sz="1100">
+                <a:solidFill>
+                  <a:srgbClr val="0F172A"/>
+                </a:solidFill>
+              </a:defRPr>
+            </a:pPr>
+            <a:r>
+              <a:t>Medal Winners vs Non-Winners: </a:t>
+            </a:r>
+            <a:r>
+              <a:rPr b="0">
+                <a:solidFill>
+                  <a:srgbClr val="334155"/>
+                </a:solidFill>
+              </a:rPr>
+              <a:t>Median roster for medal-winning teams is 142 athletes across 16 sports; median roster for non-winners is 11 athletes across 4 sports (12.9x difference).</a:t>
+            </a:r>
+          </a:p>
+          <a:p>
+            <a:pPr>
+              <a:spcBef>
+                <a:spcPts val="800"/>
+              </a:spcBef>
+              <a:defRPr b="1" sz="1100">
+                <a:solidFill>
+                  <a:srgbClr val="0F172A"/>
+                </a:solidFill>
+              </a:defRPr>
+            </a:pPr>
+            <a:r>
+              <a:t>Non-Linear Threshold Dynamics: </a:t>
+            </a:r>
+            <a:r>
+              <a:rPr b="0">
+                <a:solidFill>
+                  <a:srgbClr val="334155"/>
+                </a:solidFill>
+              </a:rPr>
+              <a:t>Medal probability exhibits an S-curve: delegations with &lt;15 athletes have &lt;5% podium probability; exceeding 60 athletes crosses 70% podium probability.</a:t>
+            </a:r>
+          </a:p>
+          <a:p>
+            <a:pPr>
+              <a:spcBef>
+                <a:spcPts val="800"/>
+              </a:spcBef>
+              <a:defRPr b="1" sz="1100">
+                <a:solidFill>
+                  <a:srgbClr val="0F172A"/>
+                </a:solidFill>
+              </a:defRPr>
+            </a:pPr>
+            <a:r>
+              <a:t>Methodological Impact: </a:t>
+            </a:r>
+            <a:r>
+              <a:rPr b="0">
+                <a:solidFill>
+                  <a:srgbClr val="334155"/>
+                </a:solidFill>
+              </a:rPr>
+              <a:t>Severe skewness and non-linear thresholds make standard linear models prone to bias. Tree-based partitioning is required.</a:t>
             </a:r>
           </a:p>
         </p:txBody>
@@ -6421,140 +6698,23 @@
       <p:grpSpPr/>
       <p:sp>
         <p:nvSpPr>
-          <p:cNvPr id="2" name="TextBox 1"/>
-          <p:cNvSpPr txBox="1"/>
-          <p:nvPr/>
-        </p:nvSpPr>
-        <p:spPr>
-          <a:xfrm>
-            <a:off x="731520" y="365760"/>
-            <a:ext cx="10698480" cy="320040"/>
-          </a:xfrm>
-          <a:prstGeom prst="rect">
-            <a:avLst/>
-          </a:prstGeom>
-          <a:noFill/>
-        </p:spPr>
-        <p:txBody>
-          <a:bodyPr wrap="square">
-            <a:spAutoFit/>
-          </a:bodyPr>
-          <a:lstStyle/>
-          <a:p>
-            <a:pPr>
-              <a:defRPr sz="1000" b="1">
-                <a:solidFill>
-                  <a:srgbClr val="2563EB"/>
-                </a:solidFill>
-              </a:defRPr>
-            </a:pPr>
-            <a:r>
-              <a:t>SPORTS ANALYTICS &amp; MACHINE LEARNING</a:t>
-            </a:r>
-          </a:p>
-        </p:txBody>
-      </p:sp>
-      <p:sp>
-        <p:nvSpPr>
-          <p:cNvPr id="3" name="TextBox 2"/>
-          <p:cNvSpPr txBox="1"/>
-          <p:nvPr/>
-        </p:nvSpPr>
-        <p:spPr>
-          <a:xfrm>
-            <a:off x="731520" y="640080"/>
-            <a:ext cx="10698480" cy="640080"/>
-          </a:xfrm>
-          <a:prstGeom prst="rect">
-            <a:avLst/>
-          </a:prstGeom>
-          <a:noFill/>
-        </p:spPr>
-        <p:txBody>
-          <a:bodyPr wrap="square">
-            <a:spAutoFit/>
-          </a:bodyPr>
-          <a:lstStyle/>
-          <a:p>
-            <a:pPr>
-              <a:defRPr sz="2200" b="1">
-                <a:solidFill>
-                  <a:srgbClr val="0F172A"/>
-                </a:solidFill>
-              </a:defRPr>
-            </a:pPr>
-            <a:r>
-              <a:t>Model Selection: Why Random Forest is the Best Algorithm</a:t>
-            </a:r>
-          </a:p>
-        </p:txBody>
-      </p:sp>
-      <p:sp>
-        <p:nvSpPr>
-          <p:cNvPr id="4" name="Rectangle 3"/>
+          <p:cNvPr id="2" name="Rectangle 1"/>
           <p:cNvSpPr/>
           <p:nvPr/>
         </p:nvSpPr>
         <p:spPr>
           <a:xfrm>
-            <a:off x="731520" y="1280160"/>
-            <a:ext cx="10728655" cy="18288"/>
+            <a:off x="0" y="0"/>
+            <a:ext cx="12191695" cy="6858000"/>
           </a:xfrm>
           <a:prstGeom prst="rect">
-            <a:avLst/>
-          </a:prstGeom>
-          <a:solidFill>
-            <a:srgbClr val="E2E8F0"/>
-          </a:solidFill>
-          <a:ln>
-            <a:solidFill>
-              <a:srgbClr val="E2E8F0"/>
-            </a:solidFill>
-          </a:ln>
-        </p:spPr>
-        <p:style>
-          <a:lnRef idx="1">
-            <a:schemeClr val="accent1"/>
-          </a:lnRef>
-          <a:fillRef idx="3">
-            <a:schemeClr val="accent1"/>
-          </a:fillRef>
-          <a:effectRef idx="2">
-            <a:schemeClr val="accent1"/>
-          </a:effectRef>
-          <a:fontRef idx="minor">
-            <a:schemeClr val="lt1"/>
-          </a:fontRef>
-        </p:style>
-        <p:txBody>
-          <a:bodyPr rtlCol="0" anchor="ctr"/>
-          <a:lstStyle/>
-          <a:p>
-            <a:pPr algn="ctr"/>
-          </a:p>
-        </p:txBody>
-      </p:sp>
-      <p:sp>
-        <p:nvSpPr>
-          <p:cNvPr id="5" name="Rounded Rectangle 4"/>
-          <p:cNvSpPr/>
-          <p:nvPr/>
-        </p:nvSpPr>
-        <p:spPr>
-          <a:xfrm>
-            <a:off x="731520" y="1463040"/>
-            <a:ext cx="10698480" cy="868680"/>
-          </a:xfrm>
-          <a:prstGeom prst="roundRect">
             <a:avLst/>
           </a:prstGeom>
           <a:solidFill>
             <a:srgbClr val="F8FAFC"/>
           </a:solidFill>
           <a:ln>
-            <a:solidFill>
-              <a:srgbClr val="E2E8F0"/>
-            </a:solidFill>
+            <a:noFill/>
           </a:ln>
         </p:spPr>
         <p:style>
@@ -6572,54 +6732,103 @@
           </a:fontRef>
         </p:style>
         <p:txBody>
-          <a:bodyPr rtlCol="0" anchor="ctr" wrap="square"/>
-          <a:lstStyle/>
-          <a:p>
-            <a:pPr algn="ctr">
-              <a:defRPr sz="1250" b="1">
-                <a:solidFill>
-                  <a:srgbClr val="1E3A8A"/>
-                </a:solidFill>
-              </a:defRPr>
-            </a:pPr>
-            <a:r>
-              <a:t>1. Direct Problem Alignment (Feature Importance)</a:t>
-            </a:r>
-          </a:p>
-          <a:p>
-            <a:pPr>
-              <a:defRPr sz="950">
-                <a:solidFill>
-                  <a:srgbClr val="475569"/>
-                </a:solidFill>
-              </a:defRPr>
-            </a:pPr>
-            <a:r>
-              <a:t>The problem statement explicitly requires understanding which factors are associated with team results. Random Forest natively outputs Mean Decrease in Impurity (Gini MDI) and Permutation Importance across all 200 trees, providing objective factor attribution.</a:t>
-            </a:r>
-          </a:p>
-        </p:txBody>
-      </p:sp>
-      <p:sp>
-        <p:nvSpPr>
-          <p:cNvPr id="6" name="Rounded Rectangle 5"/>
+          <a:bodyPr rtlCol="0" anchor="ctr"/>
+          <a:lstStyle/>
+          <a:p>
+            <a:pPr algn="ctr"/>
+          </a:p>
+        </p:txBody>
+      </p:sp>
+      <p:sp>
+        <p:nvSpPr>
+          <p:cNvPr id="3" name="TextBox 2"/>
+          <p:cNvSpPr txBox="1"/>
+          <p:nvPr/>
+        </p:nvSpPr>
+        <p:spPr>
+          <a:xfrm>
+            <a:off x="731520" y="365760"/>
+            <a:ext cx="10698480" cy="320040"/>
+          </a:xfrm>
+          <a:prstGeom prst="rect">
+            <a:avLst/>
+          </a:prstGeom>
+          <a:noFill/>
+        </p:spPr>
+        <p:txBody>
+          <a:bodyPr wrap="square">
+            <a:spAutoFit/>
+          </a:bodyPr>
+          <a:lstStyle/>
+          <a:p>
+            <a:pPr>
+              <a:defRPr sz="1000" b="1">
+                <a:solidFill>
+                  <a:srgbClr val="1D4ED8"/>
+                </a:solidFill>
+              </a:defRPr>
+            </a:pPr>
+            <a:r>
+              <a:t>SPORTS ANALYTICS &amp; MACHINE LEARNING</a:t>
+            </a:r>
+          </a:p>
+        </p:txBody>
+      </p:sp>
+      <p:sp>
+        <p:nvSpPr>
+          <p:cNvPr id="4" name="TextBox 3"/>
+          <p:cNvSpPr txBox="1"/>
+          <p:nvPr/>
+        </p:nvSpPr>
+        <p:spPr>
+          <a:xfrm>
+            <a:off x="731520" y="640080"/>
+            <a:ext cx="10698480" cy="640080"/>
+          </a:xfrm>
+          <a:prstGeom prst="rect">
+            <a:avLst/>
+          </a:prstGeom>
+          <a:noFill/>
+        </p:spPr>
+        <p:txBody>
+          <a:bodyPr wrap="square">
+            <a:spAutoFit/>
+          </a:bodyPr>
+          <a:lstStyle/>
+          <a:p>
+            <a:pPr>
+              <a:defRPr sz="2200" b="1">
+                <a:solidFill>
+                  <a:srgbClr val="0F172A"/>
+                </a:solidFill>
+              </a:defRPr>
+            </a:pPr>
+            <a:r>
+              <a:t>Model Selection: Technical Justification for Random Forest</a:t>
+            </a:r>
+          </a:p>
+        </p:txBody>
+      </p:sp>
+      <p:sp>
+        <p:nvSpPr>
+          <p:cNvPr id="5" name="Rectangle 4"/>
           <p:cNvSpPr/>
           <p:nvPr/>
         </p:nvSpPr>
         <p:spPr>
           <a:xfrm>
-            <a:off x="731520" y="2423160"/>
-            <a:ext cx="10698480" cy="868680"/>
-          </a:xfrm>
-          <a:prstGeom prst="roundRect">
+            <a:off x="731520" y="1280160"/>
+            <a:ext cx="10728655" cy="18288"/>
+          </a:xfrm>
+          <a:prstGeom prst="rect">
             <a:avLst/>
           </a:prstGeom>
           <a:solidFill>
-            <a:srgbClr val="F8FAFC"/>
+            <a:srgbClr val="CBD5E1"/>
           </a:solidFill>
           <a:ln>
             <a:solidFill>
-              <a:srgbClr val="E2E8F0"/>
+              <a:srgbClr val="CBD5E1"/>
             </a:solidFill>
           </a:ln>
         </p:spPr>
@@ -6638,54 +6847,33 @@
           </a:fontRef>
         </p:style>
         <p:txBody>
-          <a:bodyPr rtlCol="0" anchor="ctr" wrap="square"/>
-          <a:lstStyle/>
-          <a:p>
-            <a:pPr algn="ctr">
-              <a:defRPr sz="1250" b="1">
-                <a:solidFill>
-                  <a:srgbClr val="1E3A8A"/>
-                </a:solidFill>
-              </a:defRPr>
-            </a:pPr>
-            <a:r>
-              <a:t>2. Captures Non-Linear Synergies &amp; Thresholds</a:t>
-            </a:r>
-          </a:p>
-          <a:p>
-            <a:pPr>
-              <a:defRPr sz="950">
-                <a:solidFill>
-                  <a:srgbClr val="475569"/>
-                </a:solidFill>
-              </a:defRPr>
-            </a:pPr>
-            <a:r>
-              <a:t>Olympic success is non-linear. Entering 10 more athletes in the same sport has diminishing returns, but expanding into an entirely new sport adds independent medal chances. Tree splits naturally capture these multi-variable interaction effects.</a:t>
-            </a:r>
-          </a:p>
-        </p:txBody>
-      </p:sp>
-      <p:sp>
-        <p:nvSpPr>
-          <p:cNvPr id="7" name="Rounded Rectangle 6"/>
+          <a:bodyPr rtlCol="0" anchor="ctr"/>
+          <a:lstStyle/>
+          <a:p>
+            <a:pPr algn="ctr"/>
+          </a:p>
+        </p:txBody>
+      </p:sp>
+      <p:sp>
+        <p:nvSpPr>
+          <p:cNvPr id="6" name="Rounded Rectangle 5"/>
           <p:cNvSpPr/>
           <p:nvPr/>
         </p:nvSpPr>
         <p:spPr>
           <a:xfrm>
-            <a:off x="731520" y="3383280"/>
+            <a:off x="731520" y="1463040"/>
             <a:ext cx="10698480" cy="868680"/>
           </a:xfrm>
           <a:prstGeom prst="roundRect">
             <a:avLst/>
           </a:prstGeom>
           <a:solidFill>
-            <a:srgbClr val="F8FAFC"/>
+            <a:srgbClr val="FFFFFF"/>
           </a:solidFill>
           <a:ln>
             <a:solidFill>
-              <a:srgbClr val="E2E8F0"/>
+              <a:srgbClr val="CBD5E1"/>
             </a:solidFill>
           </a:ln>
         </p:spPr>
@@ -6708,50 +6896,50 @@
           <a:lstStyle/>
           <a:p>
             <a:pPr algn="ctr">
-              <a:defRPr sz="1250" b="1">
+              <a:defRPr sz="1200" b="1">
                 <a:solidFill>
                   <a:srgbClr val="1E3A8A"/>
                 </a:solidFill>
               </a:defRPr>
             </a:pPr>
             <a:r>
-              <a:t>3. Robustness to Extreme Sports Outliers</a:t>
+              <a:t>1. Direct Problem Alignment (Feature Importance)</a:t>
             </a:r>
           </a:p>
           <a:p>
             <a:pPr>
               <a:defRPr sz="950">
                 <a:solidFill>
-                  <a:srgbClr val="475569"/>
-                </a:solidFill>
-              </a:defRPr>
-            </a:pPr>
-            <a:r>
-              <a:t>Powerhouse delegations like USA (600+ athletes, 100+ medals) act as extreme leverage points in linear/distance models. Decision trees split on rank ordering rather than geometric distance, making them immune to outlier distortion.</a:t>
-            </a:r>
-          </a:p>
-        </p:txBody>
-      </p:sp>
-      <p:sp>
-        <p:nvSpPr>
-          <p:cNvPr id="8" name="Rounded Rectangle 7"/>
+                  <a:srgbClr val="334155"/>
+                </a:solidFill>
+              </a:defRPr>
+            </a:pPr>
+            <a:r>
+              <a:t>The problem statement explicitly requires understanding which factors are associated with team results. Random Forest natively outputs Mean Decrease in Impurity (Gini MDI) and Permutation Importance across all 200 trees, providing objective factor attribution.</a:t>
+            </a:r>
+          </a:p>
+        </p:txBody>
+      </p:sp>
+      <p:sp>
+        <p:nvSpPr>
+          <p:cNvPr id="7" name="Rounded Rectangle 6"/>
           <p:cNvSpPr/>
           <p:nvPr/>
         </p:nvSpPr>
         <p:spPr>
           <a:xfrm>
-            <a:off x="731520" y="4343400"/>
+            <a:off x="731520" y="2423160"/>
             <a:ext cx="10698480" cy="868680"/>
           </a:xfrm>
           <a:prstGeom prst="roundRect">
             <a:avLst/>
           </a:prstGeom>
           <a:solidFill>
-            <a:srgbClr val="F8FAFC"/>
+            <a:srgbClr val="FFFFFF"/>
           </a:solidFill>
           <a:ln>
             <a:solidFill>
-              <a:srgbClr val="E2E8F0"/>
+              <a:srgbClr val="CBD5E1"/>
             </a:solidFill>
           </a:ln>
         </p:spPr>
@@ -6774,50 +6962,50 @@
           <a:lstStyle/>
           <a:p>
             <a:pPr algn="ctr">
-              <a:defRPr sz="1250" b="1">
+              <a:defRPr sz="1200" b="1">
                 <a:solidFill>
                   <a:srgbClr val="1E3A8A"/>
                 </a:solidFill>
               </a:defRPr>
             </a:pPr>
             <a:r>
-              <a:t>4. Variance Reduction via Bagging &amp; Subspace Sampling</a:t>
+              <a:t>2. Captures Non-Linear Synergies &amp; Thresholds</a:t>
             </a:r>
           </a:p>
           <a:p>
             <a:pPr>
               <a:defRPr sz="950">
                 <a:solidFill>
-                  <a:srgbClr val="475569"/>
-                </a:solidFill>
-              </a:defRPr>
-            </a:pPr>
-            <a:r>
-              <a:t>Single decision trees overfit historical tournaments. Random Forest trains 200 de-correlated trees via bootstrap row sampling and sqrt(p) random feature selection at each node, averaging out individual tree noise.</a:t>
-            </a:r>
-          </a:p>
-        </p:txBody>
-      </p:sp>
-      <p:sp>
-        <p:nvSpPr>
-          <p:cNvPr id="9" name="Rounded Rectangle 8"/>
+                  <a:srgbClr val="334155"/>
+                </a:solidFill>
+              </a:defRPr>
+            </a:pPr>
+            <a:r>
+              <a:t>Olympic success is non-linear. Adding 10 athletes in the same sport has diminishing returns, but expanding into an entirely new sport adds independent medal chances. Tree splits naturally capture these multi-variable interaction effects.</a:t>
+            </a:r>
+          </a:p>
+        </p:txBody>
+      </p:sp>
+      <p:sp>
+        <p:nvSpPr>
+          <p:cNvPr id="8" name="Rounded Rectangle 7"/>
           <p:cNvSpPr/>
           <p:nvPr/>
         </p:nvSpPr>
         <p:spPr>
           <a:xfrm>
-            <a:off x="731520" y="5303520"/>
+            <a:off x="731520" y="3383280"/>
             <a:ext cx="10698480" cy="868680"/>
           </a:xfrm>
           <a:prstGeom prst="roundRect">
             <a:avLst/>
           </a:prstGeom>
           <a:solidFill>
-            <a:srgbClr val="F8FAFC"/>
+            <a:srgbClr val="FFFFFF"/>
           </a:solidFill>
           <a:ln>
             <a:solidFill>
-              <a:srgbClr val="E2E8F0"/>
+              <a:srgbClr val="CBD5E1"/>
             </a:solidFill>
           </a:ln>
         </p:spPr>
@@ -6840,13 +7028,145 @@
           <a:lstStyle/>
           <a:p>
             <a:pPr algn="ctr">
-              <a:defRPr sz="1250" b="1">
+              <a:defRPr sz="1200" b="1">
                 <a:solidFill>
                   <a:srgbClr val="1E3A8A"/>
                 </a:solidFill>
               </a:defRPr>
             </a:pPr>
             <a:r>
+              <a:t>3. Robustness to Extreme Sports Outliers</a:t>
+            </a:r>
+          </a:p>
+          <a:p>
+            <a:pPr>
+              <a:defRPr sz="950">
+                <a:solidFill>
+                  <a:srgbClr val="334155"/>
+                </a:solidFill>
+              </a:defRPr>
+            </a:pPr>
+            <a:r>
+              <a:t>Powerhouse delegations like USA (600+ athletes, 100+ medals) act as extreme leverage points in linear/distance models. Decision trees split on rank ordering rather than geometric distance, making them immune to outlier distortion.</a:t>
+            </a:r>
+          </a:p>
+        </p:txBody>
+      </p:sp>
+      <p:sp>
+        <p:nvSpPr>
+          <p:cNvPr id="9" name="Rounded Rectangle 8"/>
+          <p:cNvSpPr/>
+          <p:nvPr/>
+        </p:nvSpPr>
+        <p:spPr>
+          <a:xfrm>
+            <a:off x="731520" y="4343400"/>
+            <a:ext cx="10698480" cy="868680"/>
+          </a:xfrm>
+          <a:prstGeom prst="roundRect">
+            <a:avLst/>
+          </a:prstGeom>
+          <a:solidFill>
+            <a:srgbClr val="FFFFFF"/>
+          </a:solidFill>
+          <a:ln>
+            <a:solidFill>
+              <a:srgbClr val="CBD5E1"/>
+            </a:solidFill>
+          </a:ln>
+        </p:spPr>
+        <p:style>
+          <a:lnRef idx="1">
+            <a:schemeClr val="accent1"/>
+          </a:lnRef>
+          <a:fillRef idx="3">
+            <a:schemeClr val="accent1"/>
+          </a:fillRef>
+          <a:effectRef idx="2">
+            <a:schemeClr val="accent1"/>
+          </a:effectRef>
+          <a:fontRef idx="minor">
+            <a:schemeClr val="lt1"/>
+          </a:fontRef>
+        </p:style>
+        <p:txBody>
+          <a:bodyPr rtlCol="0" anchor="ctr" wrap="square"/>
+          <a:lstStyle/>
+          <a:p>
+            <a:pPr algn="ctr">
+              <a:defRPr sz="1200" b="1">
+                <a:solidFill>
+                  <a:srgbClr val="1E3A8A"/>
+                </a:solidFill>
+              </a:defRPr>
+            </a:pPr>
+            <a:r>
+              <a:t>4. Variance Reduction via Bagging &amp; Subspace Sampling</a:t>
+            </a:r>
+          </a:p>
+          <a:p>
+            <a:pPr>
+              <a:defRPr sz="950">
+                <a:solidFill>
+                  <a:srgbClr val="334155"/>
+                </a:solidFill>
+              </a:defRPr>
+            </a:pPr>
+            <a:r>
+              <a:t>Single decision trees overfit historical tournaments. Random Forest trains 200 de-correlated trees via bootstrap row sampling and sqrt(p) random feature selection at each node, averaging out individual tree noise.</a:t>
+            </a:r>
+          </a:p>
+        </p:txBody>
+      </p:sp>
+      <p:sp>
+        <p:nvSpPr>
+          <p:cNvPr id="10" name="Rounded Rectangle 9"/>
+          <p:cNvSpPr/>
+          <p:nvPr/>
+        </p:nvSpPr>
+        <p:spPr>
+          <a:xfrm>
+            <a:off x="731520" y="5303520"/>
+            <a:ext cx="10698480" cy="868680"/>
+          </a:xfrm>
+          <a:prstGeom prst="roundRect">
+            <a:avLst/>
+          </a:prstGeom>
+          <a:solidFill>
+            <a:srgbClr val="FFFFFF"/>
+          </a:solidFill>
+          <a:ln>
+            <a:solidFill>
+              <a:srgbClr val="CBD5E1"/>
+            </a:solidFill>
+          </a:ln>
+        </p:spPr>
+        <p:style>
+          <a:lnRef idx="1">
+            <a:schemeClr val="accent1"/>
+          </a:lnRef>
+          <a:fillRef idx="3">
+            <a:schemeClr val="accent1"/>
+          </a:fillRef>
+          <a:effectRef idx="2">
+            <a:schemeClr val="accent1"/>
+          </a:effectRef>
+          <a:fontRef idx="minor">
+            <a:schemeClr val="lt1"/>
+          </a:fontRef>
+        </p:style>
+        <p:txBody>
+          <a:bodyPr rtlCol="0" anchor="ctr" wrap="square"/>
+          <a:lstStyle/>
+          <a:p>
+            <a:pPr algn="ctr">
+              <a:defRPr sz="1200" b="1">
+                <a:solidFill>
+                  <a:srgbClr val="1E3A8A"/>
+                </a:solidFill>
+              </a:defRPr>
+            </a:pPr>
+            <a:r>
               <a:t>5. Scale &amp; Monotonic Invariance</a:t>
             </a:r>
           </a:p>
@@ -6854,7 +7174,7 @@
             <a:pPr>
               <a:defRPr sz="950">
                 <a:solidFill>
-                  <a:srgbClr val="475569"/>
+                  <a:srgbClr val="334155"/>
                 </a:solidFill>
               </a:defRPr>
             </a:pPr>
@@ -6884,140 +7204,23 @@
       <p:grpSpPr/>
       <p:sp>
         <p:nvSpPr>
-          <p:cNvPr id="2" name="TextBox 1"/>
-          <p:cNvSpPr txBox="1"/>
-          <p:nvPr/>
-        </p:nvSpPr>
-        <p:spPr>
-          <a:xfrm>
-            <a:off x="731520" y="365760"/>
-            <a:ext cx="10698480" cy="320040"/>
-          </a:xfrm>
-          <a:prstGeom prst="rect">
-            <a:avLst/>
-          </a:prstGeom>
-          <a:noFill/>
-        </p:spPr>
-        <p:txBody>
-          <a:bodyPr wrap="square">
-            <a:spAutoFit/>
-          </a:bodyPr>
-          <a:lstStyle/>
-          <a:p>
-            <a:pPr>
-              <a:defRPr sz="1000" b="1">
-                <a:solidFill>
-                  <a:srgbClr val="2563EB"/>
-                </a:solidFill>
-              </a:defRPr>
-            </a:pPr>
-            <a:r>
-              <a:t>SPORTS ANALYTICS &amp; MACHINE LEARNING</a:t>
-            </a:r>
-          </a:p>
-        </p:txBody>
-      </p:sp>
-      <p:sp>
-        <p:nvSpPr>
-          <p:cNvPr id="3" name="TextBox 2"/>
-          <p:cNvSpPr txBox="1"/>
-          <p:nvPr/>
-        </p:nvSpPr>
-        <p:spPr>
-          <a:xfrm>
-            <a:off x="731520" y="640080"/>
-            <a:ext cx="10698480" cy="640080"/>
-          </a:xfrm>
-          <a:prstGeom prst="rect">
-            <a:avLst/>
-          </a:prstGeom>
-          <a:noFill/>
-        </p:spPr>
-        <p:txBody>
-          <a:bodyPr wrap="square">
-            <a:spAutoFit/>
-          </a:bodyPr>
-          <a:lstStyle/>
-          <a:p>
-            <a:pPr>
-              <a:defRPr sz="2200" b="1">
-                <a:solidFill>
-                  <a:srgbClr val="0F172A"/>
-                </a:solidFill>
-              </a:defRPr>
-            </a:pPr>
-            <a:r>
-              <a:t>Model Evaluation &amp; Benchmark Performance</a:t>
-            </a:r>
-          </a:p>
-        </p:txBody>
-      </p:sp>
-      <p:sp>
-        <p:nvSpPr>
-          <p:cNvPr id="4" name="Rectangle 3"/>
+          <p:cNvPr id="2" name="Rectangle 1"/>
           <p:cNvSpPr/>
           <p:nvPr/>
         </p:nvSpPr>
         <p:spPr>
           <a:xfrm>
-            <a:off x="731520" y="1280160"/>
-            <a:ext cx="10728655" cy="18288"/>
+            <a:off x="0" y="0"/>
+            <a:ext cx="12191695" cy="6858000"/>
           </a:xfrm>
           <a:prstGeom prst="rect">
-            <a:avLst/>
-          </a:prstGeom>
-          <a:solidFill>
-            <a:srgbClr val="E2E8F0"/>
-          </a:solidFill>
-          <a:ln>
-            <a:solidFill>
-              <a:srgbClr val="E2E8F0"/>
-            </a:solidFill>
-          </a:ln>
-        </p:spPr>
-        <p:style>
-          <a:lnRef idx="1">
-            <a:schemeClr val="accent1"/>
-          </a:lnRef>
-          <a:fillRef idx="3">
-            <a:schemeClr val="accent1"/>
-          </a:fillRef>
-          <a:effectRef idx="2">
-            <a:schemeClr val="accent1"/>
-          </a:effectRef>
-          <a:fontRef idx="minor">
-            <a:schemeClr val="lt1"/>
-          </a:fontRef>
-        </p:style>
-        <p:txBody>
-          <a:bodyPr rtlCol="0" anchor="ctr"/>
-          <a:lstStyle/>
-          <a:p>
-            <a:pPr algn="ctr"/>
-          </a:p>
-        </p:txBody>
-      </p:sp>
-      <p:sp>
-        <p:nvSpPr>
-          <p:cNvPr id="5" name="Rounded Rectangle 4"/>
-          <p:cNvSpPr/>
-          <p:nvPr/>
-        </p:nvSpPr>
-        <p:spPr>
-          <a:xfrm>
-            <a:off x="731520" y="1554480"/>
-            <a:ext cx="5120640" cy="4754880"/>
-          </a:xfrm>
-          <a:prstGeom prst="roundRect">
             <a:avLst/>
           </a:prstGeom>
           <a:solidFill>
             <a:srgbClr val="F8FAFC"/>
           </a:solidFill>
           <a:ln>
-            <a:solidFill>
-              <a:srgbClr val="E2E8F0"/>
-            </a:solidFill>
+            <a:noFill/>
           </a:ln>
         </p:spPr>
         <p:style>
@@ -7035,228 +7238,103 @@
           </a:fontRef>
         </p:style>
         <p:txBody>
-          <a:bodyPr rtlCol="0" anchor="ctr" wrap="square"/>
-          <a:lstStyle/>
-          <a:p>
-            <a:pPr algn="ctr">
-              <a:defRPr sz="1500" b="1">
-                <a:solidFill>
-                  <a:srgbClr val="1E3A8A"/>
-                </a:solidFill>
-              </a:defRPr>
-            </a:pPr>
-            <a:r>
-              <a:t>Classification Model: Random Forest</a:t>
-            </a:r>
-          </a:p>
-          <a:p>
-            <a:pPr>
-              <a:spcBef>
-                <a:spcPts val="600"/>
-              </a:spcBef>
-              <a:defRPr b="1" sz="1100">
+          <a:bodyPr rtlCol="0" anchor="ctr"/>
+          <a:lstStyle/>
+          <a:p>
+            <a:pPr algn="ctr"/>
+          </a:p>
+        </p:txBody>
+      </p:sp>
+      <p:sp>
+        <p:nvSpPr>
+          <p:cNvPr id="3" name="TextBox 2"/>
+          <p:cNvSpPr txBox="1"/>
+          <p:nvPr/>
+        </p:nvSpPr>
+        <p:spPr>
+          <a:xfrm>
+            <a:off x="731520" y="365760"/>
+            <a:ext cx="10698480" cy="320040"/>
+          </a:xfrm>
+          <a:prstGeom prst="rect">
+            <a:avLst/>
+          </a:prstGeom>
+          <a:noFill/>
+        </p:spPr>
+        <p:txBody>
+          <a:bodyPr wrap="square">
+            <a:spAutoFit/>
+          </a:bodyPr>
+          <a:lstStyle/>
+          <a:p>
+            <a:pPr>
+              <a:defRPr sz="1000" b="1">
+                <a:solidFill>
+                  <a:srgbClr val="1D4ED8"/>
+                </a:solidFill>
+              </a:defRPr>
+            </a:pPr>
+            <a:r>
+              <a:t>SPORTS ANALYTICS &amp; MACHINE LEARNING</a:t>
+            </a:r>
+          </a:p>
+        </p:txBody>
+      </p:sp>
+      <p:sp>
+        <p:nvSpPr>
+          <p:cNvPr id="4" name="TextBox 3"/>
+          <p:cNvSpPr txBox="1"/>
+          <p:nvPr/>
+        </p:nvSpPr>
+        <p:spPr>
+          <a:xfrm>
+            <a:off x="731520" y="640080"/>
+            <a:ext cx="10698480" cy="640080"/>
+          </a:xfrm>
+          <a:prstGeom prst="rect">
+            <a:avLst/>
+          </a:prstGeom>
+          <a:noFill/>
+        </p:spPr>
+        <p:txBody>
+          <a:bodyPr wrap="square">
+            <a:spAutoFit/>
+          </a:bodyPr>
+          <a:lstStyle/>
+          <a:p>
+            <a:pPr>
+              <a:defRPr sz="2200" b="1">
                 <a:solidFill>
                   <a:srgbClr val="0F172A"/>
                 </a:solidFill>
               </a:defRPr>
             </a:pPr>
             <a:r>
-              <a:t>Test Accuracy: </a:t>
-            </a:r>
-            <a:r>
-              <a:rPr b="1">
-                <a:solidFill>
-                  <a:srgbClr val="2563EB"/>
-                </a:solidFill>
-              </a:rPr>
-              <a:t>90.51% </a:t>
-            </a:r>
-            <a:r>
-              <a:rPr b="0">
-                <a:solidFill>
-                  <a:srgbClr val="475569"/>
-                </a:solidFill>
-              </a:rPr>
-              <a:t>(Correctly classifies 9 out of 10 delegations)</a:t>
-            </a:r>
-          </a:p>
-          <a:p>
-            <a:pPr>
-              <a:spcBef>
-                <a:spcPts val="600"/>
-              </a:spcBef>
-              <a:defRPr b="1" sz="1100">
-                <a:solidFill>
-                  <a:srgbClr val="0F172A"/>
-                </a:solidFill>
-              </a:defRPr>
-            </a:pPr>
-            <a:r>
-              <a:t>Precision (Medal Winners): </a:t>
-            </a:r>
-            <a:r>
-              <a:rPr b="1">
-                <a:solidFill>
-                  <a:srgbClr val="2563EB"/>
-                </a:solidFill>
-              </a:rPr>
-              <a:t>90.12% </a:t>
-            </a:r>
-            <a:r>
-              <a:rPr b="0">
-                <a:solidFill>
-                  <a:srgbClr val="475569"/>
-                </a:solidFill>
-              </a:rPr>
-              <a:t>(Minimal false positives when predicting podium)</a:t>
-            </a:r>
-          </a:p>
-          <a:p>
-            <a:pPr>
-              <a:spcBef>
-                <a:spcPts val="600"/>
-              </a:spcBef>
-              <a:defRPr b="1" sz="1100">
-                <a:solidFill>
-                  <a:srgbClr val="0F172A"/>
-                </a:solidFill>
-              </a:defRPr>
-            </a:pPr>
-            <a:r>
-              <a:t>Recall (Medal Winners): </a:t>
-            </a:r>
-            <a:r>
-              <a:rPr b="1">
-                <a:solidFill>
-                  <a:srgbClr val="2563EB"/>
-                </a:solidFill>
-              </a:rPr>
-              <a:t>85.64% </a:t>
-            </a:r>
-            <a:r>
-              <a:rPr b="0">
-                <a:solidFill>
-                  <a:srgbClr val="475569"/>
-                </a:solidFill>
-              </a:rPr>
-              <a:t>(Captures 85.6% of all genuine medal-winning nations)</a:t>
-            </a:r>
-          </a:p>
-          <a:p>
-            <a:pPr>
-              <a:spcBef>
-                <a:spcPts val="600"/>
-              </a:spcBef>
-              <a:defRPr b="1" sz="1100">
-                <a:solidFill>
-                  <a:srgbClr val="0F172A"/>
-                </a:solidFill>
-              </a:defRPr>
-            </a:pPr>
-            <a:r>
-              <a:t>F1-Score: </a:t>
-            </a:r>
-            <a:r>
-              <a:rPr b="1">
-                <a:solidFill>
-                  <a:srgbClr val="2563EB"/>
-                </a:solidFill>
-              </a:rPr>
-              <a:t>0.8782 </a:t>
-            </a:r>
-            <a:r>
-              <a:rPr b="0">
-                <a:solidFill>
-                  <a:srgbClr val="475569"/>
-                </a:solidFill>
-              </a:rPr>
-              <a:t>(Harmonic balance of precision and recall)</a:t>
-            </a:r>
-          </a:p>
-          <a:p>
-            <a:pPr>
-              <a:spcBef>
-                <a:spcPts val="600"/>
-              </a:spcBef>
-              <a:defRPr b="1" sz="1100">
-                <a:solidFill>
-                  <a:srgbClr val="0F172A"/>
-                </a:solidFill>
-              </a:defRPr>
-            </a:pPr>
-            <a:r>
-              <a:t>ROC-AUC Score: </a:t>
-            </a:r>
-            <a:r>
-              <a:rPr b="1">
-                <a:solidFill>
-                  <a:srgbClr val="2563EB"/>
-                </a:solidFill>
-              </a:rPr>
-              <a:t>0.9584 </a:t>
-            </a:r>
-            <a:r>
-              <a:rPr b="0">
-                <a:solidFill>
-                  <a:srgbClr val="475569"/>
-                </a:solidFill>
-              </a:rPr>
-              <a:t>(Outstanding discriminative threshold separation)</a:t>
-            </a:r>
-          </a:p>
-          <a:p>
-            <a:pPr>
-              <a:spcBef>
-                <a:spcPts val="600"/>
-              </a:spcBef>
-              <a:defRPr b="1" sz="1100">
-                <a:solidFill>
-                  <a:srgbClr val="0F172A"/>
-                </a:solidFill>
-              </a:defRPr>
-            </a:pPr>
-            <a:r>
-              <a:t>Confusion Matrix (n=453): </a:t>
-            </a:r>
-            <a:r>
-              <a:rPr b="1">
-                <a:solidFill>
-                  <a:srgbClr val="2563EB"/>
-                </a:solidFill>
-              </a:rPr>
-              <a:t>TN: 255 | FP: 17 | FN: 26 | TP: 155 </a:t>
-            </a:r>
-            <a:r>
-              <a:rPr b="0">
-                <a:solidFill>
-                  <a:srgbClr val="475569"/>
-                </a:solidFill>
-              </a:rPr>
-              <a:t>(Held-out test set distribution)</a:t>
-            </a:r>
-          </a:p>
-        </p:txBody>
-      </p:sp>
-      <p:sp>
-        <p:nvSpPr>
-          <p:cNvPr id="6" name="Rounded Rectangle 5"/>
+              <a:t>Model Evaluation &amp; Benchmark Performance</a:t>
+            </a:r>
+          </a:p>
+        </p:txBody>
+      </p:sp>
+      <p:sp>
+        <p:nvSpPr>
+          <p:cNvPr id="5" name="Rectangle 4"/>
           <p:cNvSpPr/>
           <p:nvPr/>
         </p:nvSpPr>
         <p:spPr>
           <a:xfrm>
-            <a:off x="6217920" y="1554480"/>
-            <a:ext cx="5212080" cy="4754880"/>
-          </a:xfrm>
-          <a:prstGeom prst="roundRect">
+            <a:off x="731520" y="1280160"/>
+            <a:ext cx="10728655" cy="18288"/>
+          </a:xfrm>
+          <a:prstGeom prst="rect">
             <a:avLst/>
           </a:prstGeom>
           <a:solidFill>
-            <a:srgbClr val="F8FAFC"/>
+            <a:srgbClr val="CBD5E1"/>
           </a:solidFill>
           <a:ln>
             <a:solidFill>
-              <a:srgbClr val="E2E8F0"/>
+              <a:srgbClr val="CBD5E1"/>
             </a:solidFill>
           </a:ln>
         </p:spPr>
@@ -7275,6 +7353,51 @@
           </a:fontRef>
         </p:style>
         <p:txBody>
+          <a:bodyPr rtlCol="0" anchor="ctr"/>
+          <a:lstStyle/>
+          <a:p>
+            <a:pPr algn="ctr"/>
+          </a:p>
+        </p:txBody>
+      </p:sp>
+      <p:sp>
+        <p:nvSpPr>
+          <p:cNvPr id="6" name="Rounded Rectangle 5"/>
+          <p:cNvSpPr/>
+          <p:nvPr/>
+        </p:nvSpPr>
+        <p:spPr>
+          <a:xfrm>
+            <a:off x="731520" y="1554480"/>
+            <a:ext cx="5120640" cy="4754880"/>
+          </a:xfrm>
+          <a:prstGeom prst="roundRect">
+            <a:avLst/>
+          </a:prstGeom>
+          <a:solidFill>
+            <a:srgbClr val="FFFFFF"/>
+          </a:solidFill>
+          <a:ln>
+            <a:solidFill>
+              <a:srgbClr val="CBD5E1"/>
+            </a:solidFill>
+          </a:ln>
+        </p:spPr>
+        <p:style>
+          <a:lnRef idx="1">
+            <a:schemeClr val="accent1"/>
+          </a:lnRef>
+          <a:fillRef idx="3">
+            <a:schemeClr val="accent1"/>
+          </a:fillRef>
+          <a:effectRef idx="2">
+            <a:schemeClr val="accent1"/>
+          </a:effectRef>
+          <a:fontRef idx="minor">
+            <a:schemeClr val="lt1"/>
+          </a:fontRef>
+        </p:style>
+        <p:txBody>
           <a:bodyPr rtlCol="0" anchor="ctr" wrap="square"/>
           <a:lstStyle/>
           <a:p>
@@ -7286,7 +7409,7 @@
               </a:defRPr>
             </a:pPr>
             <a:r>
-              <a:t>Regression Model: Gradient Boosting</a:t>
+              <a:t>Classification Model: Random Forest</a:t>
             </a:r>
           </a:p>
           <a:p>
@@ -7301,23 +7424,23 @@
               </a:defRPr>
             </a:pPr>
             <a:r>
-              <a:t>Train R2 (Normal R2): </a:t>
+              <a:t>Test Accuracy: </a:t>
             </a:r>
             <a:r>
               <a:rPr b="1">
                 <a:solidFill>
-                  <a:srgbClr val="2563EB"/>
+                  <a:srgbClr val="1D4ED8"/>
                 </a:solidFill>
               </a:rPr>
-              <a:t>0.9863 </a:t>
+              <a:t>90.51% </a:t>
             </a:r>
             <a:r>
               <a:rPr b="0">
                 <a:solidFill>
-                  <a:srgbClr val="475569"/>
+                  <a:srgbClr val="334155"/>
                 </a:solidFill>
               </a:rPr>
-              <a:t>(Explains 98.6% of variance on training data)</a:t>
+              <a:t>(Correctly classifies 9 out of 10 delegations)</a:t>
             </a:r>
           </a:p>
           <a:p>
@@ -7332,23 +7455,23 @@
               </a:defRPr>
             </a:pPr>
             <a:r>
-              <a:t>Test R2 (Normal R2): </a:t>
+              <a:t>Precision (Medal Winners): </a:t>
             </a:r>
             <a:r>
               <a:rPr b="1">
                 <a:solidFill>
-                  <a:srgbClr val="2563EB"/>
+                  <a:srgbClr val="1D4ED8"/>
                 </a:solidFill>
               </a:rPr>
-              <a:t>0.8838 </a:t>
+              <a:t>90.12% </a:t>
             </a:r>
             <a:r>
               <a:rPr b="0">
                 <a:solidFill>
-                  <a:srgbClr val="475569"/>
+                  <a:srgbClr val="334155"/>
                 </a:solidFill>
               </a:rPr>
-              <a:t>(Explains 88.4% of variance on unseen test data)</a:t>
+              <a:t>(Minimal false alarms when predicting podium)</a:t>
             </a:r>
           </a:p>
           <a:p>
@@ -7363,23 +7486,23 @@
               </a:defRPr>
             </a:pPr>
             <a:r>
-              <a:t>Mean Absolute Error (MAE): </a:t>
+              <a:t>Recall (Medal Winners): </a:t>
             </a:r>
             <a:r>
               <a:rPr b="1">
                 <a:solidFill>
-                  <a:srgbClr val="2563EB"/>
+                  <a:srgbClr val="1D4ED8"/>
                 </a:solidFill>
               </a:rPr>
-              <a:t>1.80 Medals </a:t>
+              <a:t>85.64% </a:t>
             </a:r>
             <a:r>
               <a:rPr b="0">
                 <a:solidFill>
-                  <a:srgbClr val="475569"/>
+                  <a:srgbClr val="334155"/>
                 </a:solidFill>
               </a:rPr>
-              <a:t>(Average prediction error across all delegations)</a:t>
+              <a:t>(Captures 85.6% of all true medal-winning nations)</a:t>
             </a:r>
           </a:p>
           <a:p>
@@ -7394,23 +7517,23 @@
               </a:defRPr>
             </a:pPr>
             <a:r>
-              <a:t>Root Mean Squared Error (RMSE): </a:t>
+              <a:t>F1-Score: </a:t>
             </a:r>
             <a:r>
               <a:rPr b="1">
                 <a:solidFill>
-                  <a:srgbClr val="2563EB"/>
+                  <a:srgbClr val="1D4ED8"/>
                 </a:solidFill>
               </a:rPr>
-              <a:t>5.01 Medals </a:t>
+              <a:t>0.8782 </a:t>
             </a:r>
             <a:r>
               <a:rPr b="0">
                 <a:solidFill>
-                  <a:srgbClr val="475569"/>
+                  <a:srgbClr val="334155"/>
                 </a:solidFill>
               </a:rPr>
-              <a:t>(Penalizes large errors on dominant nations)</a:t>
+              <a:t>(Harmonic balance of precision and recall)</a:t>
             </a:r>
           </a:p>
           <a:p>
@@ -7425,23 +7548,23 @@
               </a:defRPr>
             </a:pPr>
             <a:r>
-              <a:t>Baseline Comparison (Dummy): </a:t>
+              <a:t>ROC-AUC Score: </a:t>
             </a:r>
             <a:r>
               <a:rPr b="1">
                 <a:solidFill>
-                  <a:srgbClr val="2563EB"/>
+                  <a:srgbClr val="1D4ED8"/>
                 </a:solidFill>
               </a:rPr>
-              <a:t>MAE: 7.74 | RMSE: 14.69 | R2: 0.00 </a:t>
+              <a:t>0.9584 </a:t>
             </a:r>
             <a:r>
               <a:rPr b="0">
                 <a:solidFill>
-                  <a:srgbClr val="475569"/>
+                  <a:srgbClr val="334155"/>
                 </a:solidFill>
               </a:rPr>
-              <a:t>(Heuristic mean predictor baseline)</a:t>
+              <a:t>(Outstanding discriminative threshold separation)</a:t>
             </a:r>
           </a:p>
           <a:p>
@@ -7456,12 +7579,252 @@
               </a:defRPr>
             </a:pPr>
             <a:r>
+              <a:t>Confusion Matrix (n=453): </a:t>
+            </a:r>
+            <a:r>
+              <a:rPr b="1">
+                <a:solidFill>
+                  <a:srgbClr val="1D4ED8"/>
+                </a:solidFill>
+              </a:rPr>
+              <a:t>TN: 255 | FP: 17 | FN: 26 | TP: 155 </a:t>
+            </a:r>
+            <a:r>
+              <a:rPr b="0">
+                <a:solidFill>
+                  <a:srgbClr val="334155"/>
+                </a:solidFill>
+              </a:rPr>
+              <a:t>(Held-out test set distribution)</a:t>
+            </a:r>
+          </a:p>
+        </p:txBody>
+      </p:sp>
+      <p:sp>
+        <p:nvSpPr>
+          <p:cNvPr id="7" name="Rounded Rectangle 6"/>
+          <p:cNvSpPr/>
+          <p:nvPr/>
+        </p:nvSpPr>
+        <p:spPr>
+          <a:xfrm>
+            <a:off x="6217920" y="1554480"/>
+            <a:ext cx="5212080" cy="4754880"/>
+          </a:xfrm>
+          <a:prstGeom prst="roundRect">
+            <a:avLst/>
+          </a:prstGeom>
+          <a:solidFill>
+            <a:srgbClr val="FFFFFF"/>
+          </a:solidFill>
+          <a:ln>
+            <a:solidFill>
+              <a:srgbClr val="CBD5E1"/>
+            </a:solidFill>
+          </a:ln>
+        </p:spPr>
+        <p:style>
+          <a:lnRef idx="1">
+            <a:schemeClr val="accent1"/>
+          </a:lnRef>
+          <a:fillRef idx="3">
+            <a:schemeClr val="accent1"/>
+          </a:fillRef>
+          <a:effectRef idx="2">
+            <a:schemeClr val="accent1"/>
+          </a:effectRef>
+          <a:fontRef idx="minor">
+            <a:schemeClr val="lt1"/>
+          </a:fontRef>
+        </p:style>
+        <p:txBody>
+          <a:bodyPr rtlCol="0" anchor="ctr" wrap="square"/>
+          <a:lstStyle/>
+          <a:p>
+            <a:pPr algn="ctr">
+              <a:defRPr sz="1500" b="1">
+                <a:solidFill>
+                  <a:srgbClr val="1E3A8A"/>
+                </a:solidFill>
+              </a:defRPr>
+            </a:pPr>
+            <a:r>
+              <a:t>Regression Model: Gradient Boosting</a:t>
+            </a:r>
+          </a:p>
+          <a:p>
+            <a:pPr>
+              <a:spcBef>
+                <a:spcPts val="600"/>
+              </a:spcBef>
+              <a:defRPr b="1" sz="1100">
+                <a:solidFill>
+                  <a:srgbClr val="0F172A"/>
+                </a:solidFill>
+              </a:defRPr>
+            </a:pPr>
+            <a:r>
+              <a:t>Train R2 (Normal R2): </a:t>
+            </a:r>
+            <a:r>
+              <a:rPr b="1">
+                <a:solidFill>
+                  <a:srgbClr val="1D4ED8"/>
+                </a:solidFill>
+              </a:rPr>
+              <a:t>0.9863 </a:t>
+            </a:r>
+            <a:r>
+              <a:rPr b="0">
+                <a:solidFill>
+                  <a:srgbClr val="334155"/>
+                </a:solidFill>
+              </a:rPr>
+              <a:t>(Explains 98.6% of variance on training data)</a:t>
+            </a:r>
+          </a:p>
+          <a:p>
+            <a:pPr>
+              <a:spcBef>
+                <a:spcPts val="600"/>
+              </a:spcBef>
+              <a:defRPr b="1" sz="1100">
+                <a:solidFill>
+                  <a:srgbClr val="0F172A"/>
+                </a:solidFill>
+              </a:defRPr>
+            </a:pPr>
+            <a:r>
+              <a:t>Test R2 (Normal R2): </a:t>
+            </a:r>
+            <a:r>
+              <a:rPr b="1">
+                <a:solidFill>
+                  <a:srgbClr val="1D4ED8"/>
+                </a:solidFill>
+              </a:rPr>
+              <a:t>0.8838 </a:t>
+            </a:r>
+            <a:r>
+              <a:rPr b="0">
+                <a:solidFill>
+                  <a:srgbClr val="334155"/>
+                </a:solidFill>
+              </a:rPr>
+              <a:t>(Explains 88.4% of variance on unseen test data)</a:t>
+            </a:r>
+          </a:p>
+          <a:p>
+            <a:pPr>
+              <a:spcBef>
+                <a:spcPts val="600"/>
+              </a:spcBef>
+              <a:defRPr b="1" sz="1100">
+                <a:solidFill>
+                  <a:srgbClr val="0F172A"/>
+                </a:solidFill>
+              </a:defRPr>
+            </a:pPr>
+            <a:r>
+              <a:t>Mean Absolute Error (MAE): </a:t>
+            </a:r>
+            <a:r>
+              <a:rPr b="1">
+                <a:solidFill>
+                  <a:srgbClr val="1D4ED8"/>
+                </a:solidFill>
+              </a:rPr>
+              <a:t>1.80 Medals </a:t>
+            </a:r>
+            <a:r>
+              <a:rPr b="0">
+                <a:solidFill>
+                  <a:srgbClr val="334155"/>
+                </a:solidFill>
+              </a:rPr>
+              <a:t>(Average prediction error across all delegations)</a:t>
+            </a:r>
+          </a:p>
+          <a:p>
+            <a:pPr>
+              <a:spcBef>
+                <a:spcPts val="600"/>
+              </a:spcBef>
+              <a:defRPr b="1" sz="1100">
+                <a:solidFill>
+                  <a:srgbClr val="0F172A"/>
+                </a:solidFill>
+              </a:defRPr>
+            </a:pPr>
+            <a:r>
+              <a:t>Root Mean Squared Error (RMSE): </a:t>
+            </a:r>
+            <a:r>
+              <a:rPr b="1">
+                <a:solidFill>
+                  <a:srgbClr val="1D4ED8"/>
+                </a:solidFill>
+              </a:rPr>
+              <a:t>5.01 Medals </a:t>
+            </a:r>
+            <a:r>
+              <a:rPr b="0">
+                <a:solidFill>
+                  <a:srgbClr val="334155"/>
+                </a:solidFill>
+              </a:rPr>
+              <a:t>(Penalizes large errors on dominant nations)</a:t>
+            </a:r>
+          </a:p>
+          <a:p>
+            <a:pPr>
+              <a:spcBef>
+                <a:spcPts val="600"/>
+              </a:spcBef>
+              <a:defRPr b="1" sz="1100">
+                <a:solidFill>
+                  <a:srgbClr val="0F172A"/>
+                </a:solidFill>
+              </a:defRPr>
+            </a:pPr>
+            <a:r>
+              <a:t>Baseline Comparison (Dummy): </a:t>
+            </a:r>
+            <a:r>
+              <a:rPr b="1">
+                <a:solidFill>
+                  <a:srgbClr val="1D4ED8"/>
+                </a:solidFill>
+              </a:rPr>
+              <a:t>MAE: 7.74 | RMSE: 14.69 | R2: 0.00 </a:t>
+            </a:r>
+            <a:r>
+              <a:rPr b="0">
+                <a:solidFill>
+                  <a:srgbClr val="334155"/>
+                </a:solidFill>
+              </a:rPr>
+              <a:t>(Heuristic mean predictor baseline)</a:t>
+            </a:r>
+          </a:p>
+          <a:p>
+            <a:pPr>
+              <a:spcBef>
+                <a:spcPts val="600"/>
+              </a:spcBef>
+              <a:defRPr b="1" sz="1100">
+                <a:solidFill>
+                  <a:srgbClr val="0F172A"/>
+                </a:solidFill>
+              </a:defRPr>
+            </a:pPr>
+            <a:r>
               <a:t>Key Evaluation Takeaway: </a:t>
             </a:r>
             <a:r>
               <a:rPr b="1">
                 <a:solidFill>
-                  <a:srgbClr val="2563EB"/>
+                  <a:srgbClr val="1D4ED8"/>
                 </a:solidFill>
               </a:rPr>
               <a:t>Normal R2 demonstrates strong out-of-sample generalization without extreme overfitting. </a:t>
@@ -7469,7 +7832,7 @@
             <a:r>
               <a:rPr b="0">
                 <a:solidFill>
-                  <a:srgbClr val="475569"/>
+                  <a:srgbClr val="334155"/>
                 </a:solidFill>
               </a:rPr>
               <a:t>(Test R2 of 0.8838 confirms reliable medal forecasting)</a:t>
@@ -7497,95 +7860,23 @@
       <p:grpSpPr/>
       <p:sp>
         <p:nvSpPr>
-          <p:cNvPr id="2" name="TextBox 1"/>
-          <p:cNvSpPr txBox="1"/>
-          <p:nvPr/>
-        </p:nvSpPr>
-        <p:spPr>
-          <a:xfrm>
-            <a:off x="731520" y="365760"/>
-            <a:ext cx="10698480" cy="320040"/>
-          </a:xfrm>
-          <a:prstGeom prst="rect">
-            <a:avLst/>
-          </a:prstGeom>
-          <a:noFill/>
-        </p:spPr>
-        <p:txBody>
-          <a:bodyPr wrap="square">
-            <a:spAutoFit/>
-          </a:bodyPr>
-          <a:lstStyle/>
-          <a:p>
-            <a:pPr>
-              <a:defRPr sz="1000" b="1">
-                <a:solidFill>
-                  <a:srgbClr val="2563EB"/>
-                </a:solidFill>
-              </a:defRPr>
-            </a:pPr>
-            <a:r>
-              <a:t>SPORTS ANALYTICS &amp; MACHINE LEARNING</a:t>
-            </a:r>
-          </a:p>
-        </p:txBody>
-      </p:sp>
-      <p:sp>
-        <p:nvSpPr>
-          <p:cNvPr id="3" name="TextBox 2"/>
-          <p:cNvSpPr txBox="1"/>
-          <p:nvPr/>
-        </p:nvSpPr>
-        <p:spPr>
-          <a:xfrm>
-            <a:off x="731520" y="640080"/>
-            <a:ext cx="10698480" cy="640080"/>
-          </a:xfrm>
-          <a:prstGeom prst="rect">
-            <a:avLst/>
-          </a:prstGeom>
-          <a:noFill/>
-        </p:spPr>
-        <p:txBody>
-          <a:bodyPr wrap="square">
-            <a:spAutoFit/>
-          </a:bodyPr>
-          <a:lstStyle/>
-          <a:p>
-            <a:pPr>
-              <a:defRPr sz="2200" b="1">
-                <a:solidFill>
-                  <a:srgbClr val="0F172A"/>
-                </a:solidFill>
-              </a:defRPr>
-            </a:pPr>
-            <a:r>
-              <a:t>Feature Importance: Quantifying Factors Associated with Success</a:t>
-            </a:r>
-          </a:p>
-        </p:txBody>
-      </p:sp>
-      <p:sp>
-        <p:nvSpPr>
-          <p:cNvPr id="4" name="Rectangle 3"/>
+          <p:cNvPr id="2" name="Rectangle 1"/>
           <p:cNvSpPr/>
           <p:nvPr/>
         </p:nvSpPr>
         <p:spPr>
           <a:xfrm>
-            <a:off x="731520" y="1280160"/>
-            <a:ext cx="10728655" cy="18288"/>
+            <a:off x="0" y="0"/>
+            <a:ext cx="12191695" cy="6858000"/>
           </a:xfrm>
           <a:prstGeom prst="rect">
             <a:avLst/>
           </a:prstGeom>
           <a:solidFill>
-            <a:srgbClr val="E2E8F0"/>
+            <a:srgbClr val="F8FAFC"/>
           </a:solidFill>
           <a:ln>
-            <a:solidFill>
-              <a:srgbClr val="E2E8F0"/>
-            </a:solidFill>
+            <a:noFill/>
           </a:ln>
         </p:spPr>
         <p:style>
@@ -7610,9 +7901,124 @@
           </a:p>
         </p:txBody>
       </p:sp>
+      <p:sp>
+        <p:nvSpPr>
+          <p:cNvPr id="3" name="TextBox 2"/>
+          <p:cNvSpPr txBox="1"/>
+          <p:nvPr/>
+        </p:nvSpPr>
+        <p:spPr>
+          <a:xfrm>
+            <a:off x="731520" y="365760"/>
+            <a:ext cx="10698480" cy="320040"/>
+          </a:xfrm>
+          <a:prstGeom prst="rect">
+            <a:avLst/>
+          </a:prstGeom>
+          <a:noFill/>
+        </p:spPr>
+        <p:txBody>
+          <a:bodyPr wrap="square">
+            <a:spAutoFit/>
+          </a:bodyPr>
+          <a:lstStyle/>
+          <a:p>
+            <a:pPr>
+              <a:defRPr sz="1000" b="1">
+                <a:solidFill>
+                  <a:srgbClr val="1D4ED8"/>
+                </a:solidFill>
+              </a:defRPr>
+            </a:pPr>
+            <a:r>
+              <a:t>SPORTS ANALYTICS &amp; MACHINE LEARNING</a:t>
+            </a:r>
+          </a:p>
+        </p:txBody>
+      </p:sp>
+      <p:sp>
+        <p:nvSpPr>
+          <p:cNvPr id="4" name="TextBox 3"/>
+          <p:cNvSpPr txBox="1"/>
+          <p:nvPr/>
+        </p:nvSpPr>
+        <p:spPr>
+          <a:xfrm>
+            <a:off x="731520" y="640080"/>
+            <a:ext cx="10698480" cy="640080"/>
+          </a:xfrm>
+          <a:prstGeom prst="rect">
+            <a:avLst/>
+          </a:prstGeom>
+          <a:noFill/>
+        </p:spPr>
+        <p:txBody>
+          <a:bodyPr wrap="square">
+            <a:spAutoFit/>
+          </a:bodyPr>
+          <a:lstStyle/>
+          <a:p>
+            <a:pPr>
+              <a:defRPr sz="2200" b="1">
+                <a:solidFill>
+                  <a:srgbClr val="0F172A"/>
+                </a:solidFill>
+              </a:defRPr>
+            </a:pPr>
+            <a:r>
+              <a:t>Feature Importance: Quantifying Factors Associated with Success</a:t>
+            </a:r>
+          </a:p>
+        </p:txBody>
+      </p:sp>
+      <p:sp>
+        <p:nvSpPr>
+          <p:cNvPr id="5" name="Rectangle 4"/>
+          <p:cNvSpPr/>
+          <p:nvPr/>
+        </p:nvSpPr>
+        <p:spPr>
+          <a:xfrm>
+            <a:off x="731520" y="1280160"/>
+            <a:ext cx="10728655" cy="18288"/>
+          </a:xfrm>
+          <a:prstGeom prst="rect">
+            <a:avLst/>
+          </a:prstGeom>
+          <a:solidFill>
+            <a:srgbClr val="CBD5E1"/>
+          </a:solidFill>
+          <a:ln>
+            <a:solidFill>
+              <a:srgbClr val="CBD5E1"/>
+            </a:solidFill>
+          </a:ln>
+        </p:spPr>
+        <p:style>
+          <a:lnRef idx="1">
+            <a:schemeClr val="accent1"/>
+          </a:lnRef>
+          <a:fillRef idx="3">
+            <a:schemeClr val="accent1"/>
+          </a:fillRef>
+          <a:effectRef idx="2">
+            <a:schemeClr val="accent1"/>
+          </a:effectRef>
+          <a:fontRef idx="minor">
+            <a:schemeClr val="lt1"/>
+          </a:fontRef>
+        </p:style>
+        <p:txBody>
+          <a:bodyPr rtlCol="0" anchor="ctr"/>
+          <a:lstStyle/>
+          <a:p>
+            <a:pPr algn="ctr"/>
+          </a:p>
+        </p:txBody>
+      </p:sp>
       <p:graphicFrame>
         <p:nvGraphicFramePr>
-          <p:cNvPr id="5" name="Table 4"/>
+          <p:cNvPr id="6" name="Table 5"/>
           <p:cNvGraphicFramePr>
             <a:graphicFrameLocks noGrp="1"/>
           </p:cNvGraphicFramePr>
@@ -7795,7 +8201,7 @@
                   </a:txBody>
                   <a:tcPr>
                     <a:solidFill>
-                      <a:srgbClr val="F8FAFC"/>
+                      <a:srgbClr val="F1F5F9"/>
                     </a:solidFill>
                   </a:tcPr>
                 </a:tc>
@@ -7818,7 +8224,7 @@
                   </a:txBody>
                   <a:tcPr>
                     <a:solidFill>
-                      <a:srgbClr val="F8FAFC"/>
+                      <a:srgbClr val="F1F5F9"/>
                     </a:solidFill>
                   </a:tcPr>
                 </a:tc>
@@ -7841,7 +8247,7 @@
                   </a:txBody>
                   <a:tcPr>
                     <a:solidFill>
-                      <a:srgbClr val="F8FAFC"/>
+                      <a:srgbClr val="F1F5F9"/>
                     </a:solidFill>
                   </a:tcPr>
                 </a:tc>
@@ -7937,7 +8343,7 @@
                   </a:txBody>
                   <a:tcPr>
                     <a:solidFill>
-                      <a:srgbClr val="F8FAFC"/>
+                      <a:srgbClr val="F1F5F9"/>
                     </a:solidFill>
                   </a:tcPr>
                 </a:tc>
@@ -7960,7 +8366,7 @@
                   </a:txBody>
                   <a:tcPr>
                     <a:solidFill>
-                      <a:srgbClr val="F8FAFC"/>
+                      <a:srgbClr val="F1F5F9"/>
                     </a:solidFill>
                   </a:tcPr>
                 </a:tc>
@@ -7983,7 +8389,7 @@
                   </a:txBody>
                   <a:tcPr>
                     <a:solidFill>
-                      <a:srgbClr val="F8FAFC"/>
+                      <a:srgbClr val="F1F5F9"/>
                     </a:solidFill>
                   </a:tcPr>
                 </a:tc>
@@ -8079,7 +8485,7 @@
                   </a:txBody>
                   <a:tcPr>
                     <a:solidFill>
-                      <a:srgbClr val="F8FAFC"/>
+                      <a:srgbClr val="F1F5F9"/>
                     </a:solidFill>
                   </a:tcPr>
                 </a:tc>
@@ -8102,7 +8508,7 @@
                   </a:txBody>
                   <a:tcPr>
                     <a:solidFill>
-                      <a:srgbClr val="F8FAFC"/>
+                      <a:srgbClr val="F1F5F9"/>
                     </a:solidFill>
                   </a:tcPr>
                 </a:tc>
@@ -8125,7 +8531,7 @@
                   </a:txBody>
                   <a:tcPr>
                     <a:solidFill>
-                      <a:srgbClr val="F8FAFC"/>
+                      <a:srgbClr val="F1F5F9"/>
                     </a:solidFill>
                   </a:tcPr>
                 </a:tc>
@@ -8221,7 +8627,7 @@
                   </a:txBody>
                   <a:tcPr>
                     <a:solidFill>
-                      <a:srgbClr val="F8FAFC"/>
+                      <a:srgbClr val="F1F5F9"/>
                     </a:solidFill>
                   </a:tcPr>
                 </a:tc>
@@ -8244,7 +8650,7 @@
                   </a:txBody>
                   <a:tcPr>
                     <a:solidFill>
-                      <a:srgbClr val="F8FAFC"/>
+                      <a:srgbClr val="F1F5F9"/>
                     </a:solidFill>
                   </a:tcPr>
                 </a:tc>
@@ -8267,7 +8673,7 @@
                   </a:txBody>
                   <a:tcPr>
                     <a:solidFill>
-                      <a:srgbClr val="F8FAFC"/>
+                      <a:srgbClr val="F1F5F9"/>
                     </a:solidFill>
                   </a:tcPr>
                 </a:tc>
@@ -8363,7 +8769,7 @@
                   </a:txBody>
                   <a:tcPr>
                     <a:solidFill>
-                      <a:srgbClr val="F8FAFC"/>
+                      <a:srgbClr val="F1F5F9"/>
                     </a:solidFill>
                   </a:tcPr>
                 </a:tc>
@@ -8386,7 +8792,7 @@
                   </a:txBody>
                   <a:tcPr>
                     <a:solidFill>
-                      <a:srgbClr val="F8FAFC"/>
+                      <a:srgbClr val="F1F5F9"/>
                     </a:solidFill>
                   </a:tcPr>
                 </a:tc>
@@ -8409,7 +8815,7 @@
                   </a:txBody>
                   <a:tcPr>
                     <a:solidFill>
-                      <a:srgbClr val="F8FAFC"/>
+                      <a:srgbClr val="F1F5F9"/>
                     </a:solidFill>
                   </a:tcPr>
                 </a:tc>
@@ -8491,7 +8897,7 @@
       </p:graphicFrame>
       <p:sp>
         <p:nvSpPr>
-          <p:cNvPr id="6" name="Rounded Rectangle 5"/>
+          <p:cNvPr id="7" name="Rounded Rectangle 6"/>
           <p:cNvSpPr/>
           <p:nvPr/>
         </p:nvSpPr>
@@ -8504,11 +8910,11 @@
             <a:avLst/>
           </a:prstGeom>
           <a:solidFill>
-            <a:srgbClr val="F8FAFC"/>
+            <a:srgbClr val="FFFFFF"/>
           </a:solidFill>
           <a:ln>
             <a:solidFill>
-              <a:srgbClr val="E2E8F0"/>
+              <a:srgbClr val="CBD5E1"/>
             </a:solidFill>
           </a:ln>
         </p:spPr>
@@ -8558,7 +8964,7 @@
             <a:r>
               <a:rPr b="0">
                 <a:solidFill>
-                  <a:srgbClr val="475569"/>
+                  <a:srgbClr val="334155"/>
                 </a:solidFill>
               </a:rPr>
               <a:t>Organizational scale (athletes, events, entries, sports) accounts for nearly four-fifths of all predictive power. Winning medals requires participating across multiple medal-awarding categories.</a:t>
@@ -8581,7 +8987,7 @@
             <a:r>
               <a:rPr b="0">
                 <a:solidFill>
-                  <a:srgbClr val="475569"/>
+                  <a:srgbClr val="334155"/>
                 </a:solidFill>
               </a:rPr>
               <a:t>Past medals won captures institutional coaching infrastructure, government sports funding, and sustained sports science investments across quadrennials.</a:t>
@@ -8604,7 +9010,7 @@
             <a:r>
               <a:rPr b="0">
                 <a:solidFill>
-                  <a:srgbClr val="475569"/>
+                  <a:srgbClr val="334155"/>
                 </a:solidFill>
               </a:rPr>
               <a:t>Physical dimensions (height, weight, BMI, age) play only a minor role at the delegation level. Why? Because elite physical requirements cancel out across diverse sports (e.g. jockeys vs rowers).</a:t>
@@ -8627,7 +9033,7 @@
             <a:r>
               <a:rPr b="0">
                 <a:solidFill>
-                  <a:srgbClr val="475569"/>
+                  <a:srgbClr val="334155"/>
                 </a:solidFill>
               </a:rPr>
               <a:t>A nation cannot compensate for an undersized roster through superior biometrics alone; broad qualification breadth is the foundational prerequisite for Olympic success.</a:t>
@@ -8655,140 +9061,23 @@
       <p:grpSpPr/>
       <p:sp>
         <p:nvSpPr>
-          <p:cNvPr id="2" name="TextBox 1"/>
-          <p:cNvSpPr txBox="1"/>
-          <p:nvPr/>
-        </p:nvSpPr>
-        <p:spPr>
-          <a:xfrm>
-            <a:off x="731520" y="365760"/>
-            <a:ext cx="10698480" cy="320040"/>
-          </a:xfrm>
-          <a:prstGeom prst="rect">
-            <a:avLst/>
-          </a:prstGeom>
-          <a:noFill/>
-        </p:spPr>
-        <p:txBody>
-          <a:bodyPr wrap="square">
-            <a:spAutoFit/>
-          </a:bodyPr>
-          <a:lstStyle/>
-          <a:p>
-            <a:pPr>
-              <a:defRPr sz="1000" b="1">
-                <a:solidFill>
-                  <a:srgbClr val="2563EB"/>
-                </a:solidFill>
-              </a:defRPr>
-            </a:pPr>
-            <a:r>
-              <a:t>SPORTS ANALYTICS &amp; MACHINE LEARNING</a:t>
-            </a:r>
-          </a:p>
-        </p:txBody>
-      </p:sp>
-      <p:sp>
-        <p:nvSpPr>
-          <p:cNvPr id="3" name="TextBox 2"/>
-          <p:cNvSpPr txBox="1"/>
-          <p:nvPr/>
-        </p:nvSpPr>
-        <p:spPr>
-          <a:xfrm>
-            <a:off x="731520" y="640080"/>
-            <a:ext cx="10698480" cy="640080"/>
-          </a:xfrm>
-          <a:prstGeom prst="rect">
-            <a:avLst/>
-          </a:prstGeom>
-          <a:noFill/>
-        </p:spPr>
-        <p:txBody>
-          <a:bodyPr wrap="square">
-            <a:spAutoFit/>
-          </a:bodyPr>
-          <a:lstStyle/>
-          <a:p>
-            <a:pPr>
-              <a:defRPr sz="2200" b="1">
-                <a:solidFill>
-                  <a:srgbClr val="0F172A"/>
-                </a:solidFill>
-              </a:defRPr>
-            </a:pPr>
-            <a:r>
-              <a:t>Functional Prototype: Streamlit Application Architecture</a:t>
-            </a:r>
-          </a:p>
-        </p:txBody>
-      </p:sp>
-      <p:sp>
-        <p:nvSpPr>
-          <p:cNvPr id="4" name="Rectangle 3"/>
+          <p:cNvPr id="2" name="Rectangle 1"/>
           <p:cNvSpPr/>
           <p:nvPr/>
         </p:nvSpPr>
         <p:spPr>
           <a:xfrm>
-            <a:off x="731520" y="1280160"/>
-            <a:ext cx="10728655" cy="18288"/>
+            <a:off x="0" y="0"/>
+            <a:ext cx="12191695" cy="6858000"/>
           </a:xfrm>
           <a:prstGeom prst="rect">
-            <a:avLst/>
-          </a:prstGeom>
-          <a:solidFill>
-            <a:srgbClr val="E2E8F0"/>
-          </a:solidFill>
-          <a:ln>
-            <a:solidFill>
-              <a:srgbClr val="E2E8F0"/>
-            </a:solidFill>
-          </a:ln>
-        </p:spPr>
-        <p:style>
-          <a:lnRef idx="1">
-            <a:schemeClr val="accent1"/>
-          </a:lnRef>
-          <a:fillRef idx="3">
-            <a:schemeClr val="accent1"/>
-          </a:fillRef>
-          <a:effectRef idx="2">
-            <a:schemeClr val="accent1"/>
-          </a:effectRef>
-          <a:fontRef idx="minor">
-            <a:schemeClr val="lt1"/>
-          </a:fontRef>
-        </p:style>
-        <p:txBody>
-          <a:bodyPr rtlCol="0" anchor="ctr"/>
-          <a:lstStyle/>
-          <a:p>
-            <a:pPr algn="ctr"/>
-          </a:p>
-        </p:txBody>
-      </p:sp>
-      <p:sp>
-        <p:nvSpPr>
-          <p:cNvPr id="5" name="Rounded Rectangle 4"/>
-          <p:cNvSpPr/>
-          <p:nvPr/>
-        </p:nvSpPr>
-        <p:spPr>
-          <a:xfrm>
-            <a:off x="731520" y="1463040"/>
-            <a:ext cx="10698480" cy="731520"/>
-          </a:xfrm>
-          <a:prstGeom prst="roundRect">
             <a:avLst/>
           </a:prstGeom>
           <a:solidFill>
             <a:srgbClr val="F8FAFC"/>
           </a:solidFill>
           <a:ln>
-            <a:solidFill>
-              <a:srgbClr val="E2E8F0"/>
-            </a:solidFill>
+            <a:noFill/>
           </a:ln>
         </p:spPr>
         <p:style>
@@ -8806,54 +9095,103 @@
           </a:fontRef>
         </p:style>
         <p:txBody>
-          <a:bodyPr rtlCol="0" anchor="ctr" wrap="square"/>
-          <a:lstStyle/>
-          <a:p>
-            <a:pPr algn="ctr">
-              <a:defRPr sz="1200" b="1">
-                <a:solidFill>
-                  <a:srgbClr val="1E3A8A"/>
-                </a:solidFill>
-              </a:defRPr>
-            </a:pPr>
-            <a:r>
-              <a:t>1. Live Cloud Deployment</a:t>
-            </a:r>
-          </a:p>
-          <a:p>
-            <a:pPr>
-              <a:defRPr sz="950">
-                <a:solidFill>
-                  <a:srgbClr val="475569"/>
-                </a:solidFill>
-              </a:defRPr>
-            </a:pPr>
-            <a:r>
-              <a:t>Deployed live on Streamlit Community Cloud: https://virshin1-team-performance-analysis-app-kwvw1u.streamlit.app/ - accessible globally with zero local installation required.</a:t>
-            </a:r>
-          </a:p>
-        </p:txBody>
-      </p:sp>
-      <p:sp>
-        <p:nvSpPr>
-          <p:cNvPr id="6" name="Rounded Rectangle 5"/>
+          <a:bodyPr rtlCol="0" anchor="ctr"/>
+          <a:lstStyle/>
+          <a:p>
+            <a:pPr algn="ctr"/>
+          </a:p>
+        </p:txBody>
+      </p:sp>
+      <p:sp>
+        <p:nvSpPr>
+          <p:cNvPr id="3" name="TextBox 2"/>
+          <p:cNvSpPr txBox="1"/>
+          <p:nvPr/>
+        </p:nvSpPr>
+        <p:spPr>
+          <a:xfrm>
+            <a:off x="731520" y="365760"/>
+            <a:ext cx="10698480" cy="320040"/>
+          </a:xfrm>
+          <a:prstGeom prst="rect">
+            <a:avLst/>
+          </a:prstGeom>
+          <a:noFill/>
+        </p:spPr>
+        <p:txBody>
+          <a:bodyPr wrap="square">
+            <a:spAutoFit/>
+          </a:bodyPr>
+          <a:lstStyle/>
+          <a:p>
+            <a:pPr>
+              <a:defRPr sz="1000" b="1">
+                <a:solidFill>
+                  <a:srgbClr val="1D4ED8"/>
+                </a:solidFill>
+              </a:defRPr>
+            </a:pPr>
+            <a:r>
+              <a:t>SPORTS ANALYTICS &amp; MACHINE LEARNING</a:t>
+            </a:r>
+          </a:p>
+        </p:txBody>
+      </p:sp>
+      <p:sp>
+        <p:nvSpPr>
+          <p:cNvPr id="4" name="TextBox 3"/>
+          <p:cNvSpPr txBox="1"/>
+          <p:nvPr/>
+        </p:nvSpPr>
+        <p:spPr>
+          <a:xfrm>
+            <a:off x="731520" y="640080"/>
+            <a:ext cx="10698480" cy="640080"/>
+          </a:xfrm>
+          <a:prstGeom prst="rect">
+            <a:avLst/>
+          </a:prstGeom>
+          <a:noFill/>
+        </p:spPr>
+        <p:txBody>
+          <a:bodyPr wrap="square">
+            <a:spAutoFit/>
+          </a:bodyPr>
+          <a:lstStyle/>
+          <a:p>
+            <a:pPr>
+              <a:defRPr sz="2200" b="1">
+                <a:solidFill>
+                  <a:srgbClr val="0F172A"/>
+                </a:solidFill>
+              </a:defRPr>
+            </a:pPr>
+            <a:r>
+              <a:t>Functional Prototype: Streamlit Application Architecture</a:t>
+            </a:r>
+          </a:p>
+        </p:txBody>
+      </p:sp>
+      <p:sp>
+        <p:nvSpPr>
+          <p:cNvPr id="5" name="Rectangle 4"/>
           <p:cNvSpPr/>
           <p:nvPr/>
         </p:nvSpPr>
         <p:spPr>
           <a:xfrm>
-            <a:off x="731520" y="2267712"/>
-            <a:ext cx="10698480" cy="731520"/>
-          </a:xfrm>
-          <a:prstGeom prst="roundRect">
+            <a:off x="731520" y="1280160"/>
+            <a:ext cx="10728655" cy="18288"/>
+          </a:xfrm>
+          <a:prstGeom prst="rect">
             <a:avLst/>
           </a:prstGeom>
           <a:solidFill>
-            <a:srgbClr val="F8FAFC"/>
+            <a:srgbClr val="CBD5E1"/>
           </a:solidFill>
           <a:ln>
             <a:solidFill>
-              <a:srgbClr val="E2E8F0"/>
+              <a:srgbClr val="CBD5E1"/>
             </a:solidFill>
           </a:ln>
         </p:spPr>
@@ -8872,54 +9210,33 @@
           </a:fontRef>
         </p:style>
         <p:txBody>
-          <a:bodyPr rtlCol="0" anchor="ctr" wrap="square"/>
-          <a:lstStyle/>
-          <a:p>
-            <a:pPr algn="ctr">
-              <a:defRPr sz="1200" b="1">
-                <a:solidFill>
-                  <a:srgbClr val="1E3A8A"/>
-                </a:solidFill>
-              </a:defRPr>
-            </a:pPr>
-            <a:r>
-              <a:t>2. Benchmark Scenario Engine</a:t>
-            </a:r>
-          </a:p>
-          <a:p>
-            <a:pPr>
-              <a:defRPr sz="950">
-                <a:solidFill>
-                  <a:srgbClr val="475569"/>
-                </a:solidFill>
-              </a:defRPr>
-            </a:pPr>
-            <a:r>
-              <a:t>Includes 1-click preset profiles for rapid testing: Global Powerhouse (USA/China), Mid-Tier Contender (Netherlands/Brazil), and Emerging Delegation. Enables examiners to immediately test realistic profiles.</a:t>
-            </a:r>
-          </a:p>
-        </p:txBody>
-      </p:sp>
-      <p:sp>
-        <p:nvSpPr>
-          <p:cNvPr id="7" name="Rounded Rectangle 6"/>
+          <a:bodyPr rtlCol="0" anchor="ctr"/>
+          <a:lstStyle/>
+          <a:p>
+            <a:pPr algn="ctr"/>
+          </a:p>
+        </p:txBody>
+      </p:sp>
+      <p:sp>
+        <p:nvSpPr>
+          <p:cNvPr id="6" name="Rounded Rectangle 5"/>
           <p:cNvSpPr/>
           <p:nvPr/>
         </p:nvSpPr>
         <p:spPr>
           <a:xfrm>
-            <a:off x="731520" y="3072384"/>
+            <a:off x="731520" y="1463040"/>
             <a:ext cx="10698480" cy="731520"/>
           </a:xfrm>
           <a:prstGeom prst="roundRect">
             <a:avLst/>
           </a:prstGeom>
           <a:solidFill>
-            <a:srgbClr val="F8FAFC"/>
+            <a:srgbClr val="FFFFFF"/>
           </a:solidFill>
           <a:ln>
             <a:solidFill>
-              <a:srgbClr val="E2E8F0"/>
+              <a:srgbClr val="CBD5E1"/>
             </a:solidFill>
           </a:ln>
         </p:spPr>
@@ -8949,43 +9266,43 @@
               </a:defRPr>
             </a:pPr>
             <a:r>
-              <a:t>3. Wide Dashboard Layout</a:t>
+              <a:t>1. Live Cloud Deployment</a:t>
             </a:r>
           </a:p>
           <a:p>
             <a:pPr>
               <a:defRPr sz="950">
                 <a:solidFill>
-                  <a:srgbClr val="475569"/>
-                </a:solidFill>
-              </a:defRPr>
-            </a:pPr>
-            <a:r>
-              <a:t>Configured with st.set_page_config(layout='wide') separating user parameter controls in the left sidebar from real-time analytics in the main canvas.</a:t>
-            </a:r>
-          </a:p>
-        </p:txBody>
-      </p:sp>
-      <p:sp>
-        <p:nvSpPr>
-          <p:cNvPr id="8" name="Rounded Rectangle 7"/>
+                  <a:srgbClr val="334155"/>
+                </a:solidFill>
+              </a:defRPr>
+            </a:pPr>
+            <a:r>
+              <a:t>Deployed live on Streamlit Community Cloud: https://virshin1-team-performance-analysis-app-kwvw1u.streamlit.app/ - accessible globally with zero local installation required.</a:t>
+            </a:r>
+          </a:p>
+        </p:txBody>
+      </p:sp>
+      <p:sp>
+        <p:nvSpPr>
+          <p:cNvPr id="7" name="Rounded Rectangle 6"/>
           <p:cNvSpPr/>
           <p:nvPr/>
         </p:nvSpPr>
         <p:spPr>
           <a:xfrm>
-            <a:off x="731520" y="3877056"/>
+            <a:off x="731520" y="2267712"/>
             <a:ext cx="10698480" cy="731520"/>
           </a:xfrm>
           <a:prstGeom prst="roundRect">
             <a:avLst/>
           </a:prstGeom>
           <a:solidFill>
-            <a:srgbClr val="F8FAFC"/>
+            <a:srgbClr val="FFFFFF"/>
           </a:solidFill>
           <a:ln>
             <a:solidFill>
-              <a:srgbClr val="E2E8F0"/>
+              <a:srgbClr val="CBD5E1"/>
             </a:solidFill>
           </a:ln>
         </p:spPr>
@@ -9015,43 +9332,43 @@
               </a:defRPr>
             </a:pPr>
             <a:r>
-              <a:t>4. Dual Model Inference Engine</a:t>
+              <a:t>2. Benchmark Scenario Engine</a:t>
             </a:r>
           </a:p>
           <a:p>
             <a:pPr>
               <a:defRPr sz="950">
                 <a:solidFill>
-                  <a:srgbClr val="475569"/>
-                </a:solidFill>
-              </a:defRPr>
-            </a:pPr>
-            <a:r>
-              <a:t>Simultaneously executes Random Forest classification for podium probability and Gradient Boosting regression for exact medal count forecasting.</a:t>
-            </a:r>
-          </a:p>
-        </p:txBody>
-      </p:sp>
-      <p:sp>
-        <p:nvSpPr>
-          <p:cNvPr id="9" name="Rounded Rectangle 8"/>
+                  <a:srgbClr val="334155"/>
+                </a:solidFill>
+              </a:defRPr>
+            </a:pPr>
+            <a:r>
+              <a:t>Includes 1-click preset profiles for rapid testing: Global Powerhouse (USA/China), Mid-Tier Contender (Netherlands/Brazil), and Emerging Delegation. Enables examiners to immediately test realistic profiles.</a:t>
+            </a:r>
+          </a:p>
+        </p:txBody>
+      </p:sp>
+      <p:sp>
+        <p:nvSpPr>
+          <p:cNvPr id="8" name="Rounded Rectangle 7"/>
           <p:cNvSpPr/>
           <p:nvPr/>
         </p:nvSpPr>
         <p:spPr>
           <a:xfrm>
-            <a:off x="731520" y="4681728"/>
+            <a:off x="731520" y="3072384"/>
             <a:ext cx="10698480" cy="731520"/>
           </a:xfrm>
           <a:prstGeom prst="roundRect">
             <a:avLst/>
           </a:prstGeom>
           <a:solidFill>
-            <a:srgbClr val="F8FAFC"/>
+            <a:srgbClr val="FFFFFF"/>
           </a:solidFill>
           <a:ln>
             <a:solidFill>
-              <a:srgbClr val="E2E8F0"/>
+              <a:srgbClr val="CBD5E1"/>
             </a:solidFill>
           </a:ln>
         </p:spPr>
@@ -9081,43 +9398,43 @@
               </a:defRPr>
             </a:pPr>
             <a:r>
-              <a:t>5. Diagnostic Benchmark Comparison</a:t>
+              <a:t>3. Wide Dashboard Layout</a:t>
             </a:r>
           </a:p>
           <a:p>
             <a:pPr>
               <a:defRPr sz="950">
                 <a:solidFill>
-                  <a:srgbClr val="475569"/>
-                </a:solidFill>
-              </a:defRPr>
-            </a:pPr>
-            <a:r>
-              <a:t>Compares user-configured inputs directly against historical medians of medal-winning vs non-winning Olympic teams using responsive, theme-adaptive dataframes.</a:t>
-            </a:r>
-          </a:p>
-        </p:txBody>
-      </p:sp>
-      <p:sp>
-        <p:nvSpPr>
-          <p:cNvPr id="10" name="Rounded Rectangle 9"/>
+                  <a:srgbClr val="334155"/>
+                </a:solidFill>
+              </a:defRPr>
+            </a:pPr>
+            <a:r>
+              <a:t>Configured with st.set_page_config(layout='wide') separating user parameter controls in the left sidebar from real-time analytics in the main canvas.</a:t>
+            </a:r>
+          </a:p>
+        </p:txBody>
+      </p:sp>
+      <p:sp>
+        <p:nvSpPr>
+          <p:cNvPr id="9" name="Rounded Rectangle 8"/>
           <p:cNvSpPr/>
           <p:nvPr/>
         </p:nvSpPr>
         <p:spPr>
           <a:xfrm>
-            <a:off x="731520" y="5486400"/>
+            <a:off x="731520" y="3877056"/>
             <a:ext cx="10698480" cy="731520"/>
           </a:xfrm>
           <a:prstGeom prst="roundRect">
             <a:avLst/>
           </a:prstGeom>
           <a:solidFill>
-            <a:srgbClr val="F8FAFC"/>
+            <a:srgbClr val="FFFFFF"/>
           </a:solidFill>
           <a:ln>
             <a:solidFill>
-              <a:srgbClr val="E2E8F0"/>
+              <a:srgbClr val="CBD5E1"/>
             </a:solidFill>
           </a:ln>
         </p:spPr>
@@ -9147,6 +9464,138 @@
               </a:defRPr>
             </a:pPr>
             <a:r>
+              <a:t>4. Dual Model Inference Engine</a:t>
+            </a:r>
+          </a:p>
+          <a:p>
+            <a:pPr>
+              <a:defRPr sz="950">
+                <a:solidFill>
+                  <a:srgbClr val="334155"/>
+                </a:solidFill>
+              </a:defRPr>
+            </a:pPr>
+            <a:r>
+              <a:t>Simultaneously executes Random Forest classification for podium probability and Gradient Boosting regression for exact medal count forecasting.</a:t>
+            </a:r>
+          </a:p>
+        </p:txBody>
+      </p:sp>
+      <p:sp>
+        <p:nvSpPr>
+          <p:cNvPr id="10" name="Rounded Rectangle 9"/>
+          <p:cNvSpPr/>
+          <p:nvPr/>
+        </p:nvSpPr>
+        <p:spPr>
+          <a:xfrm>
+            <a:off x="731520" y="4681728"/>
+            <a:ext cx="10698480" cy="731520"/>
+          </a:xfrm>
+          <a:prstGeom prst="roundRect">
+            <a:avLst/>
+          </a:prstGeom>
+          <a:solidFill>
+            <a:srgbClr val="FFFFFF"/>
+          </a:solidFill>
+          <a:ln>
+            <a:solidFill>
+              <a:srgbClr val="CBD5E1"/>
+            </a:solidFill>
+          </a:ln>
+        </p:spPr>
+        <p:style>
+          <a:lnRef idx="1">
+            <a:schemeClr val="accent1"/>
+          </a:lnRef>
+          <a:fillRef idx="3">
+            <a:schemeClr val="accent1"/>
+          </a:fillRef>
+          <a:effectRef idx="2">
+            <a:schemeClr val="accent1"/>
+          </a:effectRef>
+          <a:fontRef idx="minor">
+            <a:schemeClr val="lt1"/>
+          </a:fontRef>
+        </p:style>
+        <p:txBody>
+          <a:bodyPr rtlCol="0" anchor="ctr" wrap="square"/>
+          <a:lstStyle/>
+          <a:p>
+            <a:pPr algn="ctr">
+              <a:defRPr sz="1200" b="1">
+                <a:solidFill>
+                  <a:srgbClr val="1E3A8A"/>
+                </a:solidFill>
+              </a:defRPr>
+            </a:pPr>
+            <a:r>
+              <a:t>5. Diagnostic Benchmark Comparison</a:t>
+            </a:r>
+          </a:p>
+          <a:p>
+            <a:pPr>
+              <a:defRPr sz="950">
+                <a:solidFill>
+                  <a:srgbClr val="334155"/>
+                </a:solidFill>
+              </a:defRPr>
+            </a:pPr>
+            <a:r>
+              <a:t>Compares user-configured inputs directly against historical medians of medal-winning vs non-winning Olympic teams using responsive, theme-adaptive dataframes.</a:t>
+            </a:r>
+          </a:p>
+        </p:txBody>
+      </p:sp>
+      <p:sp>
+        <p:nvSpPr>
+          <p:cNvPr id="11" name="Rounded Rectangle 10"/>
+          <p:cNvSpPr/>
+          <p:nvPr/>
+        </p:nvSpPr>
+        <p:spPr>
+          <a:xfrm>
+            <a:off x="731520" y="5486400"/>
+            <a:ext cx="10698480" cy="731520"/>
+          </a:xfrm>
+          <a:prstGeom prst="roundRect">
+            <a:avLst/>
+          </a:prstGeom>
+          <a:solidFill>
+            <a:srgbClr val="FFFFFF"/>
+          </a:solidFill>
+          <a:ln>
+            <a:solidFill>
+              <a:srgbClr val="CBD5E1"/>
+            </a:solidFill>
+          </a:ln>
+        </p:spPr>
+        <p:style>
+          <a:lnRef idx="1">
+            <a:schemeClr val="accent1"/>
+          </a:lnRef>
+          <a:fillRef idx="3">
+            <a:schemeClr val="accent1"/>
+          </a:fillRef>
+          <a:effectRef idx="2">
+            <a:schemeClr val="accent1"/>
+          </a:effectRef>
+          <a:fontRef idx="minor">
+            <a:schemeClr val="lt1"/>
+          </a:fontRef>
+        </p:style>
+        <p:txBody>
+          <a:bodyPr rtlCol="0" anchor="ctr" wrap="square"/>
+          <a:lstStyle/>
+          <a:p>
+            <a:pPr algn="ctr">
+              <a:defRPr sz="1200" b="1">
+                <a:solidFill>
+                  <a:srgbClr val="1E3A8A"/>
+                </a:solidFill>
+              </a:defRPr>
+            </a:pPr>
+            <a:r>
               <a:t>6. Research &amp; Factor Tabs</a:t>
             </a:r>
           </a:p>
@@ -9154,7 +9603,7 @@
             <a:pPr>
               <a:defRPr sz="950">
                 <a:solidFill>
-                  <a:srgbClr val="475569"/>
+                  <a:srgbClr val="334155"/>
                 </a:solidFill>
               </a:defRPr>
             </a:pPr>

--- a/Olympic_Team_Performance_Presentation.pptx
+++ b/Olympic_Team_Performance_Presentation.pptx
@@ -3172,7 +3172,7 @@
               </a:defRPr>
             </a:pPr>
             <a:r>
-              <a:t>ACADEMIC MACHINE LEARNING PROJECT &amp; VIVA DEFENSE</a:t>
+              <a:t>ACADEMIC MACHINE LEARNING PROJECT</a:t>
             </a:r>
           </a:p>
           <a:p>
@@ -3289,7 +3289,7 @@
             <a:avLst/>
           </a:prstGeom>
           <a:solidFill>
-            <a:srgbClr val="F8FAFC"/>
+            <a:srgbClr val="FFFFFF"/>
           </a:solidFill>
           <a:ln>
             <a:noFill/>
@@ -3402,11 +3402,11 @@
             <a:avLst/>
           </a:prstGeom>
           <a:solidFill>
-            <a:srgbClr val="CBD5E1"/>
+            <a:srgbClr val="E2E8F0"/>
           </a:solidFill>
           <a:ln>
             <a:solidFill>
-              <a:srgbClr val="CBD5E1"/>
+              <a:srgbClr val="E2E8F0"/>
             </a:solidFill>
           </a:ln>
         </p:spPr>
@@ -3446,10 +3446,8 @@
           <a:prstGeom prst="roundRect">
             <a:avLst/>
           </a:prstGeom>
-          <a:solidFill>
-            <a:srgbClr val="FFFFFF"/>
-          </a:solidFill>
-          <a:ln>
+          <a:noFill/>
+          <a:ln w="12700">
             <a:solidFill>
               <a:srgbClr val="CBD5E1"/>
             </a:solidFill>
@@ -3554,10 +3552,8 @@
           <a:prstGeom prst="roundRect">
             <a:avLst/>
           </a:prstGeom>
-          <a:solidFill>
-            <a:srgbClr val="FFFFFF"/>
-          </a:solidFill>
-          <a:ln>
+          <a:noFill/>
+          <a:ln w="12700">
             <a:solidFill>
               <a:srgbClr val="CBD5E1"/>
             </a:solidFill>
@@ -3662,10 +3658,8 @@
           <a:prstGeom prst="roundRect">
             <a:avLst/>
           </a:prstGeom>
-          <a:solidFill>
-            <a:srgbClr val="FFFFFF"/>
-          </a:solidFill>
-          <a:ln>
+          <a:noFill/>
+          <a:ln w="12700">
             <a:solidFill>
               <a:srgbClr val="CBD5E1"/>
             </a:solidFill>
@@ -3789,7 +3783,7 @@
             <a:avLst/>
           </a:prstGeom>
           <a:solidFill>
-            <a:srgbClr val="F8FAFC"/>
+            <a:srgbClr val="FFFFFF"/>
           </a:solidFill>
           <a:ln>
             <a:noFill/>
@@ -3902,11 +3896,11 @@
             <a:avLst/>
           </a:prstGeom>
           <a:solidFill>
-            <a:srgbClr val="CBD5E1"/>
+            <a:srgbClr val="E2E8F0"/>
           </a:solidFill>
           <a:ln>
             <a:solidFill>
-              <a:srgbClr val="CBD5E1"/>
+              <a:srgbClr val="E2E8F0"/>
             </a:solidFill>
           </a:ln>
         </p:spPr>
@@ -3946,10 +3940,8 @@
           <a:prstGeom prst="roundRect">
             <a:avLst/>
           </a:prstGeom>
-          <a:solidFill>
-            <a:srgbClr val="FFFFFF"/>
-          </a:solidFill>
-          <a:ln>
+          <a:noFill/>
+          <a:ln w="12700">
             <a:solidFill>
               <a:srgbClr val="CBD5E1"/>
             </a:solidFill>
@@ -4012,10 +4004,8 @@
           <a:prstGeom prst="roundRect">
             <a:avLst/>
           </a:prstGeom>
-          <a:solidFill>
-            <a:srgbClr val="FFFFFF"/>
-          </a:solidFill>
-          <a:ln>
+          <a:noFill/>
+          <a:ln w="12700">
             <a:solidFill>
               <a:srgbClr val="CBD5E1"/>
             </a:solidFill>
@@ -4078,10 +4068,8 @@
           <a:prstGeom prst="roundRect">
             <a:avLst/>
           </a:prstGeom>
-          <a:solidFill>
-            <a:srgbClr val="FFFFFF"/>
-          </a:solidFill>
-          <a:ln>
+          <a:noFill/>
+          <a:ln w="12700">
             <a:solidFill>
               <a:srgbClr val="CBD5E1"/>
             </a:solidFill>
@@ -4144,10 +4132,8 @@
           <a:prstGeom prst="roundRect">
             <a:avLst/>
           </a:prstGeom>
-          <a:solidFill>
-            <a:srgbClr val="FFFFFF"/>
-          </a:solidFill>
-          <a:ln>
+          <a:noFill/>
+          <a:ln w="12700">
             <a:solidFill>
               <a:srgbClr val="CBD5E1"/>
             </a:solidFill>
@@ -4210,10 +4196,8 @@
           <a:prstGeom prst="roundRect">
             <a:avLst/>
           </a:prstGeom>
-          <a:solidFill>
-            <a:srgbClr val="FFFFFF"/>
-          </a:solidFill>
-          <a:ln>
+          <a:noFill/>
+          <a:ln w="12700">
             <a:solidFill>
               <a:srgbClr val="CBD5E1"/>
             </a:solidFill>
@@ -4331,7 +4315,7 @@
         </p:nvSpPr>
         <p:spPr>
           <a:xfrm>
-            <a:off x="1097280" y="1463040"/>
+            <a:off x="1097280" y="1645920"/>
             <a:ext cx="10058400" cy="4114800"/>
           </a:xfrm>
           <a:prstGeom prst="rect">
@@ -4361,7 +4345,7 @@
               <a:spcBef>
                 <a:spcPts val="800"/>
               </a:spcBef>
-              <a:defRPr sz="4000" b="1">
+              <a:defRPr sz="4400" b="1">
                 <a:solidFill>
                   <a:srgbClr val="FFFFFF"/>
                 </a:solidFill>
@@ -4383,13 +4367,13 @@
               </a:defRPr>
             </a:pPr>
             <a:r>
-              <a:t>Questions &amp; Examination Defense Discussion</a:t>
+              <a:t>Team Performance Analysis - Olympic Machine Learning</a:t>
             </a:r>
           </a:p>
           <a:p>
             <a:pPr>
               <a:spcBef>
-                <a:spcPts val="2000"/>
+                <a:spcPts val="2200"/>
               </a:spcBef>
               <a:defRPr sz="1300">
                 <a:solidFill>
@@ -4417,11 +4401,11 @@
               </a:defRPr>
             </a:pPr>
             <a:r>
-              <a:t>Live Streamlit Cloud Deployment: https://virshin1-team-performance-analysis-app-kwvw1u.streamlit.app/</a:t>
+              <a:t>Live Web Application: https://virshin1-team-performance-analysis-app-kwvw1u.streamlit.app/</a:t>
             </a:r>
             <a:br/>
             <a:r>
-              <a:t>GitHub Source Repository: https://github.com/Virshin1/Team-Performance-Analysis</a:t>
+              <a:t>GitHub Source: https://github.com/Virshin1/Team-Performance-Analysis</a:t>
             </a:r>
           </a:p>
         </p:txBody>
@@ -4459,7 +4443,7 @@
             <a:avLst/>
           </a:prstGeom>
           <a:solidFill>
-            <a:srgbClr val="F8FAFC"/>
+            <a:srgbClr val="FFFFFF"/>
           </a:solidFill>
           <a:ln>
             <a:noFill/>
@@ -4572,11 +4556,11 @@
             <a:avLst/>
           </a:prstGeom>
           <a:solidFill>
-            <a:srgbClr val="CBD5E1"/>
+            <a:srgbClr val="E2E8F0"/>
           </a:solidFill>
           <a:ln>
             <a:solidFill>
-              <a:srgbClr val="CBD5E1"/>
+              <a:srgbClr val="E2E8F0"/>
             </a:solidFill>
           </a:ln>
         </p:spPr>
@@ -4616,10 +4600,8 @@
           <a:prstGeom prst="roundRect">
             <a:avLst/>
           </a:prstGeom>
-          <a:solidFill>
-            <a:srgbClr val="FFFFFF"/>
-          </a:solidFill>
-          <a:ln>
+          <a:noFill/>
+          <a:ln w="12700">
             <a:solidFill>
               <a:srgbClr val="CBD5E1"/>
             </a:solidFill>
@@ -4763,10 +4745,8 @@
           <a:prstGeom prst="roundRect">
             <a:avLst/>
           </a:prstGeom>
-          <a:solidFill>
-            <a:srgbClr val="FFFFFF"/>
-          </a:solidFill>
-          <a:ln>
+          <a:noFill/>
+          <a:ln w="12700">
             <a:solidFill>
               <a:srgbClr val="CBD5E1"/>
             </a:solidFill>
@@ -4913,7 +4893,7 @@
                   <a:srgbClr val="334155"/>
                 </a:solidFill>
               </a:rPr>
-              <a:t>Production application deployed on Streamlit Cloud with scenario testing and benchmark comparison tables.</a:t>
+              <a:t>Production-grade wide dashboard deployed live on Streamlit Community Cloud with interactive scenario simulation.</a:t>
             </a:r>
           </a:p>
         </p:txBody>
@@ -4951,7 +4931,7 @@
             <a:avLst/>
           </a:prstGeom>
           <a:solidFill>
-            <a:srgbClr val="F8FAFC"/>
+            <a:srgbClr val="FFFFFF"/>
           </a:solidFill>
           <a:ln>
             <a:noFill/>
@@ -5064,11 +5044,11 @@
             <a:avLst/>
           </a:prstGeom>
           <a:solidFill>
-            <a:srgbClr val="CBD5E1"/>
+            <a:srgbClr val="E2E8F0"/>
           </a:solidFill>
           <a:ln>
             <a:solidFill>
-              <a:srgbClr val="CBD5E1"/>
+              <a:srgbClr val="E2E8F0"/>
             </a:solidFill>
           </a:ln>
         </p:spPr>
@@ -5108,10 +5088,8 @@
           <a:prstGeom prst="roundRect">
             <a:avLst/>
           </a:prstGeom>
-          <a:solidFill>
-            <a:srgbClr val="FFFFFF"/>
-          </a:solidFill>
-          <a:ln>
+          <a:noFill/>
+          <a:ln w="12700">
             <a:solidFill>
               <a:srgbClr val="CBD5E1"/>
             </a:solidFill>
@@ -5186,10 +5164,8 @@
           <a:prstGeom prst="roundRect">
             <a:avLst/>
           </a:prstGeom>
-          <a:solidFill>
-            <a:srgbClr val="FFFFFF"/>
-          </a:solidFill>
-          <a:ln>
+          <a:noFill/>
+          <a:ln w="12700">
             <a:solidFill>
               <a:srgbClr val="CBD5E1"/>
             </a:solidFill>
@@ -5264,10 +5240,8 @@
           <a:prstGeom prst="roundRect">
             <a:avLst/>
           </a:prstGeom>
-          <a:solidFill>
-            <a:srgbClr val="FFFFFF"/>
-          </a:solidFill>
-          <a:ln>
+          <a:noFill/>
+          <a:ln w="12700">
             <a:solidFill>
               <a:srgbClr val="CBD5E1"/>
             </a:solidFill>
@@ -5342,10 +5316,8 @@
           <a:prstGeom prst="roundRect">
             <a:avLst/>
           </a:prstGeom>
-          <a:solidFill>
-            <a:srgbClr val="FFFFFF"/>
-          </a:solidFill>
-          <a:ln>
+          <a:noFill/>
+          <a:ln w="12700">
             <a:solidFill>
               <a:srgbClr val="CBD5E1"/>
             </a:solidFill>
@@ -5420,10 +5392,8 @@
           <a:prstGeom prst="roundRect">
             <a:avLst/>
           </a:prstGeom>
-          <a:solidFill>
-            <a:srgbClr val="FFFFFF"/>
-          </a:solidFill>
-          <a:ln>
+          <a:noFill/>
+          <a:ln w="12700">
             <a:solidFill>
               <a:srgbClr val="CBD5E1"/>
             </a:solidFill>
@@ -5501,7 +5471,7 @@
                   <a:srgbClr val="334155"/>
                 </a:solidFill>
               </a:rPr>
-              <a:t>In team sports (Football, Basketball, Rowing), every squad member receives a physical medal, but the country wins exactly ONE official medal. Deduplicated strictly to unique (Games, Year, Event, Medal) to eliminate 10x-18x artificial medal inflation.</a:t>
+              <a:t>In team sports (Football, Basketball, Rowing), every squad member receives a physical medal, but the country wins exactly ONE official medal. Deduplicated strictly to unique (Games, Year, Event, Medal) tuples before delegation aggregation.</a:t>
             </a:r>
           </a:p>
           <a:p>
@@ -5608,7 +5578,7 @@
             <a:avLst/>
           </a:prstGeom>
           <a:solidFill>
-            <a:srgbClr val="F8FAFC"/>
+            <a:srgbClr val="FFFFFF"/>
           </a:solidFill>
           <a:ln>
             <a:noFill/>
@@ -5721,11 +5691,11 @@
             <a:avLst/>
           </a:prstGeom>
           <a:solidFill>
-            <a:srgbClr val="CBD5E1"/>
+            <a:srgbClr val="E2E8F0"/>
           </a:solidFill>
           <a:ln>
             <a:solidFill>
-              <a:srgbClr val="CBD5E1"/>
+              <a:srgbClr val="E2E8F0"/>
             </a:solidFill>
           </a:ln>
         </p:spPr>
@@ -5765,10 +5735,8 @@
           <a:prstGeom prst="roundRect">
             <a:avLst/>
           </a:prstGeom>
-          <a:solidFill>
-            <a:srgbClr val="FFFFFF"/>
-          </a:solidFill>
-          <a:ln>
+          <a:noFill/>
+          <a:ln w="12700">
             <a:solidFill>
               <a:srgbClr val="CBD5E1"/>
             </a:solidFill>
@@ -5927,10 +5895,8 @@
           <a:prstGeom prst="roundRect">
             <a:avLst/>
           </a:prstGeom>
-          <a:solidFill>
-            <a:srgbClr val="FFFFFF"/>
-          </a:solidFill>
-          <a:ln>
+          <a:noFill/>
+          <a:ln w="12700">
             <a:solidFill>
               <a:srgbClr val="CBD5E1"/>
             </a:solidFill>
@@ -6035,10 +6001,8 @@
           <a:prstGeom prst="roundRect">
             <a:avLst/>
           </a:prstGeom>
-          <a:solidFill>
-            <a:srgbClr val="FFFFFF"/>
-          </a:solidFill>
-          <a:ln>
+          <a:noFill/>
+          <a:ln w="12700">
             <a:solidFill>
               <a:srgbClr val="CBD5E1"/>
             </a:solidFill>
@@ -6243,7 +6207,7 @@
             <a:avLst/>
           </a:prstGeom>
           <a:solidFill>
-            <a:srgbClr val="F8FAFC"/>
+            <a:srgbClr val="FFFFFF"/>
           </a:solidFill>
           <a:ln>
             <a:noFill/>
@@ -6356,11 +6320,11 @@
             <a:avLst/>
           </a:prstGeom>
           <a:solidFill>
-            <a:srgbClr val="CBD5E1"/>
+            <a:srgbClr val="E2E8F0"/>
           </a:solidFill>
           <a:ln>
             <a:solidFill>
-              <a:srgbClr val="CBD5E1"/>
+              <a:srgbClr val="E2E8F0"/>
             </a:solidFill>
           </a:ln>
         </p:spPr>
@@ -6400,10 +6364,8 @@
           <a:prstGeom prst="roundRect">
             <a:avLst/>
           </a:prstGeom>
-          <a:solidFill>
-            <a:srgbClr val="FFFFFF"/>
-          </a:solidFill>
-          <a:ln>
+          <a:noFill/>
+          <a:ln w="12700">
             <a:solidFill>
               <a:srgbClr val="CBD5E1"/>
             </a:solidFill>
@@ -6546,10 +6508,8 @@
           <a:prstGeom prst="roundRect">
             <a:avLst/>
           </a:prstGeom>
-          <a:solidFill>
-            <a:srgbClr val="FFFFFF"/>
-          </a:solidFill>
-          <a:ln>
+          <a:noFill/>
+          <a:ln w="12700">
             <a:solidFill>
               <a:srgbClr val="CBD5E1"/>
             </a:solidFill>
@@ -6711,7 +6671,7 @@
             <a:avLst/>
           </a:prstGeom>
           <a:solidFill>
-            <a:srgbClr val="F8FAFC"/>
+            <a:srgbClr val="FFFFFF"/>
           </a:solidFill>
           <a:ln>
             <a:noFill/>
@@ -6824,11 +6784,11 @@
             <a:avLst/>
           </a:prstGeom>
           <a:solidFill>
-            <a:srgbClr val="CBD5E1"/>
+            <a:srgbClr val="E2E8F0"/>
           </a:solidFill>
           <a:ln>
             <a:solidFill>
-              <a:srgbClr val="CBD5E1"/>
+              <a:srgbClr val="E2E8F0"/>
             </a:solidFill>
           </a:ln>
         </p:spPr>
@@ -6868,10 +6828,8 @@
           <a:prstGeom prst="roundRect">
             <a:avLst/>
           </a:prstGeom>
-          <a:solidFill>
-            <a:srgbClr val="FFFFFF"/>
-          </a:solidFill>
-          <a:ln>
+          <a:noFill/>
+          <a:ln w="12700">
             <a:solidFill>
               <a:srgbClr val="CBD5E1"/>
             </a:solidFill>
@@ -6934,10 +6892,8 @@
           <a:prstGeom prst="roundRect">
             <a:avLst/>
           </a:prstGeom>
-          <a:solidFill>
-            <a:srgbClr val="FFFFFF"/>
-          </a:solidFill>
-          <a:ln>
+          <a:noFill/>
+          <a:ln w="12700">
             <a:solidFill>
               <a:srgbClr val="CBD5E1"/>
             </a:solidFill>
@@ -7000,10 +6956,8 @@
           <a:prstGeom prst="roundRect">
             <a:avLst/>
           </a:prstGeom>
-          <a:solidFill>
-            <a:srgbClr val="FFFFFF"/>
-          </a:solidFill>
-          <a:ln>
+          <a:noFill/>
+          <a:ln w="12700">
             <a:solidFill>
               <a:srgbClr val="CBD5E1"/>
             </a:solidFill>
@@ -7066,10 +7020,8 @@
           <a:prstGeom prst="roundRect">
             <a:avLst/>
           </a:prstGeom>
-          <a:solidFill>
-            <a:srgbClr val="FFFFFF"/>
-          </a:solidFill>
-          <a:ln>
+          <a:noFill/>
+          <a:ln w="12700">
             <a:solidFill>
               <a:srgbClr val="CBD5E1"/>
             </a:solidFill>
@@ -7132,10 +7084,8 @@
           <a:prstGeom prst="roundRect">
             <a:avLst/>
           </a:prstGeom>
-          <a:solidFill>
-            <a:srgbClr val="FFFFFF"/>
-          </a:solidFill>
-          <a:ln>
+          <a:noFill/>
+          <a:ln w="12700">
             <a:solidFill>
               <a:srgbClr val="CBD5E1"/>
             </a:solidFill>
@@ -7217,7 +7167,7 @@
             <a:avLst/>
           </a:prstGeom>
           <a:solidFill>
-            <a:srgbClr val="F8FAFC"/>
+            <a:srgbClr val="FFFFFF"/>
           </a:solidFill>
           <a:ln>
             <a:noFill/>
@@ -7330,11 +7280,11 @@
             <a:avLst/>
           </a:prstGeom>
           <a:solidFill>
-            <a:srgbClr val="CBD5E1"/>
+            <a:srgbClr val="E2E8F0"/>
           </a:solidFill>
           <a:ln>
             <a:solidFill>
-              <a:srgbClr val="CBD5E1"/>
+              <a:srgbClr val="E2E8F0"/>
             </a:solidFill>
           </a:ln>
         </p:spPr>
@@ -7374,10 +7324,8 @@
           <a:prstGeom prst="roundRect">
             <a:avLst/>
           </a:prstGeom>
-          <a:solidFill>
-            <a:srgbClr val="FFFFFF"/>
-          </a:solidFill>
-          <a:ln>
+          <a:noFill/>
+          <a:ln w="12700">
             <a:solidFill>
               <a:srgbClr val="CBD5E1"/>
             </a:solidFill>
@@ -7614,10 +7562,8 @@
           <a:prstGeom prst="roundRect">
             <a:avLst/>
           </a:prstGeom>
-          <a:solidFill>
-            <a:srgbClr val="FFFFFF"/>
-          </a:solidFill>
-          <a:ln>
+          <a:noFill/>
+          <a:ln w="12700">
             <a:solidFill>
               <a:srgbClr val="CBD5E1"/>
             </a:solidFill>
@@ -7873,7 +7819,7 @@
             <a:avLst/>
           </a:prstGeom>
           <a:solidFill>
-            <a:srgbClr val="F8FAFC"/>
+            <a:srgbClr val="FFFFFF"/>
           </a:solidFill>
           <a:ln>
             <a:noFill/>
@@ -7986,11 +7932,11 @@
             <a:avLst/>
           </a:prstGeom>
           <a:solidFill>
-            <a:srgbClr val="CBD5E1"/>
+            <a:srgbClr val="E2E8F0"/>
           </a:solidFill>
           <a:ln>
             <a:solidFill>
-              <a:srgbClr val="CBD5E1"/>
+              <a:srgbClr val="E2E8F0"/>
             </a:solidFill>
           </a:ln>
         </p:spPr>
@@ -8129,9 +8075,7 @@
                     </a:p>
                   </a:txBody>
                   <a:tcPr>
-                    <a:solidFill>
-                      <a:srgbClr val="FFFFFF"/>
-                    </a:solidFill>
+                    <a:noFill/>
                   </a:tcPr>
                 </a:tc>
                 <a:tc>
@@ -8152,9 +8096,7 @@
                     </a:p>
                   </a:txBody>
                   <a:tcPr>
-                    <a:solidFill>
-                      <a:srgbClr val="FFFFFF"/>
-                    </a:solidFill>
+                    <a:noFill/>
                   </a:tcPr>
                 </a:tc>
                 <a:tc>
@@ -8175,9 +8117,7 @@
                     </a:p>
                   </a:txBody>
                   <a:tcPr>
-                    <a:solidFill>
-                      <a:srgbClr val="FFFFFF"/>
-                    </a:solidFill>
+                    <a:noFill/>
                   </a:tcPr>
                 </a:tc>
               </a:tr>
@@ -8200,9 +8140,7 @@
                     </a:p>
                   </a:txBody>
                   <a:tcPr>
-                    <a:solidFill>
-                      <a:srgbClr val="F1F5F9"/>
-                    </a:solidFill>
+                    <a:noFill/>
                   </a:tcPr>
                 </a:tc>
                 <a:tc>
@@ -8223,9 +8161,7 @@
                     </a:p>
                   </a:txBody>
                   <a:tcPr>
-                    <a:solidFill>
-                      <a:srgbClr val="F1F5F9"/>
-                    </a:solidFill>
+                    <a:noFill/>
                   </a:tcPr>
                 </a:tc>
                 <a:tc>
@@ -8246,9 +8182,7 @@
                     </a:p>
                   </a:txBody>
                   <a:tcPr>
-                    <a:solidFill>
-                      <a:srgbClr val="F1F5F9"/>
-                    </a:solidFill>
+                    <a:noFill/>
                   </a:tcPr>
                 </a:tc>
               </a:tr>
@@ -8271,9 +8205,7 @@
                     </a:p>
                   </a:txBody>
                   <a:tcPr>
-                    <a:solidFill>
-                      <a:srgbClr val="FFFFFF"/>
-                    </a:solidFill>
+                    <a:noFill/>
                   </a:tcPr>
                 </a:tc>
                 <a:tc>
@@ -8294,9 +8226,7 @@
                     </a:p>
                   </a:txBody>
                   <a:tcPr>
-                    <a:solidFill>
-                      <a:srgbClr val="FFFFFF"/>
-                    </a:solidFill>
+                    <a:noFill/>
                   </a:tcPr>
                 </a:tc>
                 <a:tc>
@@ -8317,9 +8247,7 @@
                     </a:p>
                   </a:txBody>
                   <a:tcPr>
-                    <a:solidFill>
-                      <a:srgbClr val="FFFFFF"/>
-                    </a:solidFill>
+                    <a:noFill/>
                   </a:tcPr>
                 </a:tc>
               </a:tr>
@@ -8342,9 +8270,7 @@
                     </a:p>
                   </a:txBody>
                   <a:tcPr>
-                    <a:solidFill>
-                      <a:srgbClr val="F1F5F9"/>
-                    </a:solidFill>
+                    <a:noFill/>
                   </a:tcPr>
                 </a:tc>
                 <a:tc>
@@ -8365,9 +8291,7 @@
                     </a:p>
                   </a:txBody>
                   <a:tcPr>
-                    <a:solidFill>
-                      <a:srgbClr val="F1F5F9"/>
-                    </a:solidFill>
+                    <a:noFill/>
                   </a:tcPr>
                 </a:tc>
                 <a:tc>
@@ -8388,9 +8312,7 @@
                     </a:p>
                   </a:txBody>
                   <a:tcPr>
-                    <a:solidFill>
-                      <a:srgbClr val="F1F5F9"/>
-                    </a:solidFill>
+                    <a:noFill/>
                   </a:tcPr>
                 </a:tc>
               </a:tr>
@@ -8413,9 +8335,7 @@
                     </a:p>
                   </a:txBody>
                   <a:tcPr>
-                    <a:solidFill>
-                      <a:srgbClr val="FFFFFF"/>
-                    </a:solidFill>
+                    <a:noFill/>
                   </a:tcPr>
                 </a:tc>
                 <a:tc>
@@ -8436,9 +8356,7 @@
                     </a:p>
                   </a:txBody>
                   <a:tcPr>
-                    <a:solidFill>
-                      <a:srgbClr val="FFFFFF"/>
-                    </a:solidFill>
+                    <a:noFill/>
                   </a:tcPr>
                 </a:tc>
                 <a:tc>
@@ -8459,9 +8377,7 @@
                     </a:p>
                   </a:txBody>
                   <a:tcPr>
-                    <a:solidFill>
-                      <a:srgbClr val="FFFFFF"/>
-                    </a:solidFill>
+                    <a:noFill/>
                   </a:tcPr>
                 </a:tc>
               </a:tr>
@@ -8484,9 +8400,7 @@
                     </a:p>
                   </a:txBody>
                   <a:tcPr>
-                    <a:solidFill>
-                      <a:srgbClr val="F1F5F9"/>
-                    </a:solidFill>
+                    <a:noFill/>
                   </a:tcPr>
                 </a:tc>
                 <a:tc>
@@ -8507,9 +8421,7 @@
                     </a:p>
                   </a:txBody>
                   <a:tcPr>
-                    <a:solidFill>
-                      <a:srgbClr val="F1F5F9"/>
-                    </a:solidFill>
+                    <a:noFill/>
                   </a:tcPr>
                 </a:tc>
                 <a:tc>
@@ -8530,9 +8442,7 @@
                     </a:p>
                   </a:txBody>
                   <a:tcPr>
-                    <a:solidFill>
-                      <a:srgbClr val="F1F5F9"/>
-                    </a:solidFill>
+                    <a:noFill/>
                   </a:tcPr>
                 </a:tc>
               </a:tr>
@@ -8555,9 +8465,7 @@
                     </a:p>
                   </a:txBody>
                   <a:tcPr>
-                    <a:solidFill>
-                      <a:srgbClr val="FFFFFF"/>
-                    </a:solidFill>
+                    <a:noFill/>
                   </a:tcPr>
                 </a:tc>
                 <a:tc>
@@ -8578,9 +8486,7 @@
                     </a:p>
                   </a:txBody>
                   <a:tcPr>
-                    <a:solidFill>
-                      <a:srgbClr val="FFFFFF"/>
-                    </a:solidFill>
+                    <a:noFill/>
                   </a:tcPr>
                 </a:tc>
                 <a:tc>
@@ -8601,9 +8507,7 @@
                     </a:p>
                   </a:txBody>
                   <a:tcPr>
-                    <a:solidFill>
-                      <a:srgbClr val="FFFFFF"/>
-                    </a:solidFill>
+                    <a:noFill/>
                   </a:tcPr>
                 </a:tc>
               </a:tr>
@@ -8626,9 +8530,7 @@
                     </a:p>
                   </a:txBody>
                   <a:tcPr>
-                    <a:solidFill>
-                      <a:srgbClr val="F1F5F9"/>
-                    </a:solidFill>
+                    <a:noFill/>
                   </a:tcPr>
                 </a:tc>
                 <a:tc>
@@ -8649,9 +8551,7 @@
                     </a:p>
                   </a:txBody>
                   <a:tcPr>
-                    <a:solidFill>
-                      <a:srgbClr val="F1F5F9"/>
-                    </a:solidFill>
+                    <a:noFill/>
                   </a:tcPr>
                 </a:tc>
                 <a:tc>
@@ -8672,9 +8572,7 @@
                     </a:p>
                   </a:txBody>
                   <a:tcPr>
-                    <a:solidFill>
-                      <a:srgbClr val="F1F5F9"/>
-                    </a:solidFill>
+                    <a:noFill/>
                   </a:tcPr>
                 </a:tc>
               </a:tr>
@@ -8697,9 +8595,7 @@
                     </a:p>
                   </a:txBody>
                   <a:tcPr>
-                    <a:solidFill>
-                      <a:srgbClr val="FFFFFF"/>
-                    </a:solidFill>
+                    <a:noFill/>
                   </a:tcPr>
                 </a:tc>
                 <a:tc>
@@ -8720,9 +8616,7 @@
                     </a:p>
                   </a:txBody>
                   <a:tcPr>
-                    <a:solidFill>
-                      <a:srgbClr val="FFFFFF"/>
-                    </a:solidFill>
+                    <a:noFill/>
                   </a:tcPr>
                 </a:tc>
                 <a:tc>
@@ -8743,9 +8637,7 @@
                     </a:p>
                   </a:txBody>
                   <a:tcPr>
-                    <a:solidFill>
-                      <a:srgbClr val="FFFFFF"/>
-                    </a:solidFill>
+                    <a:noFill/>
                   </a:tcPr>
                 </a:tc>
               </a:tr>
@@ -8768,9 +8660,7 @@
                     </a:p>
                   </a:txBody>
                   <a:tcPr>
-                    <a:solidFill>
-                      <a:srgbClr val="F1F5F9"/>
-                    </a:solidFill>
+                    <a:noFill/>
                   </a:tcPr>
                 </a:tc>
                 <a:tc>
@@ -8791,9 +8681,7 @@
                     </a:p>
                   </a:txBody>
                   <a:tcPr>
-                    <a:solidFill>
-                      <a:srgbClr val="F1F5F9"/>
-                    </a:solidFill>
+                    <a:noFill/>
                   </a:tcPr>
                 </a:tc>
                 <a:tc>
@@ -8814,9 +8702,7 @@
                     </a:p>
                   </a:txBody>
                   <a:tcPr>
-                    <a:solidFill>
-                      <a:srgbClr val="F1F5F9"/>
-                    </a:solidFill>
+                    <a:noFill/>
                   </a:tcPr>
                 </a:tc>
               </a:tr>
@@ -8839,9 +8725,7 @@
                     </a:p>
                   </a:txBody>
                   <a:tcPr>
-                    <a:solidFill>
-                      <a:srgbClr val="FFFFFF"/>
-                    </a:solidFill>
+                    <a:noFill/>
                   </a:tcPr>
                 </a:tc>
                 <a:tc>
@@ -8862,9 +8746,7 @@
                     </a:p>
                   </a:txBody>
                   <a:tcPr>
-                    <a:solidFill>
-                      <a:srgbClr val="FFFFFF"/>
-                    </a:solidFill>
+                    <a:noFill/>
                   </a:tcPr>
                 </a:tc>
                 <a:tc>
@@ -8885,9 +8767,7 @@
                     </a:p>
                   </a:txBody>
                   <a:tcPr>
-                    <a:solidFill>
-                      <a:srgbClr val="FFFFFF"/>
-                    </a:solidFill>
+                    <a:noFill/>
                   </a:tcPr>
                 </a:tc>
               </a:tr>
@@ -8909,10 +8789,8 @@
           <a:prstGeom prst="roundRect">
             <a:avLst/>
           </a:prstGeom>
-          <a:solidFill>
-            <a:srgbClr val="FFFFFF"/>
-          </a:solidFill>
-          <a:ln>
+          <a:noFill/>
+          <a:ln w="12700">
             <a:solidFill>
               <a:srgbClr val="CBD5E1"/>
             </a:solidFill>
@@ -9028,7 +8906,7 @@
               </a:defRPr>
             </a:pPr>
             <a:r>
-              <a:t>Core Takeaway for viva: </a:t>
+              <a:t>Core Takeaway: </a:t>
             </a:r>
             <a:r>
               <a:rPr b="0">
@@ -9074,7 +8952,7 @@
             <a:avLst/>
           </a:prstGeom>
           <a:solidFill>
-            <a:srgbClr val="F8FAFC"/>
+            <a:srgbClr val="FFFFFF"/>
           </a:solidFill>
           <a:ln>
             <a:noFill/>
@@ -9187,11 +9065,11 @@
             <a:avLst/>
           </a:prstGeom>
           <a:solidFill>
-            <a:srgbClr val="CBD5E1"/>
+            <a:srgbClr val="E2E8F0"/>
           </a:solidFill>
           <a:ln>
             <a:solidFill>
-              <a:srgbClr val="CBD5E1"/>
+              <a:srgbClr val="E2E8F0"/>
             </a:solidFill>
           </a:ln>
         </p:spPr>
@@ -9231,10 +9109,8 @@
           <a:prstGeom prst="roundRect">
             <a:avLst/>
           </a:prstGeom>
-          <a:solidFill>
-            <a:srgbClr val="FFFFFF"/>
-          </a:solidFill>
-          <a:ln>
+          <a:noFill/>
+          <a:ln w="12700">
             <a:solidFill>
               <a:srgbClr val="CBD5E1"/>
             </a:solidFill>
@@ -9297,10 +9173,8 @@
           <a:prstGeom prst="roundRect">
             <a:avLst/>
           </a:prstGeom>
-          <a:solidFill>
-            <a:srgbClr val="FFFFFF"/>
-          </a:solidFill>
-          <a:ln>
+          <a:noFill/>
+          <a:ln w="12700">
             <a:solidFill>
               <a:srgbClr val="CBD5E1"/>
             </a:solidFill>
@@ -9363,10 +9237,8 @@
           <a:prstGeom prst="roundRect">
             <a:avLst/>
           </a:prstGeom>
-          <a:solidFill>
-            <a:srgbClr val="FFFFFF"/>
-          </a:solidFill>
-          <a:ln>
+          <a:noFill/>
+          <a:ln w="12700">
             <a:solidFill>
               <a:srgbClr val="CBD5E1"/>
             </a:solidFill>
@@ -9429,10 +9301,8 @@
           <a:prstGeom prst="roundRect">
             <a:avLst/>
           </a:prstGeom>
-          <a:solidFill>
-            <a:srgbClr val="FFFFFF"/>
-          </a:solidFill>
-          <a:ln>
+          <a:noFill/>
+          <a:ln w="12700">
             <a:solidFill>
               <a:srgbClr val="CBD5E1"/>
             </a:solidFill>
@@ -9495,10 +9365,8 @@
           <a:prstGeom prst="roundRect">
             <a:avLst/>
           </a:prstGeom>
-          <a:solidFill>
-            <a:srgbClr val="FFFFFF"/>
-          </a:solidFill>
-          <a:ln>
+          <a:noFill/>
+          <a:ln w="12700">
             <a:solidFill>
               <a:srgbClr val="CBD5E1"/>
             </a:solidFill>
@@ -9561,10 +9429,8 @@
           <a:prstGeom prst="roundRect">
             <a:avLst/>
           </a:prstGeom>
-          <a:solidFill>
-            <a:srgbClr val="FFFFFF"/>
-          </a:solidFill>
-          <a:ln>
+          <a:noFill/>
+          <a:ln w="12700">
             <a:solidFill>
               <a:srgbClr val="CBD5E1"/>
             </a:solidFill>
